--- a/analyser/houdini/Houdini_i_Norge.pptx
+++ b/analyser/houdini/Houdini_i_Norge.pptx
@@ -20,6 +20,7 @@
     <p:sldId id="268" r:id="rId19"/>
     <p:sldId id="269" r:id="rId20"/>
     <p:sldId id="270" r:id="rId21"/>
+    <p:sldId id="271" r:id="rId22"/>
   </p:sldIdLst>
   <p:sldSz cx="12191695" cy="6858000" type="screen4x3"/>
   <p:notesSz cx="6858000" cy="9144000"/>
@@ -7406,6 +7407,356 @@
 </file>
 
 <file path=ppt/slides/slide15.xml><?xml version="1.0" encoding="utf-8"?>
+<p:sld xmlns:a="http://schemas.openxmlformats.org/drawingml/2006/main" xmlns:p="http://schemas.openxmlformats.org/presentationml/2006/main" xmlns:r="http://schemas.openxmlformats.org/officeDocument/2006/relationships">
+  <p:cSld>
+    <p:bg>
+      <p:bgPr>
+        <a:solidFill>
+          <a:srgbClr val="FFFFFF"/>
+        </a:solidFill>
+        <a:effectLst/>
+      </p:bgPr>
+    </p:bg>
+    <p:spTree>
+      <p:nvGrpSpPr>
+        <p:cNvPr id="1" name=""/>
+        <p:cNvGrpSpPr/>
+        <p:nvPr/>
+      </p:nvGrpSpPr>
+      <p:grpSpPr/>
+      <p:sp>
+        <p:nvSpPr>
+          <p:cNvPr id="2" name="TextBox 1"/>
+          <p:cNvSpPr txBox="1"/>
+          <p:nvPr/>
+        </p:nvSpPr>
+        <p:spPr>
+          <a:xfrm>
+            <a:off x="457200" y="347472"/>
+            <a:ext cx="5486400" cy="274320"/>
+          </a:xfrm>
+          <a:prstGeom prst="rect">
+            <a:avLst/>
+          </a:prstGeom>
+          <a:noFill/>
+        </p:spPr>
+        <p:txBody>
+          <a:bodyPr wrap="square" anchor="t" lIns="0" rIns="0" tIns="0" bIns="0">
+            <a:spAutoFit/>
+          </a:bodyPr>
+          <a:lstStyle/>
+          <a:p>
+            <a:pPr algn="l">
+              <a:spcAft>
+                <a:spcPts val="600"/>
+              </a:spcAft>
+            </a:pPr>
+            <a:r>
+              <a:rPr sz="1100" b="1">
+                <a:solidFill>
+                  <a:srgbClr val="8A8A86"/>
+                </a:solidFill>
+                <a:latin typeface="Inter"/>
+              </a:rPr>
+              <a:t>REFERANSE</a:t>
+            </a:r>
+          </a:p>
+        </p:txBody>
+      </p:sp>
+      <p:sp>
+        <p:nvSpPr>
+          <p:cNvPr id="3" name="TextBox 2"/>
+          <p:cNvSpPr txBox="1"/>
+          <p:nvPr/>
+        </p:nvSpPr>
+        <p:spPr>
+          <a:xfrm>
+            <a:off x="6248095" y="347472"/>
+            <a:ext cx="5486400" cy="274320"/>
+          </a:xfrm>
+          <a:prstGeom prst="rect">
+            <a:avLst/>
+          </a:prstGeom>
+          <a:noFill/>
+        </p:spPr>
+        <p:txBody>
+          <a:bodyPr wrap="square" anchor="t" lIns="0" rIns="0" tIns="0" bIns="0">
+            <a:spAutoFit/>
+          </a:bodyPr>
+          <a:lstStyle/>
+          <a:p>
+            <a:pPr algn="r">
+              <a:spcAft>
+                <a:spcPts val="600"/>
+              </a:spcAft>
+            </a:pPr>
+            <a:r>
+              <a:rPr sz="900" b="0">
+                <a:solidFill>
+                  <a:srgbClr val="8A8A86"/>
+                </a:solidFill>
+                <a:latin typeface="Inter"/>
+              </a:rPr>
+              <a:t>Forslag til Houdini Sportswear  ·  Bent Finset / SODAI</a:t>
+            </a:r>
+          </a:p>
+        </p:txBody>
+      </p:sp>
+      <p:sp>
+        <p:nvSpPr>
+          <p:cNvPr id="4" name="TextBox 3"/>
+          <p:cNvSpPr txBox="1"/>
+          <p:nvPr/>
+        </p:nvSpPr>
+        <p:spPr>
+          <a:xfrm>
+            <a:off x="457200" y="621792"/>
+            <a:ext cx="11277295" cy="914400"/>
+          </a:xfrm>
+          <a:prstGeom prst="rect">
+            <a:avLst/>
+          </a:prstGeom>
+          <a:noFill/>
+        </p:spPr>
+        <p:txBody>
+          <a:bodyPr wrap="square" anchor="t" lIns="0" rIns="0" tIns="0" bIns="0">
+            <a:spAutoFit/>
+          </a:bodyPr>
+          <a:lstStyle/>
+          <a:p>
+            <a:pPr algn="l">
+              <a:spcAft>
+                <a:spcPts val="600"/>
+              </a:spcAft>
+            </a:pPr>
+            <a:r>
+              <a:rPr sz="2800" b="1">
+                <a:solidFill>
+                  <a:srgbClr val="0F0F0F"/>
+                </a:solidFill>
+                <a:latin typeface="Inter"/>
+              </a:rPr>
+              <a:t>SODAI har levert en skreddersydd merkevarebutikk før: FFK concept store i Fredrikstad, 2025</a:t>
+            </a:r>
+          </a:p>
+        </p:txBody>
+      </p:sp>
+      <p:pic>
+        <p:nvPicPr>
+          <p:cNvPr id="5" name="Picture 4" descr="ffk_hero_c7135063x3959352.jpg"/>
+          <p:cNvPicPr>
+            <a:picLocks noChangeAspect="1"/>
+          </p:cNvPicPr>
+          <p:nvPr/>
+        </p:nvPicPr>
+        <p:blipFill>
+          <a:blip r:embed="rId2"/>
+          <a:stretch>
+            <a:fillRect/>
+          </a:stretch>
+        </p:blipFill>
+        <p:spPr>
+          <a:xfrm>
+            <a:off x="457200" y="1691640"/>
+            <a:ext cx="7135063" cy="3959352"/>
+          </a:xfrm>
+          <a:prstGeom prst="rect">
+            <a:avLst/>
+          </a:prstGeom>
+        </p:spPr>
+      </p:pic>
+      <p:pic>
+        <p:nvPicPr>
+          <p:cNvPr id="6" name="Picture 5" descr="ffk_3_c1x1.jpg"/>
+          <p:cNvPicPr>
+            <a:picLocks noChangeAspect="1"/>
+          </p:cNvPicPr>
+          <p:nvPr/>
+        </p:nvPicPr>
+        <p:blipFill>
+          <a:blip r:embed="rId3"/>
+          <a:stretch>
+            <a:fillRect/>
+          </a:stretch>
+        </p:blipFill>
+        <p:spPr>
+          <a:xfrm>
+            <a:off x="7775143" y="1691640"/>
+            <a:ext cx="1888236" cy="1888236"/>
+          </a:xfrm>
+          <a:prstGeom prst="rect">
+            <a:avLst/>
+          </a:prstGeom>
+        </p:spPr>
+      </p:pic>
+      <p:pic>
+        <p:nvPicPr>
+          <p:cNvPr id="7" name="Picture 6" descr="ffk_2_c1x1.jpg"/>
+          <p:cNvPicPr>
+            <a:picLocks noChangeAspect="1"/>
+          </p:cNvPicPr>
+          <p:nvPr/>
+        </p:nvPicPr>
+        <p:blipFill>
+          <a:blip r:embed="rId4"/>
+          <a:stretch>
+            <a:fillRect/>
+          </a:stretch>
+        </p:blipFill>
+        <p:spPr>
+          <a:xfrm>
+            <a:off x="9846259" y="1691640"/>
+            <a:ext cx="1888236" cy="1888236"/>
+          </a:xfrm>
+          <a:prstGeom prst="rect">
+            <a:avLst/>
+          </a:prstGeom>
+        </p:spPr>
+      </p:pic>
+      <p:pic>
+        <p:nvPicPr>
+          <p:cNvPr id="8" name="Picture 7" descr="ffk_0_c1x1.jpg"/>
+          <p:cNvPicPr>
+            <a:picLocks noChangeAspect="1"/>
+          </p:cNvPicPr>
+          <p:nvPr/>
+        </p:nvPicPr>
+        <p:blipFill>
+          <a:blip r:embed="rId5"/>
+          <a:stretch>
+            <a:fillRect/>
+          </a:stretch>
+        </p:blipFill>
+        <p:spPr>
+          <a:xfrm>
+            <a:off x="7775143" y="3762756"/>
+            <a:ext cx="1888236" cy="1888236"/>
+          </a:xfrm>
+          <a:prstGeom prst="rect">
+            <a:avLst/>
+          </a:prstGeom>
+        </p:spPr>
+      </p:pic>
+      <p:pic>
+        <p:nvPicPr>
+          <p:cNvPr id="9" name="Picture 8" descr="ffk_7_c1x1.jpg"/>
+          <p:cNvPicPr>
+            <a:picLocks noChangeAspect="1"/>
+          </p:cNvPicPr>
+          <p:nvPr/>
+        </p:nvPicPr>
+        <p:blipFill>
+          <a:blip r:embed="rId6"/>
+          <a:stretch>
+            <a:fillRect/>
+          </a:stretch>
+        </p:blipFill>
+        <p:spPr>
+          <a:xfrm>
+            <a:off x="9846259" y="3762756"/>
+            <a:ext cx="1888236" cy="1888236"/>
+          </a:xfrm>
+          <a:prstGeom prst="rect">
+            <a:avLst/>
+          </a:prstGeom>
+        </p:spPr>
+      </p:pic>
+      <p:sp>
+        <p:nvSpPr>
+          <p:cNvPr id="10" name="TextBox 9"/>
+          <p:cNvSpPr txBox="1"/>
+          <p:nvPr/>
+        </p:nvSpPr>
+        <p:spPr>
+          <a:xfrm>
+            <a:off x="457200" y="5788152"/>
+            <a:ext cx="11277295" cy="548640"/>
+          </a:xfrm>
+          <a:prstGeom prst="rect">
+            <a:avLst/>
+          </a:prstGeom>
+          <a:noFill/>
+        </p:spPr>
+        <p:txBody>
+          <a:bodyPr wrap="square" anchor="t" lIns="0" rIns="0" tIns="0" bIns="0">
+            <a:spAutoFit/>
+          </a:bodyPr>
+          <a:lstStyle/>
+          <a:p>
+            <a:pPr algn="l">
+              <a:spcAft>
+                <a:spcPts val="600"/>
+              </a:spcAft>
+            </a:pPr>
+            <a:r>
+              <a:rPr sz="1400" b="1">
+                <a:solidFill>
+                  <a:srgbClr val="0F0F0F"/>
+                </a:solidFill>
+                <a:latin typeface="Inter"/>
+              </a:rPr>
+              <a:t>Levert: </a:t>
+            </a:r>
+            <a:r>
+              <a:rPr sz="1400" b="0">
+                <a:solidFill>
+                  <a:srgbClr val="0F0F0F"/>
+                </a:solidFill>
+                <a:latin typeface="Inter"/>
+              </a:rPr>
+              <a:t>garderober, utstillingshyller, kassadisk med lampe, speil, podium og bordet «Plankehaugen». Alt skreddersydd for klubbens egen butikk: lyssatte hyller, sorte draktnisjer og stablet heltre.</a:t>
+            </a:r>
+          </a:p>
+        </p:txBody>
+      </p:sp>
+      <p:sp>
+        <p:nvSpPr>
+          <p:cNvPr id="11" name="TextBox 10"/>
+          <p:cNvSpPr txBox="1"/>
+          <p:nvPr/>
+        </p:nvSpPr>
+        <p:spPr>
+          <a:xfrm>
+            <a:off x="457200" y="6291072"/>
+            <a:ext cx="11277295" cy="411480"/>
+          </a:xfrm>
+          <a:prstGeom prst="rect">
+            <a:avLst/>
+          </a:prstGeom>
+          <a:noFill/>
+        </p:spPr>
+        <p:txBody>
+          <a:bodyPr wrap="square" anchor="b" lIns="0" rIns="0" tIns="0" bIns="0">
+            <a:spAutoFit/>
+          </a:bodyPr>
+          <a:lstStyle/>
+          <a:p>
+            <a:pPr algn="l">
+              <a:spcAft>
+                <a:spcPts val="600"/>
+              </a:spcAft>
+            </a:pPr>
+            <a:r>
+              <a:rPr sz="900" b="0">
+                <a:solidFill>
+                  <a:srgbClr val="8A8A86"/>
+                </a:solidFill>
+                <a:latin typeface="Inter"/>
+              </a:rPr>
+              <a:t>Kunde: Fredrikstad Fotballklubb (FFK). Bilder og leveranse: sodai.no/prosjekter/ffk-concept-store (hentet 24.10.2026).</a:t>
+            </a:r>
+          </a:p>
+        </p:txBody>
+      </p:sp>
+    </p:spTree>
+  </p:cSld>
+  <p:clrMapOvr>
+    <a:masterClrMapping/>
+  </p:clrMapOvr>
+</p:sld>
+</file>
+
+<file path=ppt/slides/slide16.xml><?xml version="1.0" encoding="utf-8"?>
 <p:sld xmlns:a="http://schemas.openxmlformats.org/drawingml/2006/main" xmlns:p="http://schemas.openxmlformats.org/presentationml/2006/main" xmlns:r="http://schemas.openxmlformats.org/officeDocument/2006/relationships">
   <p:cSld>
     <p:bg>

--- a/analyser/houdini/Houdini_i_Norge.pptx
+++ b/analyser/houdini/Houdini_i_Norge.pptx
@@ -21,6 +21,7 @@
     <p:sldId id="269" r:id="rId20"/>
     <p:sldId id="270" r:id="rId21"/>
     <p:sldId id="271" r:id="rId22"/>
+    <p:sldId id="272" r:id="rId23"/>
   </p:sldIdLst>
   <p:sldSz cx="12191695" cy="6858000" type="screen4x3"/>
   <p:notesSz cx="6858000" cy="9144000"/>
@@ -3293,7 +3294,7 @@
                 </a:solidFill>
                 <a:latin typeface="Inter"/>
               </a:rPr>
-              <a:t>Riktig sted i Oslo og Tromsø, levert nøkkelferdig</a:t>
+              <a:t>Mulige beliggenheter i Oslo og Tromsø, levert nøkkelferdig</a:t>
             </a:r>
           </a:p>
         </p:txBody>
@@ -3452,7 +3453,7 @@
                 </a:solidFill>
                 <a:latin typeface="Inter"/>
               </a:rPr>
-              <a:t>TROMSØ: MACK KVARTALET</a:t>
+              <a:t>TROMSØ: MARKED</a:t>
             </a:r>
           </a:p>
         </p:txBody>
@@ -3530,14 +3531,14 @@
                 </a:solidFill>
                 <a:latin typeface="Inter"/>
               </a:rPr>
-              <a:t>Houdini i markedsgata, under samme tak som Nord-Norges største hotell</a:t>
+              <a:t>Norrøna og Bergans har egne butikker i Tromsø. Vi fant ingen som fører Houdini i Nord-Norge</a:t>
             </a:r>
           </a:p>
         </p:txBody>
       </p:sp>
       <p:pic>
         <p:nvPicPr>
-          <p:cNvPr id="5" name="Picture 4" descr="mack_markedsgate_houdini.jpg"/>
+          <p:cNvPr id="5" name="Picture 4" descr="tromso_map_final.jpg"/>
           <p:cNvPicPr>
             <a:picLocks noChangeAspect="1"/>
           </p:cNvPicPr>
@@ -3551,8 +3552,8 @@
         </p:blipFill>
         <p:spPr>
           <a:xfrm>
-            <a:off x="457200" y="1600200"/>
-            <a:ext cx="7589520" cy="4269105"/>
+            <a:off x="457200" y="1645920"/>
+            <a:ext cx="4410221" cy="4526280"/>
           </a:xfrm>
           <a:prstGeom prst="rect">
             <a:avLst/>
@@ -3567,8 +3568,8 @@
         </p:nvSpPr>
         <p:spPr>
           <a:xfrm>
-            <a:off x="8412480" y="1645920"/>
-            <a:ext cx="3322015" cy="457200"/>
+            <a:off x="5233181" y="1645920"/>
+            <a:ext cx="2286000" cy="548640"/>
           </a:xfrm>
           <a:prstGeom prst="rect">
             <a:avLst/>
@@ -3587,13 +3588,13 @@
               </a:spcAft>
             </a:pPr>
             <a:r>
-              <a:rPr sz="2400" b="1">
+              <a:rPr sz="3000" b="1">
                 <a:solidFill>
                   <a:srgbClr val="FE6F45"/>
                 </a:solidFill>
                 <a:latin typeface="Inter"/>
               </a:rPr>
-              <a:t>351 rom</a:t>
+              <a:t>1,31 mill.</a:t>
             </a:r>
           </a:p>
         </p:txBody>
@@ -3606,8 +3607,8 @@
         </p:nvSpPr>
         <p:spPr>
           <a:xfrm>
-            <a:off x="8412480" y="2075688"/>
-            <a:ext cx="3322015" cy="502920"/>
+            <a:off x="5233181" y="2194560"/>
+            <a:ext cx="2286000" cy="365760"/>
           </a:xfrm>
           <a:prstGeom prst="rect">
             <a:avLst/>
@@ -3632,7 +3633,7 @@
                 </a:solidFill>
                 <a:latin typeface="Inter"/>
               </a:rPr>
-              <a:t>Citybox, største hotell i Nord-Norge etter antall rom</a:t>
+              <a:t>gjestedøgn i 2025, +10,3 %</a:t>
             </a:r>
           </a:p>
         </p:txBody>
@@ -3645,8 +3646,8 @@
         </p:nvSpPr>
         <p:spPr>
           <a:xfrm>
-            <a:off x="8412480" y="2670048"/>
-            <a:ext cx="3322015" cy="457200"/>
+            <a:off x="7610621" y="1645920"/>
+            <a:ext cx="2286000" cy="548640"/>
           </a:xfrm>
           <a:prstGeom prst="rect">
             <a:avLst/>
@@ -3665,13 +3666,13 @@
               </a:spcAft>
             </a:pPr>
             <a:r>
-              <a:rPr sz="2400" b="1">
-                <a:solidFill>
-                  <a:srgbClr val="0F0F0F"/>
-                </a:solidFill>
-                <a:latin typeface="Inter"/>
-              </a:rPr>
-              <a:t>ca. 150 000</a:t>
+              <a:rPr sz="3000" b="1">
+                <a:solidFill>
+                  <a:srgbClr val="FE6F45"/>
+                </a:solidFill>
+                <a:latin typeface="Inter"/>
+              </a:rPr>
+              <a:t>59 %</a:t>
             </a:r>
           </a:p>
         </p:txBody>
@@ -3684,8 +3685,8 @@
         </p:nvSpPr>
         <p:spPr>
           <a:xfrm>
-            <a:off x="8412480" y="3099816"/>
-            <a:ext cx="3322015" cy="502920"/>
+            <a:off x="7610621" y="2194560"/>
+            <a:ext cx="2286000" cy="365760"/>
           </a:xfrm>
           <a:prstGeom prst="rect">
             <a:avLst/>
@@ -3710,21 +3711,74 @@
                 </a:solidFill>
                 <a:latin typeface="Inter"/>
               </a:rPr>
-              <a:t>gjestedøgn i året i hotellet (anslag)</a:t>
-            </a:r>
-          </a:p>
-        </p:txBody>
-      </p:sp>
-      <p:sp>
-        <p:nvSpPr>
-          <p:cNvPr id="10" name="TextBox 9"/>
+              <a:t>utenlandske, +20,7 %</a:t>
+            </a:r>
+          </a:p>
+        </p:txBody>
+      </p:sp>
+      <p:sp>
+        <p:nvSpPr>
+          <p:cNvPr id="10" name="Oval 9"/>
+          <p:cNvSpPr/>
+          <p:nvPr/>
+        </p:nvSpPr>
+        <p:spPr>
+          <a:xfrm>
+            <a:off x="5233181" y="2788920"/>
+            <a:ext cx="310896" cy="310896"/>
+          </a:xfrm>
+          <a:prstGeom prst="ellipse">
+            <a:avLst/>
+          </a:prstGeom>
+          <a:solidFill>
+            <a:srgbClr val="FE6F45"/>
+          </a:solidFill>
+          <a:ln>
+            <a:noFill/>
+          </a:ln>
+          <a:effectLst/>
+        </p:spPr>
+        <p:style>
+          <a:lnRef idx="1">
+            <a:schemeClr val="accent1"/>
+          </a:lnRef>
+          <a:fillRef idx="3">
+            <a:schemeClr val="accent1"/>
+          </a:fillRef>
+          <a:effectRef idx="2">
+            <a:schemeClr val="accent1"/>
+          </a:effectRef>
+          <a:fontRef idx="minor">
+            <a:schemeClr val="lt1"/>
+          </a:fontRef>
+        </p:style>
+        <p:txBody>
+          <a:bodyPr rtlCol="0" anchor="ctr" lIns="0" rIns="0" tIns="0" bIns="0"/>
+          <a:lstStyle/>
+          <a:p>
+            <a:pPr algn="ctr"/>
+            <a:r>
+              <a:rPr sz="1200" b="1">
+                <a:solidFill>
+                  <a:srgbClr val="FFFFFF"/>
+                </a:solidFill>
+                <a:latin typeface="Inter"/>
+              </a:rPr>
+              <a:t>H</a:t>
+            </a:r>
+          </a:p>
+        </p:txBody>
+      </p:sp>
+      <p:sp>
+        <p:nvSpPr>
+          <p:cNvPr id="11" name="TextBox 10"/>
           <p:cNvSpPr txBox="1"/>
           <p:nvPr/>
         </p:nvSpPr>
         <p:spPr>
           <a:xfrm>
-            <a:off x="8412480" y="3694176"/>
-            <a:ext cx="3322015" cy="457200"/>
+            <a:off x="5672093" y="2752344"/>
+            <a:ext cx="6062402" cy="411480"/>
           </a:xfrm>
           <a:prstGeom prst="rect">
             <a:avLst/>
@@ -3743,27 +3797,80 @@
               </a:spcAft>
             </a:pPr>
             <a:r>
-              <a:rPr sz="2400" b="1">
+              <a:rPr sz="1200" b="0">
                 <a:solidFill>
                   <a:srgbClr val="0F0F0F"/>
                 </a:solidFill>
                 <a:latin typeface="Inter"/>
               </a:rPr>
-              <a:t>ca. 5 300 m²</a:t>
-            </a:r>
-          </a:p>
-        </p:txBody>
-      </p:sp>
-      <p:sp>
-        <p:nvSpPr>
-          <p:cNvPr id="11" name="TextBox 10"/>
+              <a:t>Mack Kvartalet, Storgata 5. Houdini, forslag</a:t>
+            </a:r>
+          </a:p>
+        </p:txBody>
+      </p:sp>
+      <p:sp>
+        <p:nvSpPr>
+          <p:cNvPr id="12" name="Oval 11"/>
+          <p:cNvSpPr/>
+          <p:nvPr/>
+        </p:nvSpPr>
+        <p:spPr>
+          <a:xfrm>
+            <a:off x="5233181" y="3172968"/>
+            <a:ext cx="310896" cy="310896"/>
+          </a:xfrm>
+          <a:prstGeom prst="ellipse">
+            <a:avLst/>
+          </a:prstGeom>
+          <a:solidFill>
+            <a:srgbClr val="2D2D2B"/>
+          </a:solidFill>
+          <a:ln>
+            <a:noFill/>
+          </a:ln>
+          <a:effectLst/>
+        </p:spPr>
+        <p:style>
+          <a:lnRef idx="1">
+            <a:schemeClr val="accent1"/>
+          </a:lnRef>
+          <a:fillRef idx="3">
+            <a:schemeClr val="accent1"/>
+          </a:fillRef>
+          <a:effectRef idx="2">
+            <a:schemeClr val="accent1"/>
+          </a:effectRef>
+          <a:fontRef idx="minor">
+            <a:schemeClr val="lt1"/>
+          </a:fontRef>
+        </p:style>
+        <p:txBody>
+          <a:bodyPr rtlCol="0" anchor="ctr" lIns="0" rIns="0" tIns="0" bIns="0"/>
+          <a:lstStyle/>
+          <a:p>
+            <a:pPr algn="ctr"/>
+            <a:r>
+              <a:rPr sz="1200" b="1">
+                <a:solidFill>
+                  <a:srgbClr val="FFFFFF"/>
+                </a:solidFill>
+                <a:latin typeface="Inter"/>
+              </a:rPr>
+              <a:t>1</a:t>
+            </a:r>
+          </a:p>
+        </p:txBody>
+      </p:sp>
+      <p:sp>
+        <p:nvSpPr>
+          <p:cNvPr id="13" name="TextBox 12"/>
           <p:cNvSpPr txBox="1"/>
           <p:nvPr/>
         </p:nvSpPr>
         <p:spPr>
           <a:xfrm>
-            <a:off x="8412480" y="4123944"/>
-            <a:ext cx="3322015" cy="502920"/>
+            <a:off x="5672093" y="3136392"/>
+            <a:ext cx="6062402" cy="411480"/>
           </a:xfrm>
           <a:prstGeom prst="rect">
             <a:avLst/>
@@ -3784,25 +3891,78 @@
             <a:r>
               <a:rPr sz="1200" b="0">
                 <a:solidFill>
-                  <a:srgbClr val="8A8A86"/>
-                </a:solidFill>
-                <a:latin typeface="Inter"/>
-              </a:rPr>
-              <a:t>handel og servering under tak</a:t>
-            </a:r>
-          </a:p>
-        </p:txBody>
-      </p:sp>
-      <p:sp>
-        <p:nvSpPr>
-          <p:cNvPr id="12" name="TextBox 11"/>
+                  <a:srgbClr val="0F0F0F"/>
+                </a:solidFill>
+                <a:latin typeface="Inter"/>
+              </a:rPr>
+              <a:t>Norrøna, Alti Nerstranda. Egen butikkdrift</a:t>
+            </a:r>
+          </a:p>
+        </p:txBody>
+      </p:sp>
+      <p:sp>
+        <p:nvSpPr>
+          <p:cNvPr id="14" name="Oval 13"/>
+          <p:cNvSpPr/>
+          <p:nvPr/>
+        </p:nvSpPr>
+        <p:spPr>
+          <a:xfrm>
+            <a:off x="5233181" y="3557016"/>
+            <a:ext cx="310896" cy="310896"/>
+          </a:xfrm>
+          <a:prstGeom prst="ellipse">
+            <a:avLst/>
+          </a:prstGeom>
+          <a:solidFill>
+            <a:srgbClr val="2D2D2B"/>
+          </a:solidFill>
+          <a:ln>
+            <a:noFill/>
+          </a:ln>
+          <a:effectLst/>
+        </p:spPr>
+        <p:style>
+          <a:lnRef idx="1">
+            <a:schemeClr val="accent1"/>
+          </a:lnRef>
+          <a:fillRef idx="3">
+            <a:schemeClr val="accent1"/>
+          </a:fillRef>
+          <a:effectRef idx="2">
+            <a:schemeClr val="accent1"/>
+          </a:effectRef>
+          <a:fontRef idx="minor">
+            <a:schemeClr val="lt1"/>
+          </a:fontRef>
+        </p:style>
+        <p:txBody>
+          <a:bodyPr rtlCol="0" anchor="ctr" lIns="0" rIns="0" tIns="0" bIns="0"/>
+          <a:lstStyle/>
+          <a:p>
+            <a:pPr algn="ctr"/>
+            <a:r>
+              <a:rPr sz="1200" b="1">
+                <a:solidFill>
+                  <a:srgbClr val="FFFFFF"/>
+                </a:solidFill>
+                <a:latin typeface="Inter"/>
+              </a:rPr>
+              <a:t>2</a:t>
+            </a:r>
+          </a:p>
+        </p:txBody>
+      </p:sp>
+      <p:sp>
+        <p:nvSpPr>
+          <p:cNvPr id="15" name="TextBox 14"/>
           <p:cNvSpPr txBox="1"/>
           <p:nvPr/>
         </p:nvSpPr>
         <p:spPr>
           <a:xfrm>
-            <a:off x="8412480" y="4718304"/>
-            <a:ext cx="3322015" cy="457200"/>
+            <a:off x="5672093" y="3520440"/>
+            <a:ext cx="6062402" cy="411480"/>
           </a:xfrm>
           <a:prstGeom prst="rect">
             <a:avLst/>
@@ -3821,27 +3981,80 @@
               </a:spcAft>
             </a:pPr>
             <a:r>
-              <a:rPr sz="2400" b="1">
+              <a:rPr sz="1200" b="0">
                 <a:solidFill>
                   <a:srgbClr val="0F0F0F"/>
                 </a:solidFill>
                 <a:latin typeface="Inter"/>
               </a:rPr>
-              <a:t>Sommer 2027</a:t>
-            </a:r>
-          </a:p>
-        </p:txBody>
-      </p:sp>
-      <p:sp>
-        <p:nvSpPr>
-          <p:cNvPr id="13" name="TextBox 12"/>
+              <a:t>Bergans, Prostneset havneterminal</a:t>
+            </a:r>
+          </a:p>
+        </p:txBody>
+      </p:sp>
+      <p:sp>
+        <p:nvSpPr>
+          <p:cNvPr id="16" name="Oval 15"/>
+          <p:cNvSpPr/>
+          <p:nvPr/>
+        </p:nvSpPr>
+        <p:spPr>
+          <a:xfrm>
+            <a:off x="5233181" y="3941064"/>
+            <a:ext cx="310896" cy="310896"/>
+          </a:xfrm>
+          <a:prstGeom prst="ellipse">
+            <a:avLst/>
+          </a:prstGeom>
+          <a:solidFill>
+            <a:srgbClr val="2D2D2B"/>
+          </a:solidFill>
+          <a:ln>
+            <a:noFill/>
+          </a:ln>
+          <a:effectLst/>
+        </p:spPr>
+        <p:style>
+          <a:lnRef idx="1">
+            <a:schemeClr val="accent1"/>
+          </a:lnRef>
+          <a:fillRef idx="3">
+            <a:schemeClr val="accent1"/>
+          </a:fillRef>
+          <a:effectRef idx="2">
+            <a:schemeClr val="accent1"/>
+          </a:effectRef>
+          <a:fontRef idx="minor">
+            <a:schemeClr val="lt1"/>
+          </a:fontRef>
+        </p:style>
+        <p:txBody>
+          <a:bodyPr rtlCol="0" anchor="ctr" lIns="0" rIns="0" tIns="0" bIns="0"/>
+          <a:lstStyle/>
+          <a:p>
+            <a:pPr algn="ctr"/>
+            <a:r>
+              <a:rPr sz="1200" b="1">
+                <a:solidFill>
+                  <a:srgbClr val="FFFFFF"/>
+                </a:solidFill>
+                <a:latin typeface="Inter"/>
+              </a:rPr>
+              <a:t>3</a:t>
+            </a:r>
+          </a:p>
+        </p:txBody>
+      </p:sp>
+      <p:sp>
+        <p:nvSpPr>
+          <p:cNvPr id="17" name="TextBox 16"/>
           <p:cNvSpPr txBox="1"/>
           <p:nvPr/>
         </p:nvSpPr>
         <p:spPr>
           <a:xfrm>
-            <a:off x="8412480" y="5148072"/>
-            <a:ext cx="3322015" cy="502920"/>
+            <a:off x="5672093" y="3904488"/>
+            <a:ext cx="6062402" cy="411480"/>
           </a:xfrm>
           <a:prstGeom prst="rect">
             <a:avLst/>
@@ -3862,18 +4075,165 @@
             <a:r>
               <a:rPr sz="1200" b="0">
                 <a:solidFill>
-                  <a:srgbClr val="8A8A86"/>
-                </a:solidFill>
-                <a:latin typeface="Inter"/>
-              </a:rPr>
-              <a:t>planlagt åpning</a:t>
-            </a:r>
-          </a:p>
-        </p:txBody>
-      </p:sp>
-      <p:sp>
-        <p:nvSpPr>
-          <p:cNvPr id="14" name="TextBox 13"/>
+                  <a:srgbClr val="0F0F0F"/>
+                </a:solidFill>
+                <a:latin typeface="Inter"/>
+              </a:rPr>
+              <a:t>Naturkompaniet, Storgata 52. Fenix Outdoor</a:t>
+            </a:r>
+          </a:p>
+        </p:txBody>
+      </p:sp>
+      <p:sp>
+        <p:nvSpPr>
+          <p:cNvPr id="18" name="Oval 17"/>
+          <p:cNvSpPr/>
+          <p:nvPr/>
+        </p:nvSpPr>
+        <p:spPr>
+          <a:xfrm>
+            <a:off x="5233181" y="4325112"/>
+            <a:ext cx="310896" cy="310896"/>
+          </a:xfrm>
+          <a:prstGeom prst="ellipse">
+            <a:avLst/>
+          </a:prstGeom>
+          <a:solidFill>
+            <a:srgbClr val="2D2D2B"/>
+          </a:solidFill>
+          <a:ln>
+            <a:noFill/>
+          </a:ln>
+          <a:effectLst/>
+        </p:spPr>
+        <p:style>
+          <a:lnRef idx="1">
+            <a:schemeClr val="accent1"/>
+          </a:lnRef>
+          <a:fillRef idx="3">
+            <a:schemeClr val="accent1"/>
+          </a:fillRef>
+          <a:effectRef idx="2">
+            <a:schemeClr val="accent1"/>
+          </a:effectRef>
+          <a:fontRef idx="minor">
+            <a:schemeClr val="lt1"/>
+          </a:fontRef>
+        </p:style>
+        <p:txBody>
+          <a:bodyPr rtlCol="0" anchor="ctr" lIns="0" rIns="0" tIns="0" bIns="0"/>
+          <a:lstStyle/>
+          <a:p>
+            <a:pPr algn="ctr"/>
+            <a:r>
+              <a:rPr sz="1200" b="1">
+                <a:solidFill>
+                  <a:srgbClr val="FFFFFF"/>
+                </a:solidFill>
+                <a:latin typeface="Inter"/>
+              </a:rPr>
+              <a:t>4</a:t>
+            </a:r>
+          </a:p>
+        </p:txBody>
+      </p:sp>
+      <p:sp>
+        <p:nvSpPr>
+          <p:cNvPr id="19" name="TextBox 18"/>
+          <p:cNvSpPr txBox="1"/>
+          <p:nvPr/>
+        </p:nvSpPr>
+        <p:spPr>
+          <a:xfrm>
+            <a:off x="5672093" y="4288536"/>
+            <a:ext cx="6062402" cy="411480"/>
+          </a:xfrm>
+          <a:prstGeom prst="rect">
+            <a:avLst/>
+          </a:prstGeom>
+          <a:noFill/>
+        </p:spPr>
+        <p:txBody>
+          <a:bodyPr wrap="square" anchor="t" lIns="0" rIns="0" tIns="0" bIns="0">
+            <a:spAutoFit/>
+          </a:bodyPr>
+          <a:lstStyle/>
+          <a:p>
+            <a:pPr algn="l">
+              <a:spcAft>
+                <a:spcPts val="600"/>
+              </a:spcAft>
+            </a:pPr>
+            <a:r>
+              <a:rPr sz="1200" b="0">
+                <a:solidFill>
+                  <a:srgbClr val="0F0F0F"/>
+                </a:solidFill>
+                <a:latin typeface="Inter"/>
+              </a:rPr>
+              <a:t>Nansen Outdoor, Storgata 61. Helly Hansen</a:t>
+            </a:r>
+          </a:p>
+        </p:txBody>
+      </p:sp>
+      <p:sp>
+        <p:nvSpPr>
+          <p:cNvPr id="20" name="TextBox 19"/>
+          <p:cNvSpPr txBox="1"/>
+          <p:nvPr/>
+        </p:nvSpPr>
+        <p:spPr>
+          <a:xfrm>
+            <a:off x="5233181" y="4800600"/>
+            <a:ext cx="6501314" cy="1188720"/>
+          </a:xfrm>
+          <a:prstGeom prst="rect">
+            <a:avLst/>
+          </a:prstGeom>
+          <a:noFill/>
+        </p:spPr>
+        <p:txBody>
+          <a:bodyPr wrap="square" anchor="t" lIns="0" rIns="0" tIns="0" bIns="0">
+            <a:spAutoFit/>
+          </a:bodyPr>
+          <a:lstStyle/>
+          <a:p>
+            <a:pPr algn="l">
+              <a:spcAft>
+                <a:spcPts val="600"/>
+              </a:spcAft>
+            </a:pPr>
+            <a:r>
+              <a:rPr sz="1200" b="0">
+                <a:solidFill>
+                  <a:srgbClr val="0F0F0F"/>
+                </a:solidFill>
+                <a:latin typeface="Inter"/>
+              </a:rPr>
+              <a:t>Utenfor kartet: Tromsø Ski &amp; Sykkel 48 MNOK, Pyramiden Sport 42 MNOK og Sport 1 Jekta 38 MNOK (2025). De fører blant annet Arc’teryx og Norrøna.</a:t>
+            </a:r>
+          </a:p>
+          <a:p>
+            <a:pPr algn="l">
+              <a:spcAft>
+                <a:spcPts val="600"/>
+              </a:spcAft>
+            </a:pPr>
+            <a:r>
+              <a:rPr sz="1200" b="0">
+                <a:solidFill>
+                  <a:srgbClr val="0F0F0F"/>
+                </a:solidFill>
+                <a:latin typeface="Inter"/>
+              </a:rPr>
+              <a:t>Oransje strek: kaiene mellom Mack og Strandtorget, eid av Tromsø Havn.</a:t>
+            </a:r>
+          </a:p>
+        </p:txBody>
+      </p:sp>
+      <p:sp>
+        <p:nvSpPr>
+          <p:cNvPr id="21" name="TextBox 20"/>
           <p:cNvSpPr txBox="1"/>
           <p:nvPr/>
         </p:nvSpPr>
@@ -3905,7 +4265,7 @@
                 </a:solidFill>
                 <a:latin typeface="Inter"/>
               </a:rPr>
-              <a:t>Stillbilde fra film: Eiendomsspar / Mack Kvartalet. Houdini-skiltet er lagt inn av oss som forslag. Anslag: 75 % belegg, 1,6 gjester per rom. 5 300 m² = 8 000 m² minus ca. 2 700 m² kontor. Kilder: eiendomsspar.no, cityboxhotels.com (2026).</a:t>
+              <a:t>Plassering ca. Kilder: Visit Tromsø 2025 (Airbnb ikke med), Proff via søk 24.10.2026, Alti Nerstranda, Bergans, OI Compass 2023, Visit Norway, Tromsø Havn. Kart: © OpenStreetMap-bidragsytere.</a:t>
             </a:r>
           </a:p>
         </p:txBody>
@@ -4048,14 +4408,14 @@
                 </a:solidFill>
                 <a:latin typeface="Inter"/>
               </a:rPr>
-              <a:t>Lokale 1.01 A har inngang både fra gaten og fra markedsgata</a:t>
+              <a:t>Mulig plassering i markedsgata, under samme tak som Nord-Norges største hotell</a:t>
             </a:r>
           </a:p>
         </p:txBody>
       </p:sp>
       <p:pic>
         <p:nvPicPr>
-          <p:cNvPr id="5" name="Picture 4" descr="plan_houdini.jpg"/>
+          <p:cNvPr id="5" name="Picture 4" descr="mack_markedsgate_houdini.jpg"/>
           <p:cNvPicPr>
             <a:picLocks noChangeAspect="1"/>
           </p:cNvPicPr>
@@ -4070,47 +4430,23 @@
         <p:spPr>
           <a:xfrm>
             <a:off x="457200" y="1600200"/>
-            <a:ext cx="7822319" cy="3657600"/>
+            <a:ext cx="7589520" cy="4269105"/>
           </a:xfrm>
           <a:prstGeom prst="rect">
             <a:avLst/>
           </a:prstGeom>
         </p:spPr>
       </p:pic>
-      <p:pic>
-        <p:nvPicPr>
-          <p:cNvPr id="6" name="Picture 5" descr="v-006.jpg"/>
-          <p:cNvPicPr>
-            <a:picLocks noChangeAspect="1"/>
-          </p:cNvPicPr>
-          <p:nvPr/>
-        </p:nvPicPr>
-        <p:blipFill>
-          <a:blip r:embed="rId3"/>
-          <a:stretch>
-            <a:fillRect/>
-          </a:stretch>
-        </p:blipFill>
-        <p:spPr>
-          <a:xfrm>
-            <a:off x="8553839" y="1600200"/>
-            <a:ext cx="3180656" cy="1789119"/>
-          </a:xfrm>
-          <a:prstGeom prst="rect">
-            <a:avLst/>
-          </a:prstGeom>
-        </p:spPr>
-      </p:pic>
-      <p:sp>
-        <p:nvSpPr>
-          <p:cNvPr id="7" name="TextBox 6"/>
+      <p:sp>
+        <p:nvSpPr>
+          <p:cNvPr id="6" name="TextBox 5"/>
           <p:cNvSpPr txBox="1"/>
           <p:nvPr/>
         </p:nvSpPr>
         <p:spPr>
           <a:xfrm>
-            <a:off x="8553839" y="3462471"/>
-            <a:ext cx="3180656" cy="731520"/>
+            <a:off x="8412480" y="1645920"/>
+            <a:ext cx="3322015" cy="457200"/>
           </a:xfrm>
           <a:prstGeom prst="rect">
             <a:avLst/>
@@ -4129,27 +4465,27 @@
               </a:spcAft>
             </a:pPr>
             <a:r>
-              <a:rPr sz="1100" b="0">
-                <a:solidFill>
-                  <a:srgbClr val="8A8A86"/>
-                </a:solidFill>
-                <a:latin typeface="Inter"/>
-              </a:rPr>
-              <a:t>Citybox-hotellet og Mack Kvartalet ved sjøen, med Ishavskatedralen i bakgrunnen.</a:t>
-            </a:r>
-          </a:p>
-        </p:txBody>
-      </p:sp>
-      <p:sp>
-        <p:nvSpPr>
-          <p:cNvPr id="8" name="TextBox 7"/>
+              <a:rPr sz="2400" b="1">
+                <a:solidFill>
+                  <a:srgbClr val="FE6F45"/>
+                </a:solidFill>
+                <a:latin typeface="Inter"/>
+              </a:rPr>
+              <a:t>351 rom</a:t>
+            </a:r>
+          </a:p>
+        </p:txBody>
+      </p:sp>
+      <p:sp>
+        <p:nvSpPr>
+          <p:cNvPr id="7" name="TextBox 6"/>
           <p:cNvSpPr txBox="1"/>
           <p:nvPr/>
         </p:nvSpPr>
         <p:spPr>
           <a:xfrm>
-            <a:off x="457200" y="5394960"/>
-            <a:ext cx="11277295" cy="640080"/>
+            <a:off x="8412480" y="2075688"/>
+            <a:ext cx="3322015" cy="502920"/>
           </a:xfrm>
           <a:prstGeom prst="rect">
             <a:avLst/>
@@ -4168,13 +4504,52 @@
               </a:spcAft>
             </a:pPr>
             <a:r>
-              <a:rPr sz="1400" b="0">
+              <a:rPr sz="1200" b="0">
+                <a:solidFill>
+                  <a:srgbClr val="8A8A86"/>
+                </a:solidFill>
+                <a:latin typeface="Inter"/>
+              </a:rPr>
+              <a:t>Citybox, største hotell i Nord-Norge etter antall rom</a:t>
+            </a:r>
+          </a:p>
+        </p:txBody>
+      </p:sp>
+      <p:sp>
+        <p:nvSpPr>
+          <p:cNvPr id="8" name="TextBox 7"/>
+          <p:cNvSpPr txBox="1"/>
+          <p:nvPr/>
+        </p:nvSpPr>
+        <p:spPr>
+          <a:xfrm>
+            <a:off x="8412480" y="2670048"/>
+            <a:ext cx="3322015" cy="457200"/>
+          </a:xfrm>
+          <a:prstGeom prst="rect">
+            <a:avLst/>
+          </a:prstGeom>
+          <a:noFill/>
+        </p:spPr>
+        <p:txBody>
+          <a:bodyPr wrap="square" anchor="t" lIns="0" rIns="0" tIns="0" bIns="0">
+            <a:spAutoFit/>
+          </a:bodyPr>
+          <a:lstStyle/>
+          <a:p>
+            <a:pPr algn="l">
+              <a:spcAft>
+                <a:spcPts val="600"/>
+              </a:spcAft>
+            </a:pPr>
+            <a:r>
+              <a:rPr sz="2400" b="1">
                 <a:solidFill>
                   <a:srgbClr val="0F0F0F"/>
                 </a:solidFill>
                 <a:latin typeface="Inter"/>
               </a:rPr>
-              <a:t>Nybygget overleveres sommeren 2027, så innredningen kan tegnes inn før overtakelse, uten riving. Tromsø Havn planlegger kaipromenade og flytebrygger foran kvartalet (planinitiativ, ikke vedtatt).</a:t>
+              <a:t>ca. 150 000</a:t>
             </a:r>
           </a:p>
         </p:txBody>
@@ -4182,6 +4557,201 @@
       <p:sp>
         <p:nvSpPr>
           <p:cNvPr id="9" name="TextBox 8"/>
+          <p:cNvSpPr txBox="1"/>
+          <p:nvPr/>
+        </p:nvSpPr>
+        <p:spPr>
+          <a:xfrm>
+            <a:off x="8412480" y="3099816"/>
+            <a:ext cx="3322015" cy="502920"/>
+          </a:xfrm>
+          <a:prstGeom prst="rect">
+            <a:avLst/>
+          </a:prstGeom>
+          <a:noFill/>
+        </p:spPr>
+        <p:txBody>
+          <a:bodyPr wrap="square" anchor="t" lIns="0" rIns="0" tIns="0" bIns="0">
+            <a:spAutoFit/>
+          </a:bodyPr>
+          <a:lstStyle/>
+          <a:p>
+            <a:pPr algn="l">
+              <a:spcAft>
+                <a:spcPts val="600"/>
+              </a:spcAft>
+            </a:pPr>
+            <a:r>
+              <a:rPr sz="1200" b="0">
+                <a:solidFill>
+                  <a:srgbClr val="8A8A86"/>
+                </a:solidFill>
+                <a:latin typeface="Inter"/>
+              </a:rPr>
+              <a:t>gjestedøgn i året i hotellet (anslag)</a:t>
+            </a:r>
+          </a:p>
+        </p:txBody>
+      </p:sp>
+      <p:sp>
+        <p:nvSpPr>
+          <p:cNvPr id="10" name="TextBox 9"/>
+          <p:cNvSpPr txBox="1"/>
+          <p:nvPr/>
+        </p:nvSpPr>
+        <p:spPr>
+          <a:xfrm>
+            <a:off x="8412480" y="3694176"/>
+            <a:ext cx="3322015" cy="457200"/>
+          </a:xfrm>
+          <a:prstGeom prst="rect">
+            <a:avLst/>
+          </a:prstGeom>
+          <a:noFill/>
+        </p:spPr>
+        <p:txBody>
+          <a:bodyPr wrap="square" anchor="t" lIns="0" rIns="0" tIns="0" bIns="0">
+            <a:spAutoFit/>
+          </a:bodyPr>
+          <a:lstStyle/>
+          <a:p>
+            <a:pPr algn="l">
+              <a:spcAft>
+                <a:spcPts val="600"/>
+              </a:spcAft>
+            </a:pPr>
+            <a:r>
+              <a:rPr sz="2400" b="1">
+                <a:solidFill>
+                  <a:srgbClr val="0F0F0F"/>
+                </a:solidFill>
+                <a:latin typeface="Inter"/>
+              </a:rPr>
+              <a:t>ca. 5 300 m²</a:t>
+            </a:r>
+          </a:p>
+        </p:txBody>
+      </p:sp>
+      <p:sp>
+        <p:nvSpPr>
+          <p:cNvPr id="11" name="TextBox 10"/>
+          <p:cNvSpPr txBox="1"/>
+          <p:nvPr/>
+        </p:nvSpPr>
+        <p:spPr>
+          <a:xfrm>
+            <a:off x="8412480" y="4123944"/>
+            <a:ext cx="3322015" cy="502920"/>
+          </a:xfrm>
+          <a:prstGeom prst="rect">
+            <a:avLst/>
+          </a:prstGeom>
+          <a:noFill/>
+        </p:spPr>
+        <p:txBody>
+          <a:bodyPr wrap="square" anchor="t" lIns="0" rIns="0" tIns="0" bIns="0">
+            <a:spAutoFit/>
+          </a:bodyPr>
+          <a:lstStyle/>
+          <a:p>
+            <a:pPr algn="l">
+              <a:spcAft>
+                <a:spcPts val="600"/>
+              </a:spcAft>
+            </a:pPr>
+            <a:r>
+              <a:rPr sz="1200" b="0">
+                <a:solidFill>
+                  <a:srgbClr val="8A8A86"/>
+                </a:solidFill>
+                <a:latin typeface="Inter"/>
+              </a:rPr>
+              <a:t>handel og servering under tak</a:t>
+            </a:r>
+          </a:p>
+        </p:txBody>
+      </p:sp>
+      <p:sp>
+        <p:nvSpPr>
+          <p:cNvPr id="12" name="TextBox 11"/>
+          <p:cNvSpPr txBox="1"/>
+          <p:nvPr/>
+        </p:nvSpPr>
+        <p:spPr>
+          <a:xfrm>
+            <a:off x="8412480" y="4718304"/>
+            <a:ext cx="3322015" cy="457200"/>
+          </a:xfrm>
+          <a:prstGeom prst="rect">
+            <a:avLst/>
+          </a:prstGeom>
+          <a:noFill/>
+        </p:spPr>
+        <p:txBody>
+          <a:bodyPr wrap="square" anchor="t" lIns="0" rIns="0" tIns="0" bIns="0">
+            <a:spAutoFit/>
+          </a:bodyPr>
+          <a:lstStyle/>
+          <a:p>
+            <a:pPr algn="l">
+              <a:spcAft>
+                <a:spcPts val="600"/>
+              </a:spcAft>
+            </a:pPr>
+            <a:r>
+              <a:rPr sz="2400" b="1">
+                <a:solidFill>
+                  <a:srgbClr val="0F0F0F"/>
+                </a:solidFill>
+                <a:latin typeface="Inter"/>
+              </a:rPr>
+              <a:t>Sommer 2027</a:t>
+            </a:r>
+          </a:p>
+        </p:txBody>
+      </p:sp>
+      <p:sp>
+        <p:nvSpPr>
+          <p:cNvPr id="13" name="TextBox 12"/>
+          <p:cNvSpPr txBox="1"/>
+          <p:nvPr/>
+        </p:nvSpPr>
+        <p:spPr>
+          <a:xfrm>
+            <a:off x="8412480" y="5148072"/>
+            <a:ext cx="3322015" cy="502920"/>
+          </a:xfrm>
+          <a:prstGeom prst="rect">
+            <a:avLst/>
+          </a:prstGeom>
+          <a:noFill/>
+        </p:spPr>
+        <p:txBody>
+          <a:bodyPr wrap="square" anchor="t" lIns="0" rIns="0" tIns="0" bIns="0">
+            <a:spAutoFit/>
+          </a:bodyPr>
+          <a:lstStyle/>
+          <a:p>
+            <a:pPr algn="l">
+              <a:spcAft>
+                <a:spcPts val="600"/>
+              </a:spcAft>
+            </a:pPr>
+            <a:r>
+              <a:rPr sz="1200" b="0">
+                <a:solidFill>
+                  <a:srgbClr val="8A8A86"/>
+                </a:solidFill>
+                <a:latin typeface="Inter"/>
+              </a:rPr>
+              <a:t>planlagt åpning</a:t>
+            </a:r>
+          </a:p>
+        </p:txBody>
+      </p:sp>
+      <p:sp>
+        <p:nvSpPr>
+          <p:cNvPr id="14" name="TextBox 13"/>
           <p:cNvSpPr txBox="1"/>
           <p:nvPr/>
         </p:nvSpPr>
@@ -4213,7 +4783,7 @@
                 </a:solidFill>
                 <a:latin typeface="Inter"/>
               </a:rPr>
-              <a:t>Plantegning og stillbilde fra film: Eiendomsspar / Mack Kvartalet. Houdini er tegnet inn av oss som forslag. Areal, vilkår og tilgjengelighet er ikke avklart med Eiendomsspar. Kilde kai: tromso.havn.no.</a:t>
+              <a:t>Stillbilde fra film: Eiendomsspar / Mack Kvartalet. Houdini-skiltet er lagt inn av oss som forslag. Anslag: 75 % belegg, 1,6 gjester per rom. 5 300 m² = 8 000 m² minus ca. 2 700 m² kontor. Kilder: eiendomsspar.no, cityboxhotels.com (2026).</a:t>
             </a:r>
           </a:p>
         </p:txBody>
@@ -4278,7 +4848,7 @@
                 </a:solidFill>
                 <a:latin typeface="Inter"/>
               </a:rPr>
-              <a:t>TROMSØ: TRINNVIS</a:t>
+              <a:t>TROMSØ: MACK KVARTALET</a:t>
             </a:r>
           </a:p>
         </p:txBody>
@@ -4356,7 +4926,315 @@
                 </a:solidFill>
                 <a:latin typeface="Inter"/>
               </a:rPr>
-              <a:t>Tromsø starter som vinterutleie og blir fast butikk når tallene viser det</a:t>
+              <a:t>Lokale 1.01 A har inngang både fra gaten og fra markedsgata</a:t>
+            </a:r>
+          </a:p>
+        </p:txBody>
+      </p:sp>
+      <p:pic>
+        <p:nvPicPr>
+          <p:cNvPr id="5" name="Picture 4" descr="plan_houdini.jpg"/>
+          <p:cNvPicPr>
+            <a:picLocks noChangeAspect="1"/>
+          </p:cNvPicPr>
+          <p:nvPr/>
+        </p:nvPicPr>
+        <p:blipFill>
+          <a:blip r:embed="rId2"/>
+          <a:stretch>
+            <a:fillRect/>
+          </a:stretch>
+        </p:blipFill>
+        <p:spPr>
+          <a:xfrm>
+            <a:off x="457200" y="1600200"/>
+            <a:ext cx="7822319" cy="3657600"/>
+          </a:xfrm>
+          <a:prstGeom prst="rect">
+            <a:avLst/>
+          </a:prstGeom>
+        </p:spPr>
+      </p:pic>
+      <p:pic>
+        <p:nvPicPr>
+          <p:cNvPr id="6" name="Picture 5" descr="v-006.jpg"/>
+          <p:cNvPicPr>
+            <a:picLocks noChangeAspect="1"/>
+          </p:cNvPicPr>
+          <p:nvPr/>
+        </p:nvPicPr>
+        <p:blipFill>
+          <a:blip r:embed="rId3"/>
+          <a:stretch>
+            <a:fillRect/>
+          </a:stretch>
+        </p:blipFill>
+        <p:spPr>
+          <a:xfrm>
+            <a:off x="8553839" y="1600200"/>
+            <a:ext cx="3180656" cy="1789119"/>
+          </a:xfrm>
+          <a:prstGeom prst="rect">
+            <a:avLst/>
+          </a:prstGeom>
+        </p:spPr>
+      </p:pic>
+      <p:sp>
+        <p:nvSpPr>
+          <p:cNvPr id="7" name="TextBox 6"/>
+          <p:cNvSpPr txBox="1"/>
+          <p:nvPr/>
+        </p:nvSpPr>
+        <p:spPr>
+          <a:xfrm>
+            <a:off x="8553839" y="3462471"/>
+            <a:ext cx="3180656" cy="731520"/>
+          </a:xfrm>
+          <a:prstGeom prst="rect">
+            <a:avLst/>
+          </a:prstGeom>
+          <a:noFill/>
+        </p:spPr>
+        <p:txBody>
+          <a:bodyPr wrap="square" anchor="t" lIns="0" rIns="0" tIns="0" bIns="0">
+            <a:spAutoFit/>
+          </a:bodyPr>
+          <a:lstStyle/>
+          <a:p>
+            <a:pPr algn="l">
+              <a:spcAft>
+                <a:spcPts val="600"/>
+              </a:spcAft>
+            </a:pPr>
+            <a:r>
+              <a:rPr sz="1100" b="0">
+                <a:solidFill>
+                  <a:srgbClr val="8A8A86"/>
+                </a:solidFill>
+                <a:latin typeface="Inter"/>
+              </a:rPr>
+              <a:t>Citybox-hotellet og Mack Kvartalet ved sjøen, med Ishavskatedralen i bakgrunnen.</a:t>
+            </a:r>
+          </a:p>
+        </p:txBody>
+      </p:sp>
+      <p:sp>
+        <p:nvSpPr>
+          <p:cNvPr id="8" name="TextBox 7"/>
+          <p:cNvSpPr txBox="1"/>
+          <p:nvPr/>
+        </p:nvSpPr>
+        <p:spPr>
+          <a:xfrm>
+            <a:off x="457200" y="5394960"/>
+            <a:ext cx="11277295" cy="640080"/>
+          </a:xfrm>
+          <a:prstGeom prst="rect">
+            <a:avLst/>
+          </a:prstGeom>
+          <a:noFill/>
+        </p:spPr>
+        <p:txBody>
+          <a:bodyPr wrap="square" anchor="t" lIns="0" rIns="0" tIns="0" bIns="0">
+            <a:spAutoFit/>
+          </a:bodyPr>
+          <a:lstStyle/>
+          <a:p>
+            <a:pPr algn="l">
+              <a:spcAft>
+                <a:spcPts val="600"/>
+              </a:spcAft>
+            </a:pPr>
+            <a:r>
+              <a:rPr sz="1400" b="0">
+                <a:solidFill>
+                  <a:srgbClr val="0F0F0F"/>
+                </a:solidFill>
+                <a:latin typeface="Inter"/>
+              </a:rPr>
+              <a:t>Nybygget overleveres sommeren 2027, så innredningen kan tegnes inn før overtakelse, uten riving. Tromsø Havn planlegger kaipromenade og flytebrygger foran kvartalet (planinitiativ, ikke vedtatt).</a:t>
+            </a:r>
+          </a:p>
+        </p:txBody>
+      </p:sp>
+      <p:sp>
+        <p:nvSpPr>
+          <p:cNvPr id="9" name="TextBox 8"/>
+          <p:cNvSpPr txBox="1"/>
+          <p:nvPr/>
+        </p:nvSpPr>
+        <p:spPr>
+          <a:xfrm>
+            <a:off x="457200" y="6291072"/>
+            <a:ext cx="11277295" cy="411480"/>
+          </a:xfrm>
+          <a:prstGeom prst="rect">
+            <a:avLst/>
+          </a:prstGeom>
+          <a:noFill/>
+        </p:spPr>
+        <p:txBody>
+          <a:bodyPr wrap="square" anchor="b" lIns="0" rIns="0" tIns="0" bIns="0">
+            <a:spAutoFit/>
+          </a:bodyPr>
+          <a:lstStyle/>
+          <a:p>
+            <a:pPr algn="l">
+              <a:spcAft>
+                <a:spcPts val="600"/>
+              </a:spcAft>
+            </a:pPr>
+            <a:r>
+              <a:rPr sz="900" b="0">
+                <a:solidFill>
+                  <a:srgbClr val="8A8A86"/>
+                </a:solidFill>
+                <a:latin typeface="Inter"/>
+              </a:rPr>
+              <a:t>Plantegning og stillbilde fra film: Eiendomsspar / Mack Kvartalet. Houdini er tegnet inn av oss som forslag. Areal, vilkår og tilgjengelighet er ikke avklart med Eiendomsspar. Kilde kai: tromso.havn.no.</a:t>
+            </a:r>
+          </a:p>
+        </p:txBody>
+      </p:sp>
+    </p:spTree>
+  </p:cSld>
+  <p:clrMapOvr>
+    <a:masterClrMapping/>
+  </p:clrMapOvr>
+</p:sld>
+</file>
+
+<file path=ppt/slides/slide13.xml><?xml version="1.0" encoding="utf-8"?>
+<p:sld xmlns:a="http://schemas.openxmlformats.org/drawingml/2006/main" xmlns:p="http://schemas.openxmlformats.org/presentationml/2006/main" xmlns:r="http://schemas.openxmlformats.org/officeDocument/2006/relationships">
+  <p:cSld>
+    <p:bg>
+      <p:bgPr>
+        <a:solidFill>
+          <a:srgbClr val="FFFFFF"/>
+        </a:solidFill>
+        <a:effectLst/>
+      </p:bgPr>
+    </p:bg>
+    <p:spTree>
+      <p:nvGrpSpPr>
+        <p:cNvPr id="1" name=""/>
+        <p:cNvGrpSpPr/>
+        <p:nvPr/>
+      </p:nvGrpSpPr>
+      <p:grpSpPr/>
+      <p:sp>
+        <p:nvSpPr>
+          <p:cNvPr id="2" name="TextBox 1"/>
+          <p:cNvSpPr txBox="1"/>
+          <p:nvPr/>
+        </p:nvSpPr>
+        <p:spPr>
+          <a:xfrm>
+            <a:off x="457200" y="347472"/>
+            <a:ext cx="5486400" cy="274320"/>
+          </a:xfrm>
+          <a:prstGeom prst="rect">
+            <a:avLst/>
+          </a:prstGeom>
+          <a:noFill/>
+        </p:spPr>
+        <p:txBody>
+          <a:bodyPr wrap="square" anchor="t" lIns="0" rIns="0" tIns="0" bIns="0">
+            <a:spAutoFit/>
+          </a:bodyPr>
+          <a:lstStyle/>
+          <a:p>
+            <a:pPr algn="l">
+              <a:spcAft>
+                <a:spcPts val="600"/>
+              </a:spcAft>
+            </a:pPr>
+            <a:r>
+              <a:rPr sz="1100" b="1">
+                <a:solidFill>
+                  <a:srgbClr val="8A8A86"/>
+                </a:solidFill>
+                <a:latin typeface="Inter"/>
+              </a:rPr>
+              <a:t>TROMSØ: TRINNVIS</a:t>
+            </a:r>
+          </a:p>
+        </p:txBody>
+      </p:sp>
+      <p:sp>
+        <p:nvSpPr>
+          <p:cNvPr id="3" name="TextBox 2"/>
+          <p:cNvSpPr txBox="1"/>
+          <p:nvPr/>
+        </p:nvSpPr>
+        <p:spPr>
+          <a:xfrm>
+            <a:off x="6248095" y="347472"/>
+            <a:ext cx="5486400" cy="274320"/>
+          </a:xfrm>
+          <a:prstGeom prst="rect">
+            <a:avLst/>
+          </a:prstGeom>
+          <a:noFill/>
+        </p:spPr>
+        <p:txBody>
+          <a:bodyPr wrap="square" anchor="t" lIns="0" rIns="0" tIns="0" bIns="0">
+            <a:spAutoFit/>
+          </a:bodyPr>
+          <a:lstStyle/>
+          <a:p>
+            <a:pPr algn="r">
+              <a:spcAft>
+                <a:spcPts val="600"/>
+              </a:spcAft>
+            </a:pPr>
+            <a:r>
+              <a:rPr sz="900" b="0">
+                <a:solidFill>
+                  <a:srgbClr val="8A8A86"/>
+                </a:solidFill>
+                <a:latin typeface="Inter"/>
+              </a:rPr>
+              <a:t>Forslag til Houdini Sportswear  ·  Bent Finset / SODAI</a:t>
+            </a:r>
+          </a:p>
+        </p:txBody>
+      </p:sp>
+      <p:sp>
+        <p:nvSpPr>
+          <p:cNvPr id="4" name="TextBox 3"/>
+          <p:cNvSpPr txBox="1"/>
+          <p:nvPr/>
+        </p:nvSpPr>
+        <p:spPr>
+          <a:xfrm>
+            <a:off x="457200" y="621792"/>
+            <a:ext cx="11277295" cy="914400"/>
+          </a:xfrm>
+          <a:prstGeom prst="rect">
+            <a:avLst/>
+          </a:prstGeom>
+          <a:noFill/>
+        </p:spPr>
+        <p:txBody>
+          <a:bodyPr wrap="square" anchor="t" lIns="0" rIns="0" tIns="0" bIns="0">
+            <a:spAutoFit/>
+          </a:bodyPr>
+          <a:lstStyle/>
+          <a:p>
+            <a:pPr algn="l">
+              <a:spcAft>
+                <a:spcPts val="600"/>
+              </a:spcAft>
+            </a:pPr>
+            <a:r>
+              <a:rPr sz="2800" b="1">
+                <a:solidFill>
+                  <a:srgbClr val="0F0F0F"/>
+                </a:solidFill>
+                <a:latin typeface="Inter"/>
+              </a:rPr>
+              <a:t>Tromsø kan testes med vinterutleie før en eventuell fast butikk</a:t>
             </a:r>
           </a:p>
         </p:txBody>
@@ -5065,7 +5943,7 @@
                 </a:solidFill>
                 <a:latin typeface="Inter"/>
               </a:rPr>
-              <a:t>Fast butikk i Mack Kvartalet</a:t>
+              <a:t>Mulig fast butikk i Mack Kvartalet</a:t>
             </a:r>
           </a:p>
         </p:txBody>
@@ -5105,7 +5983,7 @@
                 </a:solidFill>
                 <a:latin typeface="Inter"/>
               </a:rPr>
-              <a:t>Åpner samtidig med hotellet, med inngang fra gaten og markedsgata.</a:t>
+              <a:t>Kan åpne samtidig med hotellet, med inngang fra gaten og markedsgata.</a:t>
             </a:r>
           </a:p>
           <a:p>
@@ -5122,7 +6000,7 @@
                 </a:solidFill>
                 <a:latin typeface="Inter"/>
               </a:rPr>
-              <a:t>Beslutning tas på tallene fra trinn 1.</a:t>
+              <a:t>Houdini kan beslutte på tallene fra trinn 1.</a:t>
             </a:r>
           </a:p>
           <a:p>
@@ -5179,1116 +6057,6 @@
                 <a:latin typeface="Inter"/>
               </a:rPr>
               <a:t>Anslag (antatt): 65 % bruttomargin, lønn 0,63 MNOK, husleie 0,09 MNOK, innredning og logistikk 0,35 MNOK, 8 % andre kostnader. Utleieinntekter ikke medregnet. Kilder: Advanti Q4 2025 (leie), houdinisportswear.com (utleie siden 2012).</a:t>
-            </a:r>
-          </a:p>
-        </p:txBody>
-      </p:sp>
-    </p:spTree>
-  </p:cSld>
-  <p:clrMapOvr>
-    <a:masterClrMapping/>
-  </p:clrMapOvr>
-</p:sld>
-</file>
-
-<file path=ppt/slides/slide13.xml><?xml version="1.0" encoding="utf-8"?>
-<p:sld xmlns:a="http://schemas.openxmlformats.org/drawingml/2006/main" xmlns:p="http://schemas.openxmlformats.org/presentationml/2006/main" xmlns:r="http://schemas.openxmlformats.org/officeDocument/2006/relationships">
-  <p:cSld>
-    <p:bg>
-      <p:bgPr>
-        <a:solidFill>
-          <a:srgbClr val="FFFFFF"/>
-        </a:solidFill>
-        <a:effectLst/>
-      </p:bgPr>
-    </p:bg>
-    <p:spTree>
-      <p:nvGrpSpPr>
-        <p:cNvPr id="1" name=""/>
-        <p:cNvGrpSpPr/>
-        <p:nvPr/>
-      </p:nvGrpSpPr>
-      <p:grpSpPr/>
-      <p:sp>
-        <p:nvSpPr>
-          <p:cNvPr id="2" name="TextBox 1"/>
-          <p:cNvSpPr txBox="1"/>
-          <p:nvPr/>
-        </p:nvSpPr>
-        <p:spPr>
-          <a:xfrm>
-            <a:off x="457200" y="347472"/>
-            <a:ext cx="5486400" cy="274320"/>
-          </a:xfrm>
-          <a:prstGeom prst="rect">
-            <a:avLst/>
-          </a:prstGeom>
-          <a:noFill/>
-        </p:spPr>
-        <p:txBody>
-          <a:bodyPr wrap="square" anchor="t" lIns="0" rIns="0" tIns="0" bIns="0">
-            <a:spAutoFit/>
-          </a:bodyPr>
-          <a:lstStyle/>
-          <a:p>
-            <a:pPr algn="l">
-              <a:spcAft>
-                <a:spcPts val="600"/>
-              </a:spcAft>
-            </a:pPr>
-            <a:r>
-              <a:rPr sz="1100" b="1">
-                <a:solidFill>
-                  <a:srgbClr val="8A8A86"/>
-                </a:solidFill>
-                <a:latin typeface="Inter"/>
-              </a:rPr>
-              <a:t>TIDSLINJE OG MODELL</a:t>
-            </a:r>
-          </a:p>
-        </p:txBody>
-      </p:sp>
-      <p:sp>
-        <p:nvSpPr>
-          <p:cNvPr id="3" name="TextBox 2"/>
-          <p:cNvSpPr txBox="1"/>
-          <p:nvPr/>
-        </p:nvSpPr>
-        <p:spPr>
-          <a:xfrm>
-            <a:off x="6248095" y="347472"/>
-            <a:ext cx="5486400" cy="274320"/>
-          </a:xfrm>
-          <a:prstGeom prst="rect">
-            <a:avLst/>
-          </a:prstGeom>
-          <a:noFill/>
-        </p:spPr>
-        <p:txBody>
-          <a:bodyPr wrap="square" anchor="t" lIns="0" rIns="0" tIns="0" bIns="0">
-            <a:spAutoFit/>
-          </a:bodyPr>
-          <a:lstStyle/>
-          <a:p>
-            <a:pPr algn="r">
-              <a:spcAft>
-                <a:spcPts val="600"/>
-              </a:spcAft>
-            </a:pPr>
-            <a:r>
-              <a:rPr sz="900" b="0">
-                <a:solidFill>
-                  <a:srgbClr val="8A8A86"/>
-                </a:solidFill>
-                <a:latin typeface="Inter"/>
-              </a:rPr>
-              <a:t>Forslag til Houdini Sportswear  ·  Bent Finset / SODAI</a:t>
-            </a:r>
-          </a:p>
-        </p:txBody>
-      </p:sp>
-      <p:sp>
-        <p:nvSpPr>
-          <p:cNvPr id="4" name="TextBox 3"/>
-          <p:cNvSpPr txBox="1"/>
-          <p:nvPr/>
-        </p:nvSpPr>
-        <p:spPr>
-          <a:xfrm>
-            <a:off x="457200" y="621792"/>
-            <a:ext cx="11277295" cy="914400"/>
-          </a:xfrm>
-          <a:prstGeom prst="rect">
-            <a:avLst/>
-          </a:prstGeom>
-          <a:noFill/>
-        </p:spPr>
-        <p:txBody>
-          <a:bodyPr wrap="square" anchor="t" lIns="0" rIns="0" tIns="0" bIns="0">
-            <a:spAutoFit/>
-          </a:bodyPr>
-          <a:lstStyle/>
-          <a:p>
-            <a:pPr algn="l">
-              <a:spcAft>
-                <a:spcPts val="600"/>
-              </a:spcAft>
-            </a:pPr>
-            <a:r>
-              <a:rPr sz="2800" b="1">
-                <a:solidFill>
-                  <a:srgbClr val="0F0F0F"/>
-                </a:solidFill>
-                <a:latin typeface="Inter"/>
-              </a:rPr>
-              <a:t>Forprosjektet er gratis og uforpliktende. Houdini velger fritt etter hvert trinn</a:t>
-            </a:r>
-          </a:p>
-        </p:txBody>
-      </p:sp>
-      <p:sp>
-        <p:nvSpPr>
-          <p:cNvPr id="5" name="Rectangle 4"/>
-          <p:cNvSpPr/>
-          <p:nvPr/>
-        </p:nvSpPr>
-        <p:spPr>
-          <a:xfrm>
-            <a:off x="457200" y="2331720"/>
-            <a:ext cx="11277295" cy="36576"/>
-          </a:xfrm>
-          <a:prstGeom prst="rect">
-            <a:avLst/>
-          </a:prstGeom>
-          <a:solidFill>
-            <a:srgbClr val="E6E6E3"/>
-          </a:solidFill>
-          <a:ln>
-            <a:noFill/>
-          </a:ln>
-          <a:effectLst/>
-        </p:spPr>
-        <p:style>
-          <a:lnRef idx="1">
-            <a:schemeClr val="accent1"/>
-          </a:lnRef>
-          <a:fillRef idx="3">
-            <a:schemeClr val="accent1"/>
-          </a:fillRef>
-          <a:effectRef idx="2">
-            <a:schemeClr val="accent1"/>
-          </a:effectRef>
-          <a:fontRef idx="minor">
-            <a:schemeClr val="lt1"/>
-          </a:fontRef>
-        </p:style>
-        <p:txBody>
-          <a:bodyPr rtlCol="0" anchor="ctr"/>
-          <a:lstStyle/>
-          <a:p>
-            <a:pPr algn="ctr"/>
-          </a:p>
-        </p:txBody>
-      </p:sp>
-      <p:sp>
-        <p:nvSpPr>
-          <p:cNvPr id="6" name="Oval 5"/>
-          <p:cNvSpPr/>
-          <p:nvPr/>
-        </p:nvSpPr>
-        <p:spPr>
-          <a:xfrm>
-            <a:off x="457200" y="2194560"/>
-            <a:ext cx="310896" cy="310896"/>
-          </a:xfrm>
-          <a:prstGeom prst="ellipse">
-            <a:avLst/>
-          </a:prstGeom>
-          <a:solidFill>
-            <a:srgbClr val="0F0F0F"/>
-          </a:solidFill>
-          <a:ln>
-            <a:noFill/>
-          </a:ln>
-          <a:effectLst/>
-        </p:spPr>
-        <p:style>
-          <a:lnRef idx="1">
-            <a:schemeClr val="accent1"/>
-          </a:lnRef>
-          <a:fillRef idx="3">
-            <a:schemeClr val="accent1"/>
-          </a:fillRef>
-          <a:effectRef idx="2">
-            <a:schemeClr val="accent1"/>
-          </a:effectRef>
-          <a:fontRef idx="minor">
-            <a:schemeClr val="lt1"/>
-          </a:fontRef>
-        </p:style>
-        <p:txBody>
-          <a:bodyPr rtlCol="0" anchor="ctr" lIns="0" rIns="0" tIns="0" bIns="0"/>
-          <a:lstStyle/>
-          <a:p>
-            <a:pPr algn="ctr"/>
-            <a:r>
-              <a:rPr sz="1200" b="1">
-                <a:solidFill>
-                  <a:srgbClr val="FFFFFF"/>
-                </a:solidFill>
-                <a:latin typeface="Inter"/>
-              </a:rPr>
-              <a:t>1</a:t>
-            </a:r>
-          </a:p>
-        </p:txBody>
-      </p:sp>
-      <p:sp>
-        <p:nvSpPr>
-          <p:cNvPr id="7" name="TextBox 6"/>
-          <p:cNvSpPr txBox="1"/>
-          <p:nvPr/>
-        </p:nvSpPr>
-        <p:spPr>
-          <a:xfrm>
-            <a:off x="457200" y="2651760"/>
-            <a:ext cx="1742389" cy="365760"/>
-          </a:xfrm>
-          <a:prstGeom prst="rect">
-            <a:avLst/>
-          </a:prstGeom>
-          <a:noFill/>
-        </p:spPr>
-        <p:txBody>
-          <a:bodyPr wrap="square" anchor="t" lIns="0" rIns="0" tIns="0" bIns="0">
-            <a:spAutoFit/>
-          </a:bodyPr>
-          <a:lstStyle/>
-          <a:p>
-            <a:pPr algn="l">
-              <a:spcAft>
-                <a:spcPts val="600"/>
-              </a:spcAft>
-            </a:pPr>
-            <a:r>
-              <a:rPr sz="1500" b="1">
-                <a:solidFill>
-                  <a:srgbClr val="0F0F0F"/>
-                </a:solidFill>
-                <a:latin typeface="Inter"/>
-              </a:rPr>
-              <a:t>Nov. 2026</a:t>
-            </a:r>
-          </a:p>
-        </p:txBody>
-      </p:sp>
-      <p:sp>
-        <p:nvSpPr>
-          <p:cNvPr id="8" name="TextBox 7"/>
-          <p:cNvSpPr txBox="1"/>
-          <p:nvPr/>
-        </p:nvSpPr>
-        <p:spPr>
-          <a:xfrm>
-            <a:off x="457200" y="3017520"/>
-            <a:ext cx="1742389" cy="914400"/>
-          </a:xfrm>
-          <a:prstGeom prst="rect">
-            <a:avLst/>
-          </a:prstGeom>
-          <a:noFill/>
-        </p:spPr>
-        <p:txBody>
-          <a:bodyPr wrap="square" anchor="t" lIns="0" rIns="0" tIns="0" bIns="0">
-            <a:spAutoFit/>
-          </a:bodyPr>
-          <a:lstStyle/>
-          <a:p>
-            <a:pPr algn="l">
-              <a:spcAft>
-                <a:spcPts val="600"/>
-              </a:spcAft>
-            </a:pPr>
-            <a:r>
-              <a:rPr sz="1300" b="0">
-                <a:solidFill>
-                  <a:srgbClr val="0F0F0F"/>
-                </a:solidFill>
-                <a:latin typeface="Inter"/>
-              </a:rPr>
-              <a:t>Møte og befaring i Akersgata 41</a:t>
-            </a:r>
-          </a:p>
-        </p:txBody>
-      </p:sp>
-      <p:sp>
-        <p:nvSpPr>
-          <p:cNvPr id="9" name="Oval 8"/>
-          <p:cNvSpPr/>
-          <p:nvPr/>
-        </p:nvSpPr>
-        <p:spPr>
-          <a:xfrm>
-            <a:off x="2336749" y="2194560"/>
-            <a:ext cx="310896" cy="310896"/>
-          </a:xfrm>
-          <a:prstGeom prst="ellipse">
-            <a:avLst/>
-          </a:prstGeom>
-          <a:solidFill>
-            <a:srgbClr val="FE6F45"/>
-          </a:solidFill>
-          <a:ln>
-            <a:noFill/>
-          </a:ln>
-          <a:effectLst/>
-        </p:spPr>
-        <p:style>
-          <a:lnRef idx="1">
-            <a:schemeClr val="accent1"/>
-          </a:lnRef>
-          <a:fillRef idx="3">
-            <a:schemeClr val="accent1"/>
-          </a:fillRef>
-          <a:effectRef idx="2">
-            <a:schemeClr val="accent1"/>
-          </a:effectRef>
-          <a:fontRef idx="minor">
-            <a:schemeClr val="lt1"/>
-          </a:fontRef>
-        </p:style>
-        <p:txBody>
-          <a:bodyPr rtlCol="0" anchor="ctr" lIns="0" rIns="0" tIns="0" bIns="0"/>
-          <a:lstStyle/>
-          <a:p>
-            <a:pPr algn="ctr"/>
-            <a:r>
-              <a:rPr sz="1200" b="1">
-                <a:solidFill>
-                  <a:srgbClr val="FFFFFF"/>
-                </a:solidFill>
-                <a:latin typeface="Inter"/>
-              </a:rPr>
-              <a:t>2</a:t>
-            </a:r>
-          </a:p>
-        </p:txBody>
-      </p:sp>
-      <p:sp>
-        <p:nvSpPr>
-          <p:cNvPr id="10" name="TextBox 9"/>
-          <p:cNvSpPr txBox="1"/>
-          <p:nvPr/>
-        </p:nvSpPr>
-        <p:spPr>
-          <a:xfrm>
-            <a:off x="2336749" y="2651760"/>
-            <a:ext cx="1742389" cy="365760"/>
-          </a:xfrm>
-          <a:prstGeom prst="rect">
-            <a:avLst/>
-          </a:prstGeom>
-          <a:noFill/>
-        </p:spPr>
-        <p:txBody>
-          <a:bodyPr wrap="square" anchor="t" lIns="0" rIns="0" tIns="0" bIns="0">
-            <a:spAutoFit/>
-          </a:bodyPr>
-          <a:lstStyle/>
-          <a:p>
-            <a:pPr algn="l">
-              <a:spcAft>
-                <a:spcPts val="600"/>
-              </a:spcAft>
-            </a:pPr>
-            <a:r>
-              <a:rPr sz="1500" b="1">
-                <a:solidFill>
-                  <a:srgbClr val="0F0F0F"/>
-                </a:solidFill>
-                <a:latin typeface="Inter"/>
-              </a:rPr>
-              <a:t>Des. 2026</a:t>
-            </a:r>
-          </a:p>
-        </p:txBody>
-      </p:sp>
-      <p:sp>
-        <p:nvSpPr>
-          <p:cNvPr id="11" name="TextBox 10"/>
-          <p:cNvSpPr txBox="1"/>
-          <p:nvPr/>
-        </p:nvSpPr>
-        <p:spPr>
-          <a:xfrm>
-            <a:off x="2336749" y="3017520"/>
-            <a:ext cx="1742389" cy="914400"/>
-          </a:xfrm>
-          <a:prstGeom prst="rect">
-            <a:avLst/>
-          </a:prstGeom>
-          <a:noFill/>
-        </p:spPr>
-        <p:txBody>
-          <a:bodyPr wrap="square" anchor="t" lIns="0" rIns="0" tIns="0" bIns="0">
-            <a:spAutoFit/>
-          </a:bodyPr>
-          <a:lstStyle/>
-          <a:p>
-            <a:pPr algn="l">
-              <a:spcAft>
-                <a:spcPts val="600"/>
-              </a:spcAft>
-            </a:pPr>
-            <a:r>
-              <a:rPr sz="1300" b="0">
-                <a:solidFill>
-                  <a:srgbClr val="0F0F0F"/>
-                </a:solidFill>
-                <a:latin typeface="Inter"/>
-              </a:rPr>
-              <a:t>Forprosjekt Oslo og Tromsø. Gratis</a:t>
-            </a:r>
-          </a:p>
-        </p:txBody>
-      </p:sp>
-      <p:sp>
-        <p:nvSpPr>
-          <p:cNvPr id="12" name="Oval 11"/>
-          <p:cNvSpPr/>
-          <p:nvPr/>
-        </p:nvSpPr>
-        <p:spPr>
-          <a:xfrm>
-            <a:off x="4216298" y="2194560"/>
-            <a:ext cx="310896" cy="310896"/>
-          </a:xfrm>
-          <a:prstGeom prst="ellipse">
-            <a:avLst/>
-          </a:prstGeom>
-          <a:solidFill>
-            <a:srgbClr val="0F0F0F"/>
-          </a:solidFill>
-          <a:ln>
-            <a:noFill/>
-          </a:ln>
-          <a:effectLst/>
-        </p:spPr>
-        <p:style>
-          <a:lnRef idx="1">
-            <a:schemeClr val="accent1"/>
-          </a:lnRef>
-          <a:fillRef idx="3">
-            <a:schemeClr val="accent1"/>
-          </a:fillRef>
-          <a:effectRef idx="2">
-            <a:schemeClr val="accent1"/>
-          </a:effectRef>
-          <a:fontRef idx="minor">
-            <a:schemeClr val="lt1"/>
-          </a:fontRef>
-        </p:style>
-        <p:txBody>
-          <a:bodyPr rtlCol="0" anchor="ctr" lIns="0" rIns="0" tIns="0" bIns="0"/>
-          <a:lstStyle/>
-          <a:p>
-            <a:pPr algn="ctr"/>
-            <a:r>
-              <a:rPr sz="1200" b="1">
-                <a:solidFill>
-                  <a:srgbClr val="FFFFFF"/>
-                </a:solidFill>
-                <a:latin typeface="Inter"/>
-              </a:rPr>
-              <a:t>3</a:t>
-            </a:r>
-          </a:p>
-        </p:txBody>
-      </p:sp>
-      <p:sp>
-        <p:nvSpPr>
-          <p:cNvPr id="13" name="TextBox 12"/>
-          <p:cNvSpPr txBox="1"/>
-          <p:nvPr/>
-        </p:nvSpPr>
-        <p:spPr>
-          <a:xfrm>
-            <a:off x="4216298" y="2651760"/>
-            <a:ext cx="1742389" cy="365760"/>
-          </a:xfrm>
-          <a:prstGeom prst="rect">
-            <a:avLst/>
-          </a:prstGeom>
-          <a:noFill/>
-        </p:spPr>
-        <p:txBody>
-          <a:bodyPr wrap="square" anchor="t" lIns="0" rIns="0" tIns="0" bIns="0">
-            <a:spAutoFit/>
-          </a:bodyPr>
-          <a:lstStyle/>
-          <a:p>
-            <a:pPr algn="l">
-              <a:spcAft>
-                <a:spcPts val="600"/>
-              </a:spcAft>
-            </a:pPr>
-            <a:r>
-              <a:rPr sz="1500" b="1">
-                <a:solidFill>
-                  <a:srgbClr val="0F0F0F"/>
-                </a:solidFill>
-                <a:latin typeface="Inter"/>
-              </a:rPr>
-              <a:t>Q1 2027</a:t>
-            </a:r>
-          </a:p>
-        </p:txBody>
-      </p:sp>
-      <p:sp>
-        <p:nvSpPr>
-          <p:cNvPr id="14" name="TextBox 13"/>
-          <p:cNvSpPr txBox="1"/>
-          <p:nvPr/>
-        </p:nvSpPr>
-        <p:spPr>
-          <a:xfrm>
-            <a:off x="4216298" y="3017520"/>
-            <a:ext cx="1742389" cy="914400"/>
-          </a:xfrm>
-          <a:prstGeom prst="rect">
-            <a:avLst/>
-          </a:prstGeom>
-          <a:noFill/>
-        </p:spPr>
-        <p:txBody>
-          <a:bodyPr wrap="square" anchor="t" lIns="0" rIns="0" tIns="0" bIns="0">
-            <a:spAutoFit/>
-          </a:bodyPr>
-          <a:lstStyle/>
-          <a:p>
-            <a:pPr algn="l">
-              <a:spcAft>
-                <a:spcPts val="600"/>
-              </a:spcAft>
-            </a:pPr>
-            <a:r>
-              <a:rPr sz="1300" b="0">
-                <a:solidFill>
-                  <a:srgbClr val="0F0F0F"/>
-                </a:solidFill>
-                <a:latin typeface="Inter"/>
-              </a:rPr>
-              <a:t>Leiekontrakt og fast pris på tegning og produksjon</a:t>
-            </a:r>
-          </a:p>
-        </p:txBody>
-      </p:sp>
-      <p:sp>
-        <p:nvSpPr>
-          <p:cNvPr id="15" name="Oval 14"/>
-          <p:cNvSpPr/>
-          <p:nvPr/>
-        </p:nvSpPr>
-        <p:spPr>
-          <a:xfrm>
-            <a:off x="6095847" y="2194560"/>
-            <a:ext cx="310896" cy="310896"/>
-          </a:xfrm>
-          <a:prstGeom prst="ellipse">
-            <a:avLst/>
-          </a:prstGeom>
-          <a:solidFill>
-            <a:srgbClr val="0F0F0F"/>
-          </a:solidFill>
-          <a:ln>
-            <a:noFill/>
-          </a:ln>
-          <a:effectLst/>
-        </p:spPr>
-        <p:style>
-          <a:lnRef idx="1">
-            <a:schemeClr val="accent1"/>
-          </a:lnRef>
-          <a:fillRef idx="3">
-            <a:schemeClr val="accent1"/>
-          </a:fillRef>
-          <a:effectRef idx="2">
-            <a:schemeClr val="accent1"/>
-          </a:effectRef>
-          <a:fontRef idx="minor">
-            <a:schemeClr val="lt1"/>
-          </a:fontRef>
-        </p:style>
-        <p:txBody>
-          <a:bodyPr rtlCol="0" anchor="ctr" lIns="0" rIns="0" tIns="0" bIns="0"/>
-          <a:lstStyle/>
-          <a:p>
-            <a:pPr algn="ctr"/>
-            <a:r>
-              <a:rPr sz="1200" b="1">
-                <a:solidFill>
-                  <a:srgbClr val="FFFFFF"/>
-                </a:solidFill>
-                <a:latin typeface="Inter"/>
-              </a:rPr>
-              <a:t>4</a:t>
-            </a:r>
-          </a:p>
-        </p:txBody>
-      </p:sp>
-      <p:sp>
-        <p:nvSpPr>
-          <p:cNvPr id="16" name="TextBox 15"/>
-          <p:cNvSpPr txBox="1"/>
-          <p:nvPr/>
-        </p:nvSpPr>
-        <p:spPr>
-          <a:xfrm>
-            <a:off x="6095847" y="2651760"/>
-            <a:ext cx="1742389" cy="365760"/>
-          </a:xfrm>
-          <a:prstGeom prst="rect">
-            <a:avLst/>
-          </a:prstGeom>
-          <a:noFill/>
-        </p:spPr>
-        <p:txBody>
-          <a:bodyPr wrap="square" anchor="t" lIns="0" rIns="0" tIns="0" bIns="0">
-            <a:spAutoFit/>
-          </a:bodyPr>
-          <a:lstStyle/>
-          <a:p>
-            <a:pPr algn="l">
-              <a:spcAft>
-                <a:spcPts val="600"/>
-              </a:spcAft>
-            </a:pPr>
-            <a:r>
-              <a:rPr sz="1500" b="1">
-                <a:solidFill>
-                  <a:srgbClr val="0F0F0F"/>
-                </a:solidFill>
-                <a:latin typeface="Inter"/>
-              </a:rPr>
-              <a:t>Vinter 2027</a:t>
-            </a:r>
-          </a:p>
-        </p:txBody>
-      </p:sp>
-      <p:sp>
-        <p:nvSpPr>
-          <p:cNvPr id="17" name="TextBox 16"/>
-          <p:cNvSpPr txBox="1"/>
-          <p:nvPr/>
-        </p:nvSpPr>
-        <p:spPr>
-          <a:xfrm>
-            <a:off x="6095847" y="3017520"/>
-            <a:ext cx="1742389" cy="914400"/>
-          </a:xfrm>
-          <a:prstGeom prst="rect">
-            <a:avLst/>
-          </a:prstGeom>
-          <a:noFill/>
-        </p:spPr>
-        <p:txBody>
-          <a:bodyPr wrap="square" anchor="t" lIns="0" rIns="0" tIns="0" bIns="0">
-            <a:spAutoFit/>
-          </a:bodyPr>
-          <a:lstStyle/>
-          <a:p>
-            <a:pPr algn="l">
-              <a:spcAft>
-                <a:spcPts val="600"/>
-              </a:spcAft>
-            </a:pPr>
-            <a:r>
-              <a:rPr sz="1300" b="0">
-                <a:solidFill>
-                  <a:srgbClr val="0F0F0F"/>
-                </a:solidFill>
-                <a:latin typeface="Inter"/>
-              </a:rPr>
-              <a:t>Pop-up og utleie i Tromsø</a:t>
-            </a:r>
-          </a:p>
-        </p:txBody>
-      </p:sp>
-      <p:sp>
-        <p:nvSpPr>
-          <p:cNvPr id="18" name="Oval 17"/>
-          <p:cNvSpPr/>
-          <p:nvPr/>
-        </p:nvSpPr>
-        <p:spPr>
-          <a:xfrm>
-            <a:off x="7975396" y="2194560"/>
-            <a:ext cx="310896" cy="310896"/>
-          </a:xfrm>
-          <a:prstGeom prst="ellipse">
-            <a:avLst/>
-          </a:prstGeom>
-          <a:solidFill>
-            <a:srgbClr val="0F0F0F"/>
-          </a:solidFill>
-          <a:ln>
-            <a:noFill/>
-          </a:ln>
-          <a:effectLst/>
-        </p:spPr>
-        <p:style>
-          <a:lnRef idx="1">
-            <a:schemeClr val="accent1"/>
-          </a:lnRef>
-          <a:fillRef idx="3">
-            <a:schemeClr val="accent1"/>
-          </a:fillRef>
-          <a:effectRef idx="2">
-            <a:schemeClr val="accent1"/>
-          </a:effectRef>
-          <a:fontRef idx="minor">
-            <a:schemeClr val="lt1"/>
-          </a:fontRef>
-        </p:style>
-        <p:txBody>
-          <a:bodyPr rtlCol="0" anchor="ctr" lIns="0" rIns="0" tIns="0" bIns="0"/>
-          <a:lstStyle/>
-          <a:p>
-            <a:pPr algn="ctr"/>
-            <a:r>
-              <a:rPr sz="1200" b="1">
-                <a:solidFill>
-                  <a:srgbClr val="FFFFFF"/>
-                </a:solidFill>
-                <a:latin typeface="Inter"/>
-              </a:rPr>
-              <a:t>5</a:t>
-            </a:r>
-          </a:p>
-        </p:txBody>
-      </p:sp>
-      <p:sp>
-        <p:nvSpPr>
-          <p:cNvPr id="19" name="TextBox 18"/>
-          <p:cNvSpPr txBox="1"/>
-          <p:nvPr/>
-        </p:nvSpPr>
-        <p:spPr>
-          <a:xfrm>
-            <a:off x="7975396" y="2651760"/>
-            <a:ext cx="1742389" cy="365760"/>
-          </a:xfrm>
-          <a:prstGeom prst="rect">
-            <a:avLst/>
-          </a:prstGeom>
-          <a:noFill/>
-        </p:spPr>
-        <p:txBody>
-          <a:bodyPr wrap="square" anchor="t" lIns="0" rIns="0" tIns="0" bIns="0">
-            <a:spAutoFit/>
-          </a:bodyPr>
-          <a:lstStyle/>
-          <a:p>
-            <a:pPr algn="l">
-              <a:spcAft>
-                <a:spcPts val="600"/>
-              </a:spcAft>
-            </a:pPr>
-            <a:r>
-              <a:rPr sz="1500" b="1">
-                <a:solidFill>
-                  <a:srgbClr val="0F0F0F"/>
-                </a:solidFill>
-                <a:latin typeface="Inter"/>
-              </a:rPr>
-              <a:t>Sommer 2027</a:t>
-            </a:r>
-          </a:p>
-        </p:txBody>
-      </p:sp>
-      <p:sp>
-        <p:nvSpPr>
-          <p:cNvPr id="20" name="TextBox 19"/>
-          <p:cNvSpPr txBox="1"/>
-          <p:nvPr/>
-        </p:nvSpPr>
-        <p:spPr>
-          <a:xfrm>
-            <a:off x="7975396" y="3017520"/>
-            <a:ext cx="1742389" cy="914400"/>
-          </a:xfrm>
-          <a:prstGeom prst="rect">
-            <a:avLst/>
-          </a:prstGeom>
-          <a:noFill/>
-        </p:spPr>
-        <p:txBody>
-          <a:bodyPr wrap="square" anchor="t" lIns="0" rIns="0" tIns="0" bIns="0">
-            <a:spAutoFit/>
-          </a:bodyPr>
-          <a:lstStyle/>
-          <a:p>
-            <a:pPr algn="l">
-              <a:spcAft>
-                <a:spcPts val="600"/>
-              </a:spcAft>
-            </a:pPr>
-            <a:r>
-              <a:rPr sz="1300" b="0">
-                <a:solidFill>
-                  <a:srgbClr val="0F0F0F"/>
-                </a:solidFill>
-                <a:latin typeface="Inter"/>
-              </a:rPr>
-              <a:t>Butikk i Mack Kvartalet</a:t>
-            </a:r>
-          </a:p>
-        </p:txBody>
-      </p:sp>
-      <p:sp>
-        <p:nvSpPr>
-          <p:cNvPr id="21" name="Oval 20"/>
-          <p:cNvSpPr/>
-          <p:nvPr/>
-        </p:nvSpPr>
-        <p:spPr>
-          <a:xfrm>
-            <a:off x="9854945" y="2194560"/>
-            <a:ext cx="310896" cy="310896"/>
-          </a:xfrm>
-          <a:prstGeom prst="ellipse">
-            <a:avLst/>
-          </a:prstGeom>
-          <a:solidFill>
-            <a:srgbClr val="0F0F0F"/>
-          </a:solidFill>
-          <a:ln>
-            <a:noFill/>
-          </a:ln>
-          <a:effectLst/>
-        </p:spPr>
-        <p:style>
-          <a:lnRef idx="1">
-            <a:schemeClr val="accent1"/>
-          </a:lnRef>
-          <a:fillRef idx="3">
-            <a:schemeClr val="accent1"/>
-          </a:fillRef>
-          <a:effectRef idx="2">
-            <a:schemeClr val="accent1"/>
-          </a:effectRef>
-          <a:fontRef idx="minor">
-            <a:schemeClr val="lt1"/>
-          </a:fontRef>
-        </p:style>
-        <p:txBody>
-          <a:bodyPr rtlCol="0" anchor="ctr" lIns="0" rIns="0" tIns="0" bIns="0"/>
-          <a:lstStyle/>
-          <a:p>
-            <a:pPr algn="ctr"/>
-            <a:r>
-              <a:rPr sz="1200" b="1">
-                <a:solidFill>
-                  <a:srgbClr val="FFFFFF"/>
-                </a:solidFill>
-                <a:latin typeface="Inter"/>
-              </a:rPr>
-              <a:t>6</a:t>
-            </a:r>
-          </a:p>
-        </p:txBody>
-      </p:sp>
-      <p:sp>
-        <p:nvSpPr>
-          <p:cNvPr id="22" name="TextBox 21"/>
-          <p:cNvSpPr txBox="1"/>
-          <p:nvPr/>
-        </p:nvSpPr>
-        <p:spPr>
-          <a:xfrm>
-            <a:off x="9854945" y="2651760"/>
-            <a:ext cx="1742389" cy="365760"/>
-          </a:xfrm>
-          <a:prstGeom prst="rect">
-            <a:avLst/>
-          </a:prstGeom>
-          <a:noFill/>
-        </p:spPr>
-        <p:txBody>
-          <a:bodyPr wrap="square" anchor="t" lIns="0" rIns="0" tIns="0" bIns="0">
-            <a:spAutoFit/>
-          </a:bodyPr>
-          <a:lstStyle/>
-          <a:p>
-            <a:pPr algn="l">
-              <a:spcAft>
-                <a:spcPts val="600"/>
-              </a:spcAft>
-            </a:pPr>
-            <a:r>
-              <a:rPr sz="1500" b="1">
-                <a:solidFill>
-                  <a:srgbClr val="0F0F0F"/>
-                </a:solidFill>
-                <a:latin typeface="Inter"/>
-              </a:rPr>
-              <a:t>Høst 2027</a:t>
-            </a:r>
-          </a:p>
-        </p:txBody>
-      </p:sp>
-      <p:sp>
-        <p:nvSpPr>
-          <p:cNvPr id="23" name="TextBox 22"/>
-          <p:cNvSpPr txBox="1"/>
-          <p:nvPr/>
-        </p:nvSpPr>
-        <p:spPr>
-          <a:xfrm>
-            <a:off x="9854945" y="3017520"/>
-            <a:ext cx="1742389" cy="914400"/>
-          </a:xfrm>
-          <a:prstGeom prst="rect">
-            <a:avLst/>
-          </a:prstGeom>
-          <a:noFill/>
-        </p:spPr>
-        <p:txBody>
-          <a:bodyPr wrap="square" anchor="t" lIns="0" rIns="0" tIns="0" bIns="0">
-            <a:spAutoFit/>
-          </a:bodyPr>
-          <a:lstStyle/>
-          <a:p>
-            <a:pPr algn="l">
-              <a:spcAft>
-                <a:spcPts val="600"/>
-              </a:spcAft>
-            </a:pPr>
-            <a:r>
-              <a:rPr sz="1300" b="0">
-                <a:solidFill>
-                  <a:srgbClr val="0F0F0F"/>
-                </a:solidFill>
-                <a:latin typeface="Inter"/>
-              </a:rPr>
-              <a:t>Houdini Circle Oslo åpner</a:t>
-            </a:r>
-          </a:p>
-        </p:txBody>
-      </p:sp>
-      <p:sp>
-        <p:nvSpPr>
-          <p:cNvPr id="24" name="TextBox 23"/>
-          <p:cNvSpPr txBox="1"/>
-          <p:nvPr/>
-        </p:nvSpPr>
-        <p:spPr>
-          <a:xfrm>
-            <a:off x="457200" y="4206240"/>
-            <a:ext cx="11277295" cy="1463040"/>
-          </a:xfrm>
-          <a:prstGeom prst="rect">
-            <a:avLst/>
-          </a:prstGeom>
-          <a:noFill/>
-        </p:spPr>
-        <p:txBody>
-          <a:bodyPr wrap="square" anchor="t" lIns="0" rIns="0" tIns="0" bIns="0">
-            <a:spAutoFit/>
-          </a:bodyPr>
-          <a:lstStyle/>
-          <a:p>
-            <a:pPr algn="l">
-              <a:spcAft>
-                <a:spcPts val="800"/>
-              </a:spcAft>
-            </a:pPr>
-            <a:r>
-              <a:rPr sz="1500" b="1">
-                <a:solidFill>
-                  <a:srgbClr val="0F0F0F"/>
-                </a:solidFill>
-                <a:latin typeface="Inter"/>
-              </a:rPr>
-              <a:t>Forprosjekt: </a:t>
-            </a:r>
-            <a:r>
-              <a:rPr sz="1500" b="0">
-                <a:solidFill>
-                  <a:srgbClr val="0F0F0F"/>
-                </a:solidFill>
-                <a:latin typeface="Inter"/>
-              </a:rPr>
-              <a:t>konsept, planløsning og illustrasjoner, uten kostnad og uten forpliktelse.</a:t>
-            </a:r>
-          </a:p>
-          <a:p>
-            <a:pPr algn="l">
-              <a:spcAft>
-                <a:spcPts val="800"/>
-              </a:spcAft>
-            </a:pPr>
-            <a:r>
-              <a:rPr sz="1500" b="1">
-                <a:solidFill>
-                  <a:srgbClr val="0F0F0F"/>
-                </a:solidFill>
-                <a:latin typeface="Inter"/>
-              </a:rPr>
-              <a:t>Tegning, produksjon og montasje: </a:t>
-            </a:r>
-            <a:r>
-              <a:rPr sz="1500" b="0">
-                <a:solidFill>
-                  <a:srgbClr val="0F0F0F"/>
-                </a:solidFill>
-                <a:latin typeface="Inter"/>
-              </a:rPr>
-              <a:t>fast pris per trinn, som Houdini godkjenner før oppstart.</a:t>
-            </a:r>
-          </a:p>
-          <a:p>
-            <a:pPr algn="l">
-              <a:spcAft>
-                <a:spcPts val="800"/>
-              </a:spcAft>
-            </a:pPr>
-            <a:r>
-              <a:rPr sz="1500" b="1">
-                <a:solidFill>
-                  <a:srgbClr val="0F0F0F"/>
-                </a:solidFill>
-                <a:latin typeface="Inter"/>
-              </a:rPr>
-              <a:t>Lokale og forhandling: </a:t>
-            </a:r>
-            <a:r>
-              <a:rPr sz="1500" b="0">
-                <a:solidFill>
-                  <a:srgbClr val="0F0F0F"/>
-                </a:solidFill>
-                <a:latin typeface="Inter"/>
-              </a:rPr>
-              <a:t>Bent fører dialogen med gårdeier, i samarbeid med megleren dere bruker.</a:t>
-            </a:r>
-          </a:p>
-        </p:txBody>
-      </p:sp>
-      <p:sp>
-        <p:nvSpPr>
-          <p:cNvPr id="25" name="TextBox 24"/>
-          <p:cNvSpPr txBox="1"/>
-          <p:nvPr/>
-        </p:nvSpPr>
-        <p:spPr>
-          <a:xfrm>
-            <a:off x="457200" y="6291072"/>
-            <a:ext cx="11277295" cy="411480"/>
-          </a:xfrm>
-          <a:prstGeom prst="rect">
-            <a:avLst/>
-          </a:prstGeom>
-          <a:noFill/>
-        </p:spPr>
-        <p:txBody>
-          <a:bodyPr wrap="square" anchor="b" lIns="0" rIns="0" tIns="0" bIns="0">
-            <a:spAutoFit/>
-          </a:bodyPr>
-          <a:lstStyle/>
-          <a:p>
-            <a:pPr algn="l">
-              <a:spcAft>
-                <a:spcPts val="600"/>
-              </a:spcAft>
-            </a:pPr>
-            <a:r>
-              <a:rPr sz="900" b="0">
-                <a:solidFill>
-                  <a:srgbClr val="8A8A86"/>
-                </a:solidFill>
-                <a:latin typeface="Inter"/>
-              </a:rPr>
-              <a:t>Tidslinjen er et forslag og avhenger av lokaler, kontrakter og Houdinis egne beslutninger.</a:t>
             </a:r>
           </a:p>
         </p:txBody>
@@ -6353,7 +6121,7 @@
                 </a:solidFill>
                 <a:latin typeface="Inter"/>
               </a:rPr>
-              <a:t>LEVERANSE</a:t>
+              <a:t>TIDSLINJE OG MODELL</a:t>
             </a:r>
           </a:p>
         </p:txBody>
@@ -6431,7 +6199,7 @@
                 </a:solidFill>
                 <a:latin typeface="Inter"/>
               </a:rPr>
-              <a:t>SODAI leverer butikken fra første skisse til nøkkelferdig åpning</a:t>
+              <a:t>Forprosjektet er gratis og uforpliktende. Houdini velger fritt etter hvert trinn</a:t>
             </a:r>
           </a:p>
         </p:txBody>
@@ -6444,14 +6212,14 @@
         </p:nvSpPr>
         <p:spPr>
           <a:xfrm>
-            <a:off x="457200" y="1828800"/>
-            <a:ext cx="2109155" cy="2377440"/>
+            <a:off x="457200" y="2331720"/>
+            <a:ext cx="11277295" cy="36576"/>
           </a:xfrm>
           <a:prstGeom prst="rect">
             <a:avLst/>
           </a:prstGeom>
           <a:solidFill>
-            <a:srgbClr val="F4F4F2"/>
+            <a:srgbClr val="E6E6E3"/>
           </a:solidFill>
           <a:ln>
             <a:noFill/>
@@ -6488,8 +6256,8 @@
         </p:nvSpPr>
         <p:spPr>
           <a:xfrm>
-            <a:off x="640080" y="2011680"/>
-            <a:ext cx="384048" cy="384048"/>
+            <a:off x="457200" y="2194560"/>
+            <a:ext cx="310896" cy="310896"/>
           </a:xfrm>
           <a:prstGeom prst="ellipse">
             <a:avLst/>
@@ -6522,7 +6290,7 @@
           <a:p>
             <a:pPr algn="ctr"/>
             <a:r>
-              <a:rPr sz="1400" b="1">
+              <a:rPr sz="1200" b="1">
                 <a:solidFill>
                   <a:srgbClr val="FFFFFF"/>
                 </a:solidFill>
@@ -6541,8 +6309,8 @@
         </p:nvSpPr>
         <p:spPr>
           <a:xfrm>
-            <a:off x="640080" y="2560320"/>
-            <a:ext cx="1743395" cy="685800"/>
+            <a:off x="457200" y="2651760"/>
+            <a:ext cx="1742389" cy="365760"/>
           </a:xfrm>
           <a:prstGeom prst="rect">
             <a:avLst/>
@@ -6561,13 +6329,13 @@
               </a:spcAft>
             </a:pPr>
             <a:r>
-              <a:rPr sz="1700" b="1">
+              <a:rPr sz="1500" b="1">
                 <a:solidFill>
                   <a:srgbClr val="0F0F0F"/>
                 </a:solidFill>
                 <a:latin typeface="Inter"/>
               </a:rPr>
-              <a:t>Lokale og vilkår</a:t>
+              <a:t>Nov. 2026</a:t>
             </a:r>
           </a:p>
         </p:txBody>
@@ -6580,8 +6348,8 @@
         </p:nvSpPr>
         <p:spPr>
           <a:xfrm>
-            <a:off x="640080" y="3246120"/>
-            <a:ext cx="1743395" cy="914400"/>
+            <a:off x="457200" y="3017520"/>
+            <a:ext cx="1742389" cy="914400"/>
           </a:xfrm>
           <a:prstGeom prst="rect">
             <a:avLst/>
@@ -6600,33 +6368,33 @@
               </a:spcAft>
             </a:pPr>
             <a:r>
-              <a:rPr sz="1400" b="0">
+              <a:rPr sz="1300" b="0">
                 <a:solidFill>
                   <a:srgbClr val="0F0F0F"/>
                 </a:solidFill>
                 <a:latin typeface="Inter"/>
               </a:rPr>
-              <a:t>Søk, befaring og forhandling med gårdeier</a:t>
-            </a:r>
-          </a:p>
-        </p:txBody>
-      </p:sp>
-      <p:sp>
-        <p:nvSpPr>
-          <p:cNvPr id="9" name="Rectangle 8"/>
+              <a:t>Møte og befaring i aktuelle lokaler</a:t>
+            </a:r>
+          </a:p>
+        </p:txBody>
+      </p:sp>
+      <p:sp>
+        <p:nvSpPr>
+          <p:cNvPr id="9" name="Oval 8"/>
           <p:cNvSpPr/>
           <p:nvPr/>
         </p:nvSpPr>
         <p:spPr>
           <a:xfrm>
-            <a:off x="2749235" y="1828800"/>
-            <a:ext cx="2109155" cy="2377440"/>
-          </a:xfrm>
-          <a:prstGeom prst="rect">
+            <a:off x="2336749" y="2194560"/>
+            <a:ext cx="310896" cy="310896"/>
+          </a:xfrm>
+          <a:prstGeom prst="ellipse">
             <a:avLst/>
           </a:prstGeom>
           <a:solidFill>
-            <a:srgbClr val="0F0F0F"/>
+            <a:srgbClr val="FE6F45"/>
           </a:solidFill>
           <a:ln>
             <a:noFill/>
@@ -6648,29 +6416,116 @@
           </a:fontRef>
         </p:style>
         <p:txBody>
-          <a:bodyPr rtlCol="0" anchor="ctr"/>
+          <a:bodyPr rtlCol="0" anchor="ctr" lIns="0" rIns="0" tIns="0" bIns="0"/>
           <a:lstStyle/>
           <a:p>
             <a:pPr algn="ctr"/>
-          </a:p>
-        </p:txBody>
-      </p:sp>
-      <p:sp>
-        <p:nvSpPr>
-          <p:cNvPr id="10" name="Oval 9"/>
+            <a:r>
+              <a:rPr sz="1200" b="1">
+                <a:solidFill>
+                  <a:srgbClr val="FFFFFF"/>
+                </a:solidFill>
+                <a:latin typeface="Inter"/>
+              </a:rPr>
+              <a:t>2</a:t>
+            </a:r>
+          </a:p>
+        </p:txBody>
+      </p:sp>
+      <p:sp>
+        <p:nvSpPr>
+          <p:cNvPr id="10" name="TextBox 9"/>
+          <p:cNvSpPr txBox="1"/>
+          <p:nvPr/>
+        </p:nvSpPr>
+        <p:spPr>
+          <a:xfrm>
+            <a:off x="2336749" y="2651760"/>
+            <a:ext cx="1742389" cy="365760"/>
+          </a:xfrm>
+          <a:prstGeom prst="rect">
+            <a:avLst/>
+          </a:prstGeom>
+          <a:noFill/>
+        </p:spPr>
+        <p:txBody>
+          <a:bodyPr wrap="square" anchor="t" lIns="0" rIns="0" tIns="0" bIns="0">
+            <a:spAutoFit/>
+          </a:bodyPr>
+          <a:lstStyle/>
+          <a:p>
+            <a:pPr algn="l">
+              <a:spcAft>
+                <a:spcPts val="600"/>
+              </a:spcAft>
+            </a:pPr>
+            <a:r>
+              <a:rPr sz="1500" b="1">
+                <a:solidFill>
+                  <a:srgbClr val="0F0F0F"/>
+                </a:solidFill>
+                <a:latin typeface="Inter"/>
+              </a:rPr>
+              <a:t>Des. 2026</a:t>
+            </a:r>
+          </a:p>
+        </p:txBody>
+      </p:sp>
+      <p:sp>
+        <p:nvSpPr>
+          <p:cNvPr id="11" name="TextBox 10"/>
+          <p:cNvSpPr txBox="1"/>
+          <p:nvPr/>
+        </p:nvSpPr>
+        <p:spPr>
+          <a:xfrm>
+            <a:off x="2336749" y="3017520"/>
+            <a:ext cx="1742389" cy="914400"/>
+          </a:xfrm>
+          <a:prstGeom prst="rect">
+            <a:avLst/>
+          </a:prstGeom>
+          <a:noFill/>
+        </p:spPr>
+        <p:txBody>
+          <a:bodyPr wrap="square" anchor="t" lIns="0" rIns="0" tIns="0" bIns="0">
+            <a:spAutoFit/>
+          </a:bodyPr>
+          <a:lstStyle/>
+          <a:p>
+            <a:pPr algn="l">
+              <a:spcAft>
+                <a:spcPts val="600"/>
+              </a:spcAft>
+            </a:pPr>
+            <a:r>
+              <a:rPr sz="1300" b="0">
+                <a:solidFill>
+                  <a:srgbClr val="0F0F0F"/>
+                </a:solidFill>
+                <a:latin typeface="Inter"/>
+              </a:rPr>
+              <a:t>Forprosjekt Oslo og Tromsø. Gratis</a:t>
+            </a:r>
+          </a:p>
+        </p:txBody>
+      </p:sp>
+      <p:sp>
+        <p:nvSpPr>
+          <p:cNvPr id="12" name="Oval 11"/>
           <p:cNvSpPr/>
           <p:nvPr/>
         </p:nvSpPr>
         <p:spPr>
           <a:xfrm>
-            <a:off x="2932115" y="2011680"/>
-            <a:ext cx="384048" cy="384048"/>
+            <a:off x="4216298" y="2194560"/>
+            <a:ext cx="310896" cy="310896"/>
           </a:xfrm>
           <a:prstGeom prst="ellipse">
             <a:avLst/>
           </a:prstGeom>
           <a:solidFill>
-            <a:srgbClr val="FE6F45"/>
+            <a:srgbClr val="0F0F0F"/>
           </a:solidFill>
           <a:ln>
             <a:noFill/>
@@ -6697,27 +6552,27 @@
           <a:p>
             <a:pPr algn="ctr"/>
             <a:r>
-              <a:rPr sz="1400" b="1">
+              <a:rPr sz="1200" b="1">
                 <a:solidFill>
                   <a:srgbClr val="FFFFFF"/>
                 </a:solidFill>
                 <a:latin typeface="Inter"/>
               </a:rPr>
-              <a:t>2</a:t>
-            </a:r>
-          </a:p>
-        </p:txBody>
-      </p:sp>
-      <p:sp>
-        <p:nvSpPr>
-          <p:cNvPr id="11" name="TextBox 10"/>
+              <a:t>3</a:t>
+            </a:r>
+          </a:p>
+        </p:txBody>
+      </p:sp>
+      <p:sp>
+        <p:nvSpPr>
+          <p:cNvPr id="13" name="TextBox 12"/>
           <p:cNvSpPr txBox="1"/>
           <p:nvPr/>
         </p:nvSpPr>
         <p:spPr>
           <a:xfrm>
-            <a:off x="2932115" y="2560320"/>
-            <a:ext cx="1743395" cy="685800"/>
+            <a:off x="4216298" y="2651760"/>
+            <a:ext cx="1742389" cy="365760"/>
           </a:xfrm>
           <a:prstGeom prst="rect">
             <a:avLst/>
@@ -6736,27 +6591,27 @@
               </a:spcAft>
             </a:pPr>
             <a:r>
-              <a:rPr sz="1700" b="1">
-                <a:solidFill>
-                  <a:srgbClr val="FFFFFF"/>
-                </a:solidFill>
-                <a:latin typeface="Inter"/>
-              </a:rPr>
-              <a:t>Forprosjekt</a:t>
-            </a:r>
-          </a:p>
-        </p:txBody>
-      </p:sp>
-      <p:sp>
-        <p:nvSpPr>
-          <p:cNvPr id="12" name="TextBox 11"/>
+              <a:rPr sz="1500" b="1">
+                <a:solidFill>
+                  <a:srgbClr val="0F0F0F"/>
+                </a:solidFill>
+                <a:latin typeface="Inter"/>
+              </a:rPr>
+              <a:t>Q1 2027</a:t>
+            </a:r>
+          </a:p>
+        </p:txBody>
+      </p:sp>
+      <p:sp>
+        <p:nvSpPr>
+          <p:cNvPr id="14" name="TextBox 13"/>
           <p:cNvSpPr txBox="1"/>
           <p:nvPr/>
         </p:nvSpPr>
         <p:spPr>
           <a:xfrm>
-            <a:off x="2932115" y="3246120"/>
-            <a:ext cx="1743395" cy="914400"/>
+            <a:off x="4216298" y="3017520"/>
+            <a:ext cx="1742389" cy="914400"/>
           </a:xfrm>
           <a:prstGeom prst="rect">
             <a:avLst/>
@@ -6775,33 +6630,33 @@
               </a:spcAft>
             </a:pPr>
             <a:r>
-              <a:rPr sz="1400" b="0">
-                <a:solidFill>
-                  <a:srgbClr val="FFFFFF"/>
-                </a:solidFill>
-                <a:latin typeface="Inter"/>
-              </a:rPr>
-              <a:t>Konsept, planløsning og illustrasjoner. Gratis.</a:t>
-            </a:r>
-          </a:p>
-        </p:txBody>
-      </p:sp>
-      <p:sp>
-        <p:nvSpPr>
-          <p:cNvPr id="13" name="Rectangle 12"/>
+              <a:rPr sz="1300" b="0">
+                <a:solidFill>
+                  <a:srgbClr val="0F0F0F"/>
+                </a:solidFill>
+                <a:latin typeface="Inter"/>
+              </a:rPr>
+              <a:t>Leiekontrakt og fast pris på tegning og produksjon</a:t>
+            </a:r>
+          </a:p>
+        </p:txBody>
+      </p:sp>
+      <p:sp>
+        <p:nvSpPr>
+          <p:cNvPr id="15" name="Oval 14"/>
           <p:cNvSpPr/>
           <p:nvPr/>
         </p:nvSpPr>
         <p:spPr>
           <a:xfrm>
-            <a:off x="5041270" y="1828800"/>
-            <a:ext cx="2109155" cy="2377440"/>
-          </a:xfrm>
-          <a:prstGeom prst="rect">
+            <a:off x="6095847" y="2194560"/>
+            <a:ext cx="310896" cy="310896"/>
+          </a:xfrm>
+          <a:prstGeom prst="ellipse">
             <a:avLst/>
           </a:prstGeom>
           <a:solidFill>
-            <a:srgbClr val="F4F4F2"/>
+            <a:srgbClr val="0F0F0F"/>
           </a:solidFill>
           <a:ln>
             <a:noFill/>
@@ -6823,23 +6678,110 @@
           </a:fontRef>
         </p:style>
         <p:txBody>
-          <a:bodyPr rtlCol="0" anchor="ctr"/>
+          <a:bodyPr rtlCol="0" anchor="ctr" lIns="0" rIns="0" tIns="0" bIns="0"/>
           <a:lstStyle/>
           <a:p>
             <a:pPr algn="ctr"/>
-          </a:p>
-        </p:txBody>
-      </p:sp>
-      <p:sp>
-        <p:nvSpPr>
-          <p:cNvPr id="14" name="Oval 13"/>
+            <a:r>
+              <a:rPr sz="1200" b="1">
+                <a:solidFill>
+                  <a:srgbClr val="FFFFFF"/>
+                </a:solidFill>
+                <a:latin typeface="Inter"/>
+              </a:rPr>
+              <a:t>4</a:t>
+            </a:r>
+          </a:p>
+        </p:txBody>
+      </p:sp>
+      <p:sp>
+        <p:nvSpPr>
+          <p:cNvPr id="16" name="TextBox 15"/>
+          <p:cNvSpPr txBox="1"/>
+          <p:nvPr/>
+        </p:nvSpPr>
+        <p:spPr>
+          <a:xfrm>
+            <a:off x="6095847" y="2651760"/>
+            <a:ext cx="1742389" cy="365760"/>
+          </a:xfrm>
+          <a:prstGeom prst="rect">
+            <a:avLst/>
+          </a:prstGeom>
+          <a:noFill/>
+        </p:spPr>
+        <p:txBody>
+          <a:bodyPr wrap="square" anchor="t" lIns="0" rIns="0" tIns="0" bIns="0">
+            <a:spAutoFit/>
+          </a:bodyPr>
+          <a:lstStyle/>
+          <a:p>
+            <a:pPr algn="l">
+              <a:spcAft>
+                <a:spcPts val="600"/>
+              </a:spcAft>
+            </a:pPr>
+            <a:r>
+              <a:rPr sz="1500" b="1">
+                <a:solidFill>
+                  <a:srgbClr val="0F0F0F"/>
+                </a:solidFill>
+                <a:latin typeface="Inter"/>
+              </a:rPr>
+              <a:t>Vinter 2027</a:t>
+            </a:r>
+          </a:p>
+        </p:txBody>
+      </p:sp>
+      <p:sp>
+        <p:nvSpPr>
+          <p:cNvPr id="17" name="TextBox 16"/>
+          <p:cNvSpPr txBox="1"/>
+          <p:nvPr/>
+        </p:nvSpPr>
+        <p:spPr>
+          <a:xfrm>
+            <a:off x="6095847" y="3017520"/>
+            <a:ext cx="1742389" cy="914400"/>
+          </a:xfrm>
+          <a:prstGeom prst="rect">
+            <a:avLst/>
+          </a:prstGeom>
+          <a:noFill/>
+        </p:spPr>
+        <p:txBody>
+          <a:bodyPr wrap="square" anchor="t" lIns="0" rIns="0" tIns="0" bIns="0">
+            <a:spAutoFit/>
+          </a:bodyPr>
+          <a:lstStyle/>
+          <a:p>
+            <a:pPr algn="l">
+              <a:spcAft>
+                <a:spcPts val="600"/>
+              </a:spcAft>
+            </a:pPr>
+            <a:r>
+              <a:rPr sz="1300" b="0">
+                <a:solidFill>
+                  <a:srgbClr val="0F0F0F"/>
+                </a:solidFill>
+                <a:latin typeface="Inter"/>
+              </a:rPr>
+              <a:t>Pop-up og utleie i Tromsø</a:t>
+            </a:r>
+          </a:p>
+        </p:txBody>
+      </p:sp>
+      <p:sp>
+        <p:nvSpPr>
+          <p:cNvPr id="18" name="Oval 17"/>
           <p:cNvSpPr/>
           <p:nvPr/>
         </p:nvSpPr>
         <p:spPr>
           <a:xfrm>
-            <a:off x="5224150" y="2011680"/>
-            <a:ext cx="384048" cy="384048"/>
+            <a:off x="7975396" y="2194560"/>
+            <a:ext cx="310896" cy="310896"/>
           </a:xfrm>
           <a:prstGeom prst="ellipse">
             <a:avLst/>
@@ -6872,27 +6814,27 @@
           <a:p>
             <a:pPr algn="ctr"/>
             <a:r>
-              <a:rPr sz="1400" b="1">
+              <a:rPr sz="1200" b="1">
                 <a:solidFill>
                   <a:srgbClr val="FFFFFF"/>
                 </a:solidFill>
                 <a:latin typeface="Inter"/>
               </a:rPr>
-              <a:t>3</a:t>
-            </a:r>
-          </a:p>
-        </p:txBody>
-      </p:sp>
-      <p:sp>
-        <p:nvSpPr>
-          <p:cNvPr id="15" name="TextBox 14"/>
+              <a:t>5</a:t>
+            </a:r>
+          </a:p>
+        </p:txBody>
+      </p:sp>
+      <p:sp>
+        <p:nvSpPr>
+          <p:cNvPr id="19" name="TextBox 18"/>
           <p:cNvSpPr txBox="1"/>
           <p:nvPr/>
         </p:nvSpPr>
         <p:spPr>
           <a:xfrm>
-            <a:off x="5224150" y="2560320"/>
-            <a:ext cx="1743395" cy="685800"/>
+            <a:off x="7975396" y="2651760"/>
+            <a:ext cx="1742389" cy="365760"/>
           </a:xfrm>
           <a:prstGeom prst="rect">
             <a:avLst/>
@@ -6911,27 +6853,27 @@
               </a:spcAft>
             </a:pPr>
             <a:r>
-              <a:rPr sz="1700" b="1">
+              <a:rPr sz="1500" b="1">
                 <a:solidFill>
                   <a:srgbClr val="0F0F0F"/>
                 </a:solidFill>
                 <a:latin typeface="Inter"/>
               </a:rPr>
-              <a:t>Tegning og kalkyle</a:t>
-            </a:r>
-          </a:p>
-        </p:txBody>
-      </p:sp>
-      <p:sp>
-        <p:nvSpPr>
-          <p:cNvPr id="16" name="TextBox 15"/>
+              <a:t>Sommer 2027</a:t>
+            </a:r>
+          </a:p>
+        </p:txBody>
+      </p:sp>
+      <p:sp>
+        <p:nvSpPr>
+          <p:cNvPr id="20" name="TextBox 19"/>
           <p:cNvSpPr txBox="1"/>
           <p:nvPr/>
         </p:nvSpPr>
         <p:spPr>
           <a:xfrm>
-            <a:off x="5224150" y="3246120"/>
-            <a:ext cx="1743395" cy="914400"/>
+            <a:off x="7975396" y="3017520"/>
+            <a:ext cx="1742389" cy="914400"/>
           </a:xfrm>
           <a:prstGeom prst="rect">
             <a:avLst/>
@@ -6950,33 +6892,33 @@
               </a:spcAft>
             </a:pPr>
             <a:r>
-              <a:rPr sz="1400" b="0">
+              <a:rPr sz="1300" b="0">
                 <a:solidFill>
                   <a:srgbClr val="0F0F0F"/>
                 </a:solidFill>
                 <a:latin typeface="Inter"/>
               </a:rPr>
-              <a:t>Arbeidstegninger og fast pris</a:t>
-            </a:r>
-          </a:p>
-        </p:txBody>
-      </p:sp>
-      <p:sp>
-        <p:nvSpPr>
-          <p:cNvPr id="17" name="Rectangle 16"/>
+              <a:t>Butikk i Mack Kvartalet</a:t>
+            </a:r>
+          </a:p>
+        </p:txBody>
+      </p:sp>
+      <p:sp>
+        <p:nvSpPr>
+          <p:cNvPr id="21" name="Oval 20"/>
           <p:cNvSpPr/>
           <p:nvPr/>
         </p:nvSpPr>
         <p:spPr>
           <a:xfrm>
-            <a:off x="7333305" y="1828800"/>
-            <a:ext cx="2109155" cy="2377440"/>
-          </a:xfrm>
-          <a:prstGeom prst="rect">
+            <a:off x="9854945" y="2194560"/>
+            <a:ext cx="310896" cy="310896"/>
+          </a:xfrm>
+          <a:prstGeom prst="ellipse">
             <a:avLst/>
           </a:prstGeom>
           <a:solidFill>
-            <a:srgbClr val="F4F4F2"/>
+            <a:srgbClr val="0F0F0F"/>
           </a:solidFill>
           <a:ln>
             <a:noFill/>
@@ -6998,76 +6940,32 @@
           </a:fontRef>
         </p:style>
         <p:txBody>
-          <a:bodyPr rtlCol="0" anchor="ctr"/>
+          <a:bodyPr rtlCol="0" anchor="ctr" lIns="0" rIns="0" tIns="0" bIns="0"/>
           <a:lstStyle/>
           <a:p>
             <a:pPr algn="ctr"/>
-          </a:p>
-        </p:txBody>
-      </p:sp>
-      <p:sp>
-        <p:nvSpPr>
-          <p:cNvPr id="18" name="Oval 17"/>
-          <p:cNvSpPr/>
-          <p:nvPr/>
-        </p:nvSpPr>
-        <p:spPr>
-          <a:xfrm>
-            <a:off x="7516185" y="2011680"/>
-            <a:ext cx="384048" cy="384048"/>
-          </a:xfrm>
-          <a:prstGeom prst="ellipse">
-            <a:avLst/>
-          </a:prstGeom>
-          <a:solidFill>
-            <a:srgbClr val="0F0F0F"/>
-          </a:solidFill>
-          <a:ln>
-            <a:noFill/>
-          </a:ln>
-          <a:effectLst/>
-        </p:spPr>
-        <p:style>
-          <a:lnRef idx="1">
-            <a:schemeClr val="accent1"/>
-          </a:lnRef>
-          <a:fillRef idx="3">
-            <a:schemeClr val="accent1"/>
-          </a:fillRef>
-          <a:effectRef idx="2">
-            <a:schemeClr val="accent1"/>
-          </a:effectRef>
-          <a:fontRef idx="minor">
-            <a:schemeClr val="lt1"/>
-          </a:fontRef>
-        </p:style>
-        <p:txBody>
-          <a:bodyPr rtlCol="0" anchor="ctr" lIns="0" rIns="0" tIns="0" bIns="0"/>
-          <a:lstStyle/>
-          <a:p>
-            <a:pPr algn="ctr"/>
-            <a:r>
-              <a:rPr sz="1400" b="1">
+            <a:r>
+              <a:rPr sz="1200" b="1">
                 <a:solidFill>
                   <a:srgbClr val="FFFFFF"/>
                 </a:solidFill>
                 <a:latin typeface="Inter"/>
               </a:rPr>
-              <a:t>4</a:t>
-            </a:r>
-          </a:p>
-        </p:txBody>
-      </p:sp>
-      <p:sp>
-        <p:nvSpPr>
-          <p:cNvPr id="19" name="TextBox 18"/>
+              <a:t>6</a:t>
+            </a:r>
+          </a:p>
+        </p:txBody>
+      </p:sp>
+      <p:sp>
+        <p:nvSpPr>
+          <p:cNvPr id="22" name="TextBox 21"/>
           <p:cNvSpPr txBox="1"/>
           <p:nvPr/>
         </p:nvSpPr>
         <p:spPr>
           <a:xfrm>
-            <a:off x="7516185" y="2560320"/>
-            <a:ext cx="1743395" cy="685800"/>
+            <a:off x="9854945" y="2651760"/>
+            <a:ext cx="1742389" cy="365760"/>
           </a:xfrm>
           <a:prstGeom prst="rect">
             <a:avLst/>
@@ -7086,27 +6984,27 @@
               </a:spcAft>
             </a:pPr>
             <a:r>
-              <a:rPr sz="1700" b="1">
+              <a:rPr sz="1500" b="1">
                 <a:solidFill>
                   <a:srgbClr val="0F0F0F"/>
                 </a:solidFill>
                 <a:latin typeface="Inter"/>
               </a:rPr>
-              <a:t>Produksjon</a:t>
-            </a:r>
-          </a:p>
-        </p:txBody>
-      </p:sp>
-      <p:sp>
-        <p:nvSpPr>
-          <p:cNvPr id="20" name="TextBox 19"/>
+              <a:t>Høst 2027</a:t>
+            </a:r>
+          </a:p>
+        </p:txBody>
+      </p:sp>
+      <p:sp>
+        <p:nvSpPr>
+          <p:cNvPr id="23" name="TextBox 22"/>
           <p:cNvSpPr txBox="1"/>
           <p:nvPr/>
         </p:nvSpPr>
         <p:spPr>
           <a:xfrm>
-            <a:off x="7516185" y="3246120"/>
-            <a:ext cx="1743395" cy="914400"/>
+            <a:off x="9854945" y="3017520"/>
+            <a:ext cx="1742389" cy="914400"/>
           </a:xfrm>
           <a:prstGeom prst="rect">
             <a:avLst/>
@@ -7125,124 +7023,27 @@
               </a:spcAft>
             </a:pPr>
             <a:r>
-              <a:rPr sz="1400" b="0">
+              <a:rPr sz="1300" b="0">
                 <a:solidFill>
                   <a:srgbClr val="0F0F0F"/>
                 </a:solidFill>
                 <a:latin typeface="Inter"/>
               </a:rPr>
-              <a:t>Egen snekkermester og møbeltapetserer</a:t>
-            </a:r>
-          </a:p>
-        </p:txBody>
-      </p:sp>
-      <p:sp>
-        <p:nvSpPr>
-          <p:cNvPr id="21" name="Rectangle 20"/>
-          <p:cNvSpPr/>
-          <p:nvPr/>
-        </p:nvSpPr>
-        <p:spPr>
-          <a:xfrm>
-            <a:off x="9625340" y="1828800"/>
-            <a:ext cx="2109155" cy="2377440"/>
-          </a:xfrm>
-          <a:prstGeom prst="rect">
-            <a:avLst/>
-          </a:prstGeom>
-          <a:solidFill>
-            <a:srgbClr val="F4F4F2"/>
-          </a:solidFill>
-          <a:ln>
-            <a:noFill/>
-          </a:ln>
-          <a:effectLst/>
-        </p:spPr>
-        <p:style>
-          <a:lnRef idx="1">
-            <a:schemeClr val="accent1"/>
-          </a:lnRef>
-          <a:fillRef idx="3">
-            <a:schemeClr val="accent1"/>
-          </a:fillRef>
-          <a:effectRef idx="2">
-            <a:schemeClr val="accent1"/>
-          </a:effectRef>
-          <a:fontRef idx="minor">
-            <a:schemeClr val="lt1"/>
-          </a:fontRef>
-        </p:style>
-        <p:txBody>
-          <a:bodyPr rtlCol="0" anchor="ctr"/>
-          <a:lstStyle/>
-          <a:p>
-            <a:pPr algn="ctr"/>
-          </a:p>
-        </p:txBody>
-      </p:sp>
-      <p:sp>
-        <p:nvSpPr>
-          <p:cNvPr id="22" name="Oval 21"/>
-          <p:cNvSpPr/>
-          <p:nvPr/>
-        </p:nvSpPr>
-        <p:spPr>
-          <a:xfrm>
-            <a:off x="9808220" y="2011680"/>
-            <a:ext cx="384048" cy="384048"/>
-          </a:xfrm>
-          <a:prstGeom prst="ellipse">
-            <a:avLst/>
-          </a:prstGeom>
-          <a:solidFill>
-            <a:srgbClr val="0F0F0F"/>
-          </a:solidFill>
-          <a:ln>
-            <a:noFill/>
-          </a:ln>
-          <a:effectLst/>
-        </p:spPr>
-        <p:style>
-          <a:lnRef idx="1">
-            <a:schemeClr val="accent1"/>
-          </a:lnRef>
-          <a:fillRef idx="3">
-            <a:schemeClr val="accent1"/>
-          </a:fillRef>
-          <a:effectRef idx="2">
-            <a:schemeClr val="accent1"/>
-          </a:effectRef>
-          <a:fontRef idx="minor">
-            <a:schemeClr val="lt1"/>
-          </a:fontRef>
-        </p:style>
-        <p:txBody>
-          <a:bodyPr rtlCol="0" anchor="ctr" lIns="0" rIns="0" tIns="0" bIns="0"/>
-          <a:lstStyle/>
-          <a:p>
-            <a:pPr algn="ctr"/>
-            <a:r>
-              <a:rPr sz="1400" b="1">
-                <a:solidFill>
-                  <a:srgbClr val="FFFFFF"/>
-                </a:solidFill>
-                <a:latin typeface="Inter"/>
-              </a:rPr>
-              <a:t>5</a:t>
-            </a:r>
-          </a:p>
-        </p:txBody>
-      </p:sp>
-      <p:sp>
-        <p:nvSpPr>
-          <p:cNvPr id="23" name="TextBox 22"/>
+              <a:t>Mulig åpning i Oslo</a:t>
+            </a:r>
+          </a:p>
+        </p:txBody>
+      </p:sp>
+      <p:sp>
+        <p:nvSpPr>
+          <p:cNvPr id="24" name="TextBox 23"/>
           <p:cNvSpPr txBox="1"/>
           <p:nvPr/>
         </p:nvSpPr>
         <p:spPr>
           <a:xfrm>
-            <a:off x="9808220" y="2560320"/>
-            <a:ext cx="1743395" cy="685800"/>
+            <a:off x="457200" y="4206240"/>
+            <a:ext cx="11277295" cy="1463040"/>
           </a:xfrm>
           <a:prstGeom prst="rect">
             <a:avLst/>
@@ -7257,56 +7058,76 @@
           <a:p>
             <a:pPr algn="l">
               <a:spcAft>
-                <a:spcPts val="600"/>
-              </a:spcAft>
-            </a:pPr>
-            <a:r>
-              <a:rPr sz="1700" b="1">
+                <a:spcPts val="800"/>
+              </a:spcAft>
+            </a:pPr>
+            <a:r>
+              <a:rPr sz="1500" b="1">
                 <a:solidFill>
                   <a:srgbClr val="0F0F0F"/>
                 </a:solidFill>
                 <a:latin typeface="Inter"/>
               </a:rPr>
-              <a:t>Montasje</a:t>
-            </a:r>
-          </a:p>
-        </p:txBody>
-      </p:sp>
-      <p:sp>
-        <p:nvSpPr>
-          <p:cNvPr id="24" name="TextBox 23"/>
-          <p:cNvSpPr txBox="1"/>
-          <p:nvPr/>
-        </p:nvSpPr>
-        <p:spPr>
-          <a:xfrm>
-            <a:off x="9808220" y="3246120"/>
-            <a:ext cx="1743395" cy="914400"/>
-          </a:xfrm>
-          <a:prstGeom prst="rect">
-            <a:avLst/>
-          </a:prstGeom>
-          <a:noFill/>
-        </p:spPr>
-        <p:txBody>
-          <a:bodyPr wrap="square" anchor="t" lIns="0" rIns="0" tIns="0" bIns="0">
-            <a:spAutoFit/>
-          </a:bodyPr>
-          <a:lstStyle/>
+              <a:t>Forprosjekt: </a:t>
+            </a:r>
+            <a:r>
+              <a:rPr sz="1500" b="0">
+                <a:solidFill>
+                  <a:srgbClr val="0F0F0F"/>
+                </a:solidFill>
+                <a:latin typeface="Inter"/>
+              </a:rPr>
+              <a:t>konsept, planløsning og illustrasjoner, uten kostnad og uten forpliktelse.</a:t>
+            </a:r>
+          </a:p>
           <a:p>
             <a:pPr algn="l">
               <a:spcAft>
-                <a:spcPts val="600"/>
-              </a:spcAft>
-            </a:pPr>
-            <a:r>
-              <a:rPr sz="1400" b="0">
+                <a:spcPts val="800"/>
+              </a:spcAft>
+            </a:pPr>
+            <a:r>
+              <a:rPr sz="1500" b="1">
                 <a:solidFill>
                   <a:srgbClr val="0F0F0F"/>
                 </a:solidFill>
                 <a:latin typeface="Inter"/>
               </a:rPr>
-              <a:t>Eget montasjeteam overleverer klart til åpning</a:t>
+              <a:t>Tegning, produksjon og montasje: </a:t>
+            </a:r>
+            <a:r>
+              <a:rPr sz="1500" b="0">
+                <a:solidFill>
+                  <a:srgbClr val="0F0F0F"/>
+                </a:solidFill>
+                <a:latin typeface="Inter"/>
+              </a:rPr>
+              <a:t>fast pris per trinn, som Houdini godkjenner før oppstart.</a:t>
+            </a:r>
+          </a:p>
+          <a:p>
+            <a:pPr algn="l">
+              <a:spcAft>
+                <a:spcPts val="800"/>
+              </a:spcAft>
+            </a:pPr>
+            <a:r>
+              <a:rPr sz="1500" b="1">
+                <a:solidFill>
+                  <a:srgbClr val="0F0F0F"/>
+                </a:solidFill>
+                <a:latin typeface="Inter"/>
+              </a:rPr>
+              <a:t>Lokale og forhandling: </a:t>
+            </a:r>
+            <a:r>
+              <a:rPr sz="1500" b="0">
+                <a:solidFill>
+                  <a:srgbClr val="0F0F0F"/>
+                </a:solidFill>
+                <a:latin typeface="Inter"/>
+              </a:rPr>
+              <a:t>Bent fører dialogen med gårdeier, i samarbeid med megleren dere bruker.</a:t>
             </a:r>
           </a:p>
         </p:txBody>
@@ -7314,54 +7135,6 @@
       <p:sp>
         <p:nvSpPr>
           <p:cNvPr id="25" name="TextBox 24"/>
-          <p:cNvSpPr txBox="1"/>
-          <p:nvPr/>
-        </p:nvSpPr>
-        <p:spPr>
-          <a:xfrm>
-            <a:off x="457200" y="4572000"/>
-            <a:ext cx="11277295" cy="1097280"/>
-          </a:xfrm>
-          <a:prstGeom prst="rect">
-            <a:avLst/>
-          </a:prstGeom>
-          <a:noFill/>
-        </p:spPr>
-        <p:txBody>
-          <a:bodyPr wrap="square" anchor="t" lIns="0" rIns="0" tIns="0" bIns="0">
-            <a:spAutoFit/>
-          </a:bodyPr>
-          <a:lstStyle/>
-          <a:p>
-            <a:pPr algn="l">
-              <a:spcAft>
-                <a:spcPts val="600"/>
-              </a:spcAft>
-            </a:pPr>
-            <a:r>
-              <a:rPr sz="1500" b="1">
-                <a:solidFill>
-                  <a:srgbClr val="0F0F0F"/>
-                </a:solidFill>
-                <a:latin typeface="Inter"/>
-              </a:rPr>
-              <a:t>SODAI: </a:t>
-            </a:r>
-            <a:r>
-              <a:rPr sz="1500" b="0">
-                <a:solidFill>
-                  <a:srgbClr val="0F0F0F"/>
-                </a:solidFill>
-                <a:latin typeface="Inter"/>
-              </a:rPr>
-              <a:t>etablert 2013, 13 ansatte og Gasellebedrift. Interiørarkitekt, teknisk tegner, snekkermester, møbeltapetserer og eget montasjeteam. Prosjekter i Norge og utlandet.</a:t>
-            </a:r>
-          </a:p>
-        </p:txBody>
-      </p:sp>
-      <p:sp>
-        <p:nvSpPr>
-          <p:cNvPr id="26" name="TextBox 25"/>
           <p:cNvSpPr txBox="1"/>
           <p:nvPr/>
         </p:nvSpPr>
@@ -7393,7 +7166,7 @@
                 </a:solidFill>
                 <a:latin typeface="Inter"/>
               </a:rPr>
-              <a:t>Kilde: SODAI.</a:t>
+              <a:t>Tidslinjen er et forslag og avhenger av lokaler, kontrakter og Houdinis egne beslutninger.</a:t>
             </a:r>
           </a:p>
         </p:txBody>
@@ -7458,7 +7231,7 @@
                 </a:solidFill>
                 <a:latin typeface="Inter"/>
               </a:rPr>
-              <a:t>REFERANSE</a:t>
+              <a:t>LEVERANSE</a:t>
             </a:r>
           </a:p>
         </p:txBody>
@@ -7536,141 +7309,118 @@
                 </a:solidFill>
                 <a:latin typeface="Inter"/>
               </a:rPr>
-              <a:t>SODAI har levert en skreddersydd merkevarebutikk før: FFK concept store i Fredrikstad, 2025</a:t>
-            </a:r>
-          </a:p>
-        </p:txBody>
-      </p:sp>
-      <p:pic>
-        <p:nvPicPr>
-          <p:cNvPr id="5" name="Picture 4" descr="ffk_hero_c7135063x3959352.jpg"/>
-          <p:cNvPicPr>
-            <a:picLocks noChangeAspect="1"/>
-          </p:cNvPicPr>
-          <p:nvPr/>
-        </p:nvPicPr>
-        <p:blipFill>
-          <a:blip r:embed="rId2"/>
-          <a:stretch>
-            <a:fillRect/>
-          </a:stretch>
-        </p:blipFill>
-        <p:spPr>
-          <a:xfrm>
-            <a:off x="457200" y="1691640"/>
-            <a:ext cx="7135063" cy="3959352"/>
-          </a:xfrm>
-          <a:prstGeom prst="rect">
-            <a:avLst/>
-          </a:prstGeom>
-        </p:spPr>
-      </p:pic>
-      <p:pic>
-        <p:nvPicPr>
-          <p:cNvPr id="6" name="Picture 5" descr="ffk_3_c1x1.jpg"/>
-          <p:cNvPicPr>
-            <a:picLocks noChangeAspect="1"/>
-          </p:cNvPicPr>
-          <p:nvPr/>
-        </p:nvPicPr>
-        <p:blipFill>
-          <a:blip r:embed="rId3"/>
-          <a:stretch>
-            <a:fillRect/>
-          </a:stretch>
-        </p:blipFill>
-        <p:spPr>
-          <a:xfrm>
-            <a:off x="7775143" y="1691640"/>
-            <a:ext cx="1888236" cy="1888236"/>
-          </a:xfrm>
-          <a:prstGeom prst="rect">
-            <a:avLst/>
-          </a:prstGeom>
-        </p:spPr>
-      </p:pic>
-      <p:pic>
-        <p:nvPicPr>
-          <p:cNvPr id="7" name="Picture 6" descr="ffk_2_c1x1.jpg"/>
-          <p:cNvPicPr>
-            <a:picLocks noChangeAspect="1"/>
-          </p:cNvPicPr>
-          <p:nvPr/>
-        </p:nvPicPr>
-        <p:blipFill>
-          <a:blip r:embed="rId4"/>
-          <a:stretch>
-            <a:fillRect/>
-          </a:stretch>
-        </p:blipFill>
-        <p:spPr>
-          <a:xfrm>
-            <a:off x="9846259" y="1691640"/>
-            <a:ext cx="1888236" cy="1888236"/>
-          </a:xfrm>
-          <a:prstGeom prst="rect">
-            <a:avLst/>
-          </a:prstGeom>
-        </p:spPr>
-      </p:pic>
-      <p:pic>
-        <p:nvPicPr>
-          <p:cNvPr id="8" name="Picture 7" descr="ffk_0_c1x1.jpg"/>
-          <p:cNvPicPr>
-            <a:picLocks noChangeAspect="1"/>
-          </p:cNvPicPr>
-          <p:nvPr/>
-        </p:nvPicPr>
-        <p:blipFill>
-          <a:blip r:embed="rId5"/>
-          <a:stretch>
-            <a:fillRect/>
-          </a:stretch>
-        </p:blipFill>
-        <p:spPr>
-          <a:xfrm>
-            <a:off x="7775143" y="3762756"/>
-            <a:ext cx="1888236" cy="1888236"/>
-          </a:xfrm>
-          <a:prstGeom prst="rect">
-            <a:avLst/>
-          </a:prstGeom>
-        </p:spPr>
-      </p:pic>
-      <p:pic>
-        <p:nvPicPr>
-          <p:cNvPr id="9" name="Picture 8" descr="ffk_7_c1x1.jpg"/>
-          <p:cNvPicPr>
-            <a:picLocks noChangeAspect="1"/>
-          </p:cNvPicPr>
-          <p:nvPr/>
-        </p:nvPicPr>
-        <p:blipFill>
-          <a:blip r:embed="rId6"/>
-          <a:stretch>
-            <a:fillRect/>
-          </a:stretch>
-        </p:blipFill>
-        <p:spPr>
-          <a:xfrm>
-            <a:off x="9846259" y="3762756"/>
-            <a:ext cx="1888236" cy="1888236"/>
-          </a:xfrm>
-          <a:prstGeom prst="rect">
-            <a:avLst/>
-          </a:prstGeom>
-        </p:spPr>
-      </p:pic>
-      <p:sp>
-        <p:nvSpPr>
-          <p:cNvPr id="10" name="TextBox 9"/>
+              <a:t>SODAI leverer butikken fra første skisse til nøkkelferdig åpning</a:t>
+            </a:r>
+          </a:p>
+        </p:txBody>
+      </p:sp>
+      <p:sp>
+        <p:nvSpPr>
+          <p:cNvPr id="5" name="Rectangle 4"/>
+          <p:cNvSpPr/>
+          <p:nvPr/>
+        </p:nvSpPr>
+        <p:spPr>
+          <a:xfrm>
+            <a:off x="457200" y="1828800"/>
+            <a:ext cx="2109155" cy="2377440"/>
+          </a:xfrm>
+          <a:prstGeom prst="rect">
+            <a:avLst/>
+          </a:prstGeom>
+          <a:solidFill>
+            <a:srgbClr val="F4F4F2"/>
+          </a:solidFill>
+          <a:ln>
+            <a:noFill/>
+          </a:ln>
+          <a:effectLst/>
+        </p:spPr>
+        <p:style>
+          <a:lnRef idx="1">
+            <a:schemeClr val="accent1"/>
+          </a:lnRef>
+          <a:fillRef idx="3">
+            <a:schemeClr val="accent1"/>
+          </a:fillRef>
+          <a:effectRef idx="2">
+            <a:schemeClr val="accent1"/>
+          </a:effectRef>
+          <a:fontRef idx="minor">
+            <a:schemeClr val="lt1"/>
+          </a:fontRef>
+        </p:style>
+        <p:txBody>
+          <a:bodyPr rtlCol="0" anchor="ctr"/>
+          <a:lstStyle/>
+          <a:p>
+            <a:pPr algn="ctr"/>
+          </a:p>
+        </p:txBody>
+      </p:sp>
+      <p:sp>
+        <p:nvSpPr>
+          <p:cNvPr id="6" name="Oval 5"/>
+          <p:cNvSpPr/>
+          <p:nvPr/>
+        </p:nvSpPr>
+        <p:spPr>
+          <a:xfrm>
+            <a:off x="640080" y="2011680"/>
+            <a:ext cx="384048" cy="384048"/>
+          </a:xfrm>
+          <a:prstGeom prst="ellipse">
+            <a:avLst/>
+          </a:prstGeom>
+          <a:solidFill>
+            <a:srgbClr val="0F0F0F"/>
+          </a:solidFill>
+          <a:ln>
+            <a:noFill/>
+          </a:ln>
+          <a:effectLst/>
+        </p:spPr>
+        <p:style>
+          <a:lnRef idx="1">
+            <a:schemeClr val="accent1"/>
+          </a:lnRef>
+          <a:fillRef idx="3">
+            <a:schemeClr val="accent1"/>
+          </a:fillRef>
+          <a:effectRef idx="2">
+            <a:schemeClr val="accent1"/>
+          </a:effectRef>
+          <a:fontRef idx="minor">
+            <a:schemeClr val="lt1"/>
+          </a:fontRef>
+        </p:style>
+        <p:txBody>
+          <a:bodyPr rtlCol="0" anchor="ctr" lIns="0" rIns="0" tIns="0" bIns="0"/>
+          <a:lstStyle/>
+          <a:p>
+            <a:pPr algn="ctr"/>
+            <a:r>
+              <a:rPr sz="1400" b="1">
+                <a:solidFill>
+                  <a:srgbClr val="FFFFFF"/>
+                </a:solidFill>
+                <a:latin typeface="Inter"/>
+              </a:rPr>
+              <a:t>1</a:t>
+            </a:r>
+          </a:p>
+        </p:txBody>
+      </p:sp>
+      <p:sp>
+        <p:nvSpPr>
+          <p:cNvPr id="7" name="TextBox 6"/>
           <p:cNvSpPr txBox="1"/>
           <p:nvPr/>
         </p:nvSpPr>
         <p:spPr>
           <a:xfrm>
-            <a:off x="457200" y="5788152"/>
-            <a:ext cx="11277295" cy="548640"/>
+            <a:off x="640080" y="2560320"/>
+            <a:ext cx="1743395" cy="685800"/>
           </a:xfrm>
           <a:prstGeom prst="rect">
             <a:avLst/>
@@ -7689,14 +7439,394 @@
               </a:spcAft>
             </a:pPr>
             <a:r>
+              <a:rPr sz="1700" b="1">
+                <a:solidFill>
+                  <a:srgbClr val="0F0F0F"/>
+                </a:solidFill>
+                <a:latin typeface="Inter"/>
+              </a:rPr>
+              <a:t>Lokale og vilkår</a:t>
+            </a:r>
+          </a:p>
+        </p:txBody>
+      </p:sp>
+      <p:sp>
+        <p:nvSpPr>
+          <p:cNvPr id="8" name="TextBox 7"/>
+          <p:cNvSpPr txBox="1"/>
+          <p:nvPr/>
+        </p:nvSpPr>
+        <p:spPr>
+          <a:xfrm>
+            <a:off x="640080" y="3246120"/>
+            <a:ext cx="1743395" cy="914400"/>
+          </a:xfrm>
+          <a:prstGeom prst="rect">
+            <a:avLst/>
+          </a:prstGeom>
+          <a:noFill/>
+        </p:spPr>
+        <p:txBody>
+          <a:bodyPr wrap="square" anchor="t" lIns="0" rIns="0" tIns="0" bIns="0">
+            <a:spAutoFit/>
+          </a:bodyPr>
+          <a:lstStyle/>
+          <a:p>
+            <a:pPr algn="l">
+              <a:spcAft>
+                <a:spcPts val="600"/>
+              </a:spcAft>
+            </a:pPr>
+            <a:r>
+              <a:rPr sz="1400" b="0">
+                <a:solidFill>
+                  <a:srgbClr val="0F0F0F"/>
+                </a:solidFill>
+                <a:latin typeface="Inter"/>
+              </a:rPr>
+              <a:t>Søk, befaring og forhandling med gårdeier</a:t>
+            </a:r>
+          </a:p>
+        </p:txBody>
+      </p:sp>
+      <p:sp>
+        <p:nvSpPr>
+          <p:cNvPr id="9" name="Rectangle 8"/>
+          <p:cNvSpPr/>
+          <p:nvPr/>
+        </p:nvSpPr>
+        <p:spPr>
+          <a:xfrm>
+            <a:off x="2749235" y="1828800"/>
+            <a:ext cx="2109155" cy="2377440"/>
+          </a:xfrm>
+          <a:prstGeom prst="rect">
+            <a:avLst/>
+          </a:prstGeom>
+          <a:solidFill>
+            <a:srgbClr val="0F0F0F"/>
+          </a:solidFill>
+          <a:ln>
+            <a:noFill/>
+          </a:ln>
+          <a:effectLst/>
+        </p:spPr>
+        <p:style>
+          <a:lnRef idx="1">
+            <a:schemeClr val="accent1"/>
+          </a:lnRef>
+          <a:fillRef idx="3">
+            <a:schemeClr val="accent1"/>
+          </a:fillRef>
+          <a:effectRef idx="2">
+            <a:schemeClr val="accent1"/>
+          </a:effectRef>
+          <a:fontRef idx="minor">
+            <a:schemeClr val="lt1"/>
+          </a:fontRef>
+        </p:style>
+        <p:txBody>
+          <a:bodyPr rtlCol="0" anchor="ctr"/>
+          <a:lstStyle/>
+          <a:p>
+            <a:pPr algn="ctr"/>
+          </a:p>
+        </p:txBody>
+      </p:sp>
+      <p:sp>
+        <p:nvSpPr>
+          <p:cNvPr id="10" name="Oval 9"/>
+          <p:cNvSpPr/>
+          <p:nvPr/>
+        </p:nvSpPr>
+        <p:spPr>
+          <a:xfrm>
+            <a:off x="2932115" y="2011680"/>
+            <a:ext cx="384048" cy="384048"/>
+          </a:xfrm>
+          <a:prstGeom prst="ellipse">
+            <a:avLst/>
+          </a:prstGeom>
+          <a:solidFill>
+            <a:srgbClr val="FE6F45"/>
+          </a:solidFill>
+          <a:ln>
+            <a:noFill/>
+          </a:ln>
+          <a:effectLst/>
+        </p:spPr>
+        <p:style>
+          <a:lnRef idx="1">
+            <a:schemeClr val="accent1"/>
+          </a:lnRef>
+          <a:fillRef idx="3">
+            <a:schemeClr val="accent1"/>
+          </a:fillRef>
+          <a:effectRef idx="2">
+            <a:schemeClr val="accent1"/>
+          </a:effectRef>
+          <a:fontRef idx="minor">
+            <a:schemeClr val="lt1"/>
+          </a:fontRef>
+        </p:style>
+        <p:txBody>
+          <a:bodyPr rtlCol="0" anchor="ctr" lIns="0" rIns="0" tIns="0" bIns="0"/>
+          <a:lstStyle/>
+          <a:p>
+            <a:pPr algn="ctr"/>
+            <a:r>
               <a:rPr sz="1400" b="1">
                 <a:solidFill>
+                  <a:srgbClr val="FFFFFF"/>
+                </a:solidFill>
+                <a:latin typeface="Inter"/>
+              </a:rPr>
+              <a:t>2</a:t>
+            </a:r>
+          </a:p>
+        </p:txBody>
+      </p:sp>
+      <p:sp>
+        <p:nvSpPr>
+          <p:cNvPr id="11" name="TextBox 10"/>
+          <p:cNvSpPr txBox="1"/>
+          <p:nvPr/>
+        </p:nvSpPr>
+        <p:spPr>
+          <a:xfrm>
+            <a:off x="2932115" y="2560320"/>
+            <a:ext cx="1743395" cy="685800"/>
+          </a:xfrm>
+          <a:prstGeom prst="rect">
+            <a:avLst/>
+          </a:prstGeom>
+          <a:noFill/>
+        </p:spPr>
+        <p:txBody>
+          <a:bodyPr wrap="square" anchor="t" lIns="0" rIns="0" tIns="0" bIns="0">
+            <a:spAutoFit/>
+          </a:bodyPr>
+          <a:lstStyle/>
+          <a:p>
+            <a:pPr algn="l">
+              <a:spcAft>
+                <a:spcPts val="600"/>
+              </a:spcAft>
+            </a:pPr>
+            <a:r>
+              <a:rPr sz="1700" b="1">
+                <a:solidFill>
+                  <a:srgbClr val="FFFFFF"/>
+                </a:solidFill>
+                <a:latin typeface="Inter"/>
+              </a:rPr>
+              <a:t>Forprosjekt</a:t>
+            </a:r>
+          </a:p>
+        </p:txBody>
+      </p:sp>
+      <p:sp>
+        <p:nvSpPr>
+          <p:cNvPr id="12" name="TextBox 11"/>
+          <p:cNvSpPr txBox="1"/>
+          <p:nvPr/>
+        </p:nvSpPr>
+        <p:spPr>
+          <a:xfrm>
+            <a:off x="2932115" y="3246120"/>
+            <a:ext cx="1743395" cy="914400"/>
+          </a:xfrm>
+          <a:prstGeom prst="rect">
+            <a:avLst/>
+          </a:prstGeom>
+          <a:noFill/>
+        </p:spPr>
+        <p:txBody>
+          <a:bodyPr wrap="square" anchor="t" lIns="0" rIns="0" tIns="0" bIns="0">
+            <a:spAutoFit/>
+          </a:bodyPr>
+          <a:lstStyle/>
+          <a:p>
+            <a:pPr algn="l">
+              <a:spcAft>
+                <a:spcPts val="600"/>
+              </a:spcAft>
+            </a:pPr>
+            <a:r>
+              <a:rPr sz="1400" b="0">
+                <a:solidFill>
+                  <a:srgbClr val="FFFFFF"/>
+                </a:solidFill>
+                <a:latin typeface="Inter"/>
+              </a:rPr>
+              <a:t>Konsept, planløsning og illustrasjoner. Gratis.</a:t>
+            </a:r>
+          </a:p>
+        </p:txBody>
+      </p:sp>
+      <p:sp>
+        <p:nvSpPr>
+          <p:cNvPr id="13" name="Rectangle 12"/>
+          <p:cNvSpPr/>
+          <p:nvPr/>
+        </p:nvSpPr>
+        <p:spPr>
+          <a:xfrm>
+            <a:off x="5041270" y="1828800"/>
+            <a:ext cx="2109155" cy="2377440"/>
+          </a:xfrm>
+          <a:prstGeom prst="rect">
+            <a:avLst/>
+          </a:prstGeom>
+          <a:solidFill>
+            <a:srgbClr val="F4F4F2"/>
+          </a:solidFill>
+          <a:ln>
+            <a:noFill/>
+          </a:ln>
+          <a:effectLst/>
+        </p:spPr>
+        <p:style>
+          <a:lnRef idx="1">
+            <a:schemeClr val="accent1"/>
+          </a:lnRef>
+          <a:fillRef idx="3">
+            <a:schemeClr val="accent1"/>
+          </a:fillRef>
+          <a:effectRef idx="2">
+            <a:schemeClr val="accent1"/>
+          </a:effectRef>
+          <a:fontRef idx="minor">
+            <a:schemeClr val="lt1"/>
+          </a:fontRef>
+        </p:style>
+        <p:txBody>
+          <a:bodyPr rtlCol="0" anchor="ctr"/>
+          <a:lstStyle/>
+          <a:p>
+            <a:pPr algn="ctr"/>
+          </a:p>
+        </p:txBody>
+      </p:sp>
+      <p:sp>
+        <p:nvSpPr>
+          <p:cNvPr id="14" name="Oval 13"/>
+          <p:cNvSpPr/>
+          <p:nvPr/>
+        </p:nvSpPr>
+        <p:spPr>
+          <a:xfrm>
+            <a:off x="5224150" y="2011680"/>
+            <a:ext cx="384048" cy="384048"/>
+          </a:xfrm>
+          <a:prstGeom prst="ellipse">
+            <a:avLst/>
+          </a:prstGeom>
+          <a:solidFill>
+            <a:srgbClr val="0F0F0F"/>
+          </a:solidFill>
+          <a:ln>
+            <a:noFill/>
+          </a:ln>
+          <a:effectLst/>
+        </p:spPr>
+        <p:style>
+          <a:lnRef idx="1">
+            <a:schemeClr val="accent1"/>
+          </a:lnRef>
+          <a:fillRef idx="3">
+            <a:schemeClr val="accent1"/>
+          </a:fillRef>
+          <a:effectRef idx="2">
+            <a:schemeClr val="accent1"/>
+          </a:effectRef>
+          <a:fontRef idx="minor">
+            <a:schemeClr val="lt1"/>
+          </a:fontRef>
+        </p:style>
+        <p:txBody>
+          <a:bodyPr rtlCol="0" anchor="ctr" lIns="0" rIns="0" tIns="0" bIns="0"/>
+          <a:lstStyle/>
+          <a:p>
+            <a:pPr algn="ctr"/>
+            <a:r>
+              <a:rPr sz="1400" b="1">
+                <a:solidFill>
+                  <a:srgbClr val="FFFFFF"/>
+                </a:solidFill>
+                <a:latin typeface="Inter"/>
+              </a:rPr>
+              <a:t>3</a:t>
+            </a:r>
+          </a:p>
+        </p:txBody>
+      </p:sp>
+      <p:sp>
+        <p:nvSpPr>
+          <p:cNvPr id="15" name="TextBox 14"/>
+          <p:cNvSpPr txBox="1"/>
+          <p:nvPr/>
+        </p:nvSpPr>
+        <p:spPr>
+          <a:xfrm>
+            <a:off x="5224150" y="2560320"/>
+            <a:ext cx="1743395" cy="685800"/>
+          </a:xfrm>
+          <a:prstGeom prst="rect">
+            <a:avLst/>
+          </a:prstGeom>
+          <a:noFill/>
+        </p:spPr>
+        <p:txBody>
+          <a:bodyPr wrap="square" anchor="t" lIns="0" rIns="0" tIns="0" bIns="0">
+            <a:spAutoFit/>
+          </a:bodyPr>
+          <a:lstStyle/>
+          <a:p>
+            <a:pPr algn="l">
+              <a:spcAft>
+                <a:spcPts val="600"/>
+              </a:spcAft>
+            </a:pPr>
+            <a:r>
+              <a:rPr sz="1700" b="1">
+                <a:solidFill>
                   <a:srgbClr val="0F0F0F"/>
                 </a:solidFill>
                 <a:latin typeface="Inter"/>
               </a:rPr>
-              <a:t>Levert: </a:t>
-            </a:r>
+              <a:t>Tegning og kalkyle</a:t>
+            </a:r>
+          </a:p>
+        </p:txBody>
+      </p:sp>
+      <p:sp>
+        <p:nvSpPr>
+          <p:cNvPr id="16" name="TextBox 15"/>
+          <p:cNvSpPr txBox="1"/>
+          <p:nvPr/>
+        </p:nvSpPr>
+        <p:spPr>
+          <a:xfrm>
+            <a:off x="5224150" y="3246120"/>
+            <a:ext cx="1743395" cy="914400"/>
+          </a:xfrm>
+          <a:prstGeom prst="rect">
+            <a:avLst/>
+          </a:prstGeom>
+          <a:noFill/>
+        </p:spPr>
+        <p:txBody>
+          <a:bodyPr wrap="square" anchor="t" lIns="0" rIns="0" tIns="0" bIns="0">
+            <a:spAutoFit/>
+          </a:bodyPr>
+          <a:lstStyle/>
+          <a:p>
+            <a:pPr algn="l">
+              <a:spcAft>
+                <a:spcPts val="600"/>
+              </a:spcAft>
+            </a:pPr>
             <a:r>
               <a:rPr sz="1400" b="0">
                 <a:solidFill>
@@ -7704,14 +7834,412 @@
                 </a:solidFill>
                 <a:latin typeface="Inter"/>
               </a:rPr>
-              <a:t>garderober, utstillingshyller, kassadisk med lampe, speil, podium og bordet «Plankehaugen». Alt skreddersydd for klubbens egen butikk: lyssatte hyller, sorte draktnisjer og stablet heltre.</a:t>
-            </a:r>
-          </a:p>
-        </p:txBody>
-      </p:sp>
-      <p:sp>
-        <p:nvSpPr>
-          <p:cNvPr id="11" name="TextBox 10"/>
+              <a:t>Arbeidstegninger og fast pris</a:t>
+            </a:r>
+          </a:p>
+        </p:txBody>
+      </p:sp>
+      <p:sp>
+        <p:nvSpPr>
+          <p:cNvPr id="17" name="Rectangle 16"/>
+          <p:cNvSpPr/>
+          <p:nvPr/>
+        </p:nvSpPr>
+        <p:spPr>
+          <a:xfrm>
+            <a:off x="7333305" y="1828800"/>
+            <a:ext cx="2109155" cy="2377440"/>
+          </a:xfrm>
+          <a:prstGeom prst="rect">
+            <a:avLst/>
+          </a:prstGeom>
+          <a:solidFill>
+            <a:srgbClr val="F4F4F2"/>
+          </a:solidFill>
+          <a:ln>
+            <a:noFill/>
+          </a:ln>
+          <a:effectLst/>
+        </p:spPr>
+        <p:style>
+          <a:lnRef idx="1">
+            <a:schemeClr val="accent1"/>
+          </a:lnRef>
+          <a:fillRef idx="3">
+            <a:schemeClr val="accent1"/>
+          </a:fillRef>
+          <a:effectRef idx="2">
+            <a:schemeClr val="accent1"/>
+          </a:effectRef>
+          <a:fontRef idx="minor">
+            <a:schemeClr val="lt1"/>
+          </a:fontRef>
+        </p:style>
+        <p:txBody>
+          <a:bodyPr rtlCol="0" anchor="ctr"/>
+          <a:lstStyle/>
+          <a:p>
+            <a:pPr algn="ctr"/>
+          </a:p>
+        </p:txBody>
+      </p:sp>
+      <p:sp>
+        <p:nvSpPr>
+          <p:cNvPr id="18" name="Oval 17"/>
+          <p:cNvSpPr/>
+          <p:nvPr/>
+        </p:nvSpPr>
+        <p:spPr>
+          <a:xfrm>
+            <a:off x="7516185" y="2011680"/>
+            <a:ext cx="384048" cy="384048"/>
+          </a:xfrm>
+          <a:prstGeom prst="ellipse">
+            <a:avLst/>
+          </a:prstGeom>
+          <a:solidFill>
+            <a:srgbClr val="0F0F0F"/>
+          </a:solidFill>
+          <a:ln>
+            <a:noFill/>
+          </a:ln>
+          <a:effectLst/>
+        </p:spPr>
+        <p:style>
+          <a:lnRef idx="1">
+            <a:schemeClr val="accent1"/>
+          </a:lnRef>
+          <a:fillRef idx="3">
+            <a:schemeClr val="accent1"/>
+          </a:fillRef>
+          <a:effectRef idx="2">
+            <a:schemeClr val="accent1"/>
+          </a:effectRef>
+          <a:fontRef idx="minor">
+            <a:schemeClr val="lt1"/>
+          </a:fontRef>
+        </p:style>
+        <p:txBody>
+          <a:bodyPr rtlCol="0" anchor="ctr" lIns="0" rIns="0" tIns="0" bIns="0"/>
+          <a:lstStyle/>
+          <a:p>
+            <a:pPr algn="ctr"/>
+            <a:r>
+              <a:rPr sz="1400" b="1">
+                <a:solidFill>
+                  <a:srgbClr val="FFFFFF"/>
+                </a:solidFill>
+                <a:latin typeface="Inter"/>
+              </a:rPr>
+              <a:t>4</a:t>
+            </a:r>
+          </a:p>
+        </p:txBody>
+      </p:sp>
+      <p:sp>
+        <p:nvSpPr>
+          <p:cNvPr id="19" name="TextBox 18"/>
+          <p:cNvSpPr txBox="1"/>
+          <p:nvPr/>
+        </p:nvSpPr>
+        <p:spPr>
+          <a:xfrm>
+            <a:off x="7516185" y="2560320"/>
+            <a:ext cx="1743395" cy="685800"/>
+          </a:xfrm>
+          <a:prstGeom prst="rect">
+            <a:avLst/>
+          </a:prstGeom>
+          <a:noFill/>
+        </p:spPr>
+        <p:txBody>
+          <a:bodyPr wrap="square" anchor="t" lIns="0" rIns="0" tIns="0" bIns="0">
+            <a:spAutoFit/>
+          </a:bodyPr>
+          <a:lstStyle/>
+          <a:p>
+            <a:pPr algn="l">
+              <a:spcAft>
+                <a:spcPts val="600"/>
+              </a:spcAft>
+            </a:pPr>
+            <a:r>
+              <a:rPr sz="1700" b="1">
+                <a:solidFill>
+                  <a:srgbClr val="0F0F0F"/>
+                </a:solidFill>
+                <a:latin typeface="Inter"/>
+              </a:rPr>
+              <a:t>Produksjon</a:t>
+            </a:r>
+          </a:p>
+        </p:txBody>
+      </p:sp>
+      <p:sp>
+        <p:nvSpPr>
+          <p:cNvPr id="20" name="TextBox 19"/>
+          <p:cNvSpPr txBox="1"/>
+          <p:nvPr/>
+        </p:nvSpPr>
+        <p:spPr>
+          <a:xfrm>
+            <a:off x="7516185" y="3246120"/>
+            <a:ext cx="1743395" cy="914400"/>
+          </a:xfrm>
+          <a:prstGeom prst="rect">
+            <a:avLst/>
+          </a:prstGeom>
+          <a:noFill/>
+        </p:spPr>
+        <p:txBody>
+          <a:bodyPr wrap="square" anchor="t" lIns="0" rIns="0" tIns="0" bIns="0">
+            <a:spAutoFit/>
+          </a:bodyPr>
+          <a:lstStyle/>
+          <a:p>
+            <a:pPr algn="l">
+              <a:spcAft>
+                <a:spcPts val="600"/>
+              </a:spcAft>
+            </a:pPr>
+            <a:r>
+              <a:rPr sz="1400" b="0">
+                <a:solidFill>
+                  <a:srgbClr val="0F0F0F"/>
+                </a:solidFill>
+                <a:latin typeface="Inter"/>
+              </a:rPr>
+              <a:t>Egen snekkermester og møbeltapetserer</a:t>
+            </a:r>
+          </a:p>
+        </p:txBody>
+      </p:sp>
+      <p:sp>
+        <p:nvSpPr>
+          <p:cNvPr id="21" name="Rectangle 20"/>
+          <p:cNvSpPr/>
+          <p:nvPr/>
+        </p:nvSpPr>
+        <p:spPr>
+          <a:xfrm>
+            <a:off x="9625340" y="1828800"/>
+            <a:ext cx="2109155" cy="2377440"/>
+          </a:xfrm>
+          <a:prstGeom prst="rect">
+            <a:avLst/>
+          </a:prstGeom>
+          <a:solidFill>
+            <a:srgbClr val="F4F4F2"/>
+          </a:solidFill>
+          <a:ln>
+            <a:noFill/>
+          </a:ln>
+          <a:effectLst/>
+        </p:spPr>
+        <p:style>
+          <a:lnRef idx="1">
+            <a:schemeClr val="accent1"/>
+          </a:lnRef>
+          <a:fillRef idx="3">
+            <a:schemeClr val="accent1"/>
+          </a:fillRef>
+          <a:effectRef idx="2">
+            <a:schemeClr val="accent1"/>
+          </a:effectRef>
+          <a:fontRef idx="minor">
+            <a:schemeClr val="lt1"/>
+          </a:fontRef>
+        </p:style>
+        <p:txBody>
+          <a:bodyPr rtlCol="0" anchor="ctr"/>
+          <a:lstStyle/>
+          <a:p>
+            <a:pPr algn="ctr"/>
+          </a:p>
+        </p:txBody>
+      </p:sp>
+      <p:sp>
+        <p:nvSpPr>
+          <p:cNvPr id="22" name="Oval 21"/>
+          <p:cNvSpPr/>
+          <p:nvPr/>
+        </p:nvSpPr>
+        <p:spPr>
+          <a:xfrm>
+            <a:off x="9808220" y="2011680"/>
+            <a:ext cx="384048" cy="384048"/>
+          </a:xfrm>
+          <a:prstGeom prst="ellipse">
+            <a:avLst/>
+          </a:prstGeom>
+          <a:solidFill>
+            <a:srgbClr val="0F0F0F"/>
+          </a:solidFill>
+          <a:ln>
+            <a:noFill/>
+          </a:ln>
+          <a:effectLst/>
+        </p:spPr>
+        <p:style>
+          <a:lnRef idx="1">
+            <a:schemeClr val="accent1"/>
+          </a:lnRef>
+          <a:fillRef idx="3">
+            <a:schemeClr val="accent1"/>
+          </a:fillRef>
+          <a:effectRef idx="2">
+            <a:schemeClr val="accent1"/>
+          </a:effectRef>
+          <a:fontRef idx="minor">
+            <a:schemeClr val="lt1"/>
+          </a:fontRef>
+        </p:style>
+        <p:txBody>
+          <a:bodyPr rtlCol="0" anchor="ctr" lIns="0" rIns="0" tIns="0" bIns="0"/>
+          <a:lstStyle/>
+          <a:p>
+            <a:pPr algn="ctr"/>
+            <a:r>
+              <a:rPr sz="1400" b="1">
+                <a:solidFill>
+                  <a:srgbClr val="FFFFFF"/>
+                </a:solidFill>
+                <a:latin typeface="Inter"/>
+              </a:rPr>
+              <a:t>5</a:t>
+            </a:r>
+          </a:p>
+        </p:txBody>
+      </p:sp>
+      <p:sp>
+        <p:nvSpPr>
+          <p:cNvPr id="23" name="TextBox 22"/>
+          <p:cNvSpPr txBox="1"/>
+          <p:nvPr/>
+        </p:nvSpPr>
+        <p:spPr>
+          <a:xfrm>
+            <a:off x="9808220" y="2560320"/>
+            <a:ext cx="1743395" cy="685800"/>
+          </a:xfrm>
+          <a:prstGeom prst="rect">
+            <a:avLst/>
+          </a:prstGeom>
+          <a:noFill/>
+        </p:spPr>
+        <p:txBody>
+          <a:bodyPr wrap="square" anchor="t" lIns="0" rIns="0" tIns="0" bIns="0">
+            <a:spAutoFit/>
+          </a:bodyPr>
+          <a:lstStyle/>
+          <a:p>
+            <a:pPr algn="l">
+              <a:spcAft>
+                <a:spcPts val="600"/>
+              </a:spcAft>
+            </a:pPr>
+            <a:r>
+              <a:rPr sz="1700" b="1">
+                <a:solidFill>
+                  <a:srgbClr val="0F0F0F"/>
+                </a:solidFill>
+                <a:latin typeface="Inter"/>
+              </a:rPr>
+              <a:t>Montasje</a:t>
+            </a:r>
+          </a:p>
+        </p:txBody>
+      </p:sp>
+      <p:sp>
+        <p:nvSpPr>
+          <p:cNvPr id="24" name="TextBox 23"/>
+          <p:cNvSpPr txBox="1"/>
+          <p:nvPr/>
+        </p:nvSpPr>
+        <p:spPr>
+          <a:xfrm>
+            <a:off x="9808220" y="3246120"/>
+            <a:ext cx="1743395" cy="914400"/>
+          </a:xfrm>
+          <a:prstGeom prst="rect">
+            <a:avLst/>
+          </a:prstGeom>
+          <a:noFill/>
+        </p:spPr>
+        <p:txBody>
+          <a:bodyPr wrap="square" anchor="t" lIns="0" rIns="0" tIns="0" bIns="0">
+            <a:spAutoFit/>
+          </a:bodyPr>
+          <a:lstStyle/>
+          <a:p>
+            <a:pPr algn="l">
+              <a:spcAft>
+                <a:spcPts val="600"/>
+              </a:spcAft>
+            </a:pPr>
+            <a:r>
+              <a:rPr sz="1400" b="0">
+                <a:solidFill>
+                  <a:srgbClr val="0F0F0F"/>
+                </a:solidFill>
+                <a:latin typeface="Inter"/>
+              </a:rPr>
+              <a:t>Eget montasjeteam overleverer klart til åpning</a:t>
+            </a:r>
+          </a:p>
+        </p:txBody>
+      </p:sp>
+      <p:sp>
+        <p:nvSpPr>
+          <p:cNvPr id="25" name="TextBox 24"/>
+          <p:cNvSpPr txBox="1"/>
+          <p:nvPr/>
+        </p:nvSpPr>
+        <p:spPr>
+          <a:xfrm>
+            <a:off x="457200" y="4572000"/>
+            <a:ext cx="11277295" cy="1097280"/>
+          </a:xfrm>
+          <a:prstGeom prst="rect">
+            <a:avLst/>
+          </a:prstGeom>
+          <a:noFill/>
+        </p:spPr>
+        <p:txBody>
+          <a:bodyPr wrap="square" anchor="t" lIns="0" rIns="0" tIns="0" bIns="0">
+            <a:spAutoFit/>
+          </a:bodyPr>
+          <a:lstStyle/>
+          <a:p>
+            <a:pPr algn="l">
+              <a:spcAft>
+                <a:spcPts val="600"/>
+              </a:spcAft>
+            </a:pPr>
+            <a:r>
+              <a:rPr sz="1500" b="1">
+                <a:solidFill>
+                  <a:srgbClr val="0F0F0F"/>
+                </a:solidFill>
+                <a:latin typeface="Inter"/>
+              </a:rPr>
+              <a:t>SODAI: </a:t>
+            </a:r>
+            <a:r>
+              <a:rPr sz="1500" b="0">
+                <a:solidFill>
+                  <a:srgbClr val="0F0F0F"/>
+                </a:solidFill>
+                <a:latin typeface="Inter"/>
+              </a:rPr>
+              <a:t>etablert 2013, 13 ansatte og Gasellebedrift. Interiørarkitekt, teknisk tegner, snekkermester, møbeltapetserer og eget montasjeteam. Prosjekter i Norge og utlandet.</a:t>
+            </a:r>
+          </a:p>
+        </p:txBody>
+      </p:sp>
+      <p:sp>
+        <p:nvSpPr>
+          <p:cNvPr id="26" name="TextBox 25"/>
           <p:cNvSpPr txBox="1"/>
           <p:nvPr/>
         </p:nvSpPr>
@@ -7743,7 +8271,7 @@
                 </a:solidFill>
                 <a:latin typeface="Inter"/>
               </a:rPr>
-              <a:t>Kunde: Fredrikstad Fotballklubb (FFK). Bilder og leveranse: sodai.no/prosjekter/ffk-concept-store (hentet 24.10.2026).</a:t>
+              <a:t>Kilde: SODAI.</a:t>
             </a:r>
           </a:p>
         </p:txBody>
@@ -7808,6 +8336,356 @@
                 </a:solidFill>
                 <a:latin typeface="Inter"/>
               </a:rPr>
+              <a:t>REFERANSE</a:t>
+            </a:r>
+          </a:p>
+        </p:txBody>
+      </p:sp>
+      <p:sp>
+        <p:nvSpPr>
+          <p:cNvPr id="3" name="TextBox 2"/>
+          <p:cNvSpPr txBox="1"/>
+          <p:nvPr/>
+        </p:nvSpPr>
+        <p:spPr>
+          <a:xfrm>
+            <a:off x="6248095" y="347472"/>
+            <a:ext cx="5486400" cy="274320"/>
+          </a:xfrm>
+          <a:prstGeom prst="rect">
+            <a:avLst/>
+          </a:prstGeom>
+          <a:noFill/>
+        </p:spPr>
+        <p:txBody>
+          <a:bodyPr wrap="square" anchor="t" lIns="0" rIns="0" tIns="0" bIns="0">
+            <a:spAutoFit/>
+          </a:bodyPr>
+          <a:lstStyle/>
+          <a:p>
+            <a:pPr algn="r">
+              <a:spcAft>
+                <a:spcPts val="600"/>
+              </a:spcAft>
+            </a:pPr>
+            <a:r>
+              <a:rPr sz="900" b="0">
+                <a:solidFill>
+                  <a:srgbClr val="8A8A86"/>
+                </a:solidFill>
+                <a:latin typeface="Inter"/>
+              </a:rPr>
+              <a:t>Forslag til Houdini Sportswear  ·  Bent Finset / SODAI</a:t>
+            </a:r>
+          </a:p>
+        </p:txBody>
+      </p:sp>
+      <p:sp>
+        <p:nvSpPr>
+          <p:cNvPr id="4" name="TextBox 3"/>
+          <p:cNvSpPr txBox="1"/>
+          <p:nvPr/>
+        </p:nvSpPr>
+        <p:spPr>
+          <a:xfrm>
+            <a:off x="457200" y="621792"/>
+            <a:ext cx="11277295" cy="914400"/>
+          </a:xfrm>
+          <a:prstGeom prst="rect">
+            <a:avLst/>
+          </a:prstGeom>
+          <a:noFill/>
+        </p:spPr>
+        <p:txBody>
+          <a:bodyPr wrap="square" anchor="t" lIns="0" rIns="0" tIns="0" bIns="0">
+            <a:spAutoFit/>
+          </a:bodyPr>
+          <a:lstStyle/>
+          <a:p>
+            <a:pPr algn="l">
+              <a:spcAft>
+                <a:spcPts val="600"/>
+              </a:spcAft>
+            </a:pPr>
+            <a:r>
+              <a:rPr sz="2800" b="1">
+                <a:solidFill>
+                  <a:srgbClr val="0F0F0F"/>
+                </a:solidFill>
+                <a:latin typeface="Inter"/>
+              </a:rPr>
+              <a:t>SODAI har levert en skreddersydd merkevarebutikk før: FFK concept store i Fredrikstad, 2025</a:t>
+            </a:r>
+          </a:p>
+        </p:txBody>
+      </p:sp>
+      <p:pic>
+        <p:nvPicPr>
+          <p:cNvPr id="5" name="Picture 4" descr="ffk_hero_c7135063x3959352.jpg"/>
+          <p:cNvPicPr>
+            <a:picLocks noChangeAspect="1"/>
+          </p:cNvPicPr>
+          <p:nvPr/>
+        </p:nvPicPr>
+        <p:blipFill>
+          <a:blip r:embed="rId2"/>
+          <a:stretch>
+            <a:fillRect/>
+          </a:stretch>
+        </p:blipFill>
+        <p:spPr>
+          <a:xfrm>
+            <a:off x="457200" y="1691640"/>
+            <a:ext cx="7135063" cy="3959352"/>
+          </a:xfrm>
+          <a:prstGeom prst="rect">
+            <a:avLst/>
+          </a:prstGeom>
+        </p:spPr>
+      </p:pic>
+      <p:pic>
+        <p:nvPicPr>
+          <p:cNvPr id="6" name="Picture 5" descr="ffk_3_c1x1.jpg"/>
+          <p:cNvPicPr>
+            <a:picLocks noChangeAspect="1"/>
+          </p:cNvPicPr>
+          <p:nvPr/>
+        </p:nvPicPr>
+        <p:blipFill>
+          <a:blip r:embed="rId3"/>
+          <a:stretch>
+            <a:fillRect/>
+          </a:stretch>
+        </p:blipFill>
+        <p:spPr>
+          <a:xfrm>
+            <a:off x="7775143" y="1691640"/>
+            <a:ext cx="1888236" cy="1888236"/>
+          </a:xfrm>
+          <a:prstGeom prst="rect">
+            <a:avLst/>
+          </a:prstGeom>
+        </p:spPr>
+      </p:pic>
+      <p:pic>
+        <p:nvPicPr>
+          <p:cNvPr id="7" name="Picture 6" descr="ffk_2_c1x1.jpg"/>
+          <p:cNvPicPr>
+            <a:picLocks noChangeAspect="1"/>
+          </p:cNvPicPr>
+          <p:nvPr/>
+        </p:nvPicPr>
+        <p:blipFill>
+          <a:blip r:embed="rId4"/>
+          <a:stretch>
+            <a:fillRect/>
+          </a:stretch>
+        </p:blipFill>
+        <p:spPr>
+          <a:xfrm>
+            <a:off x="9846259" y="1691640"/>
+            <a:ext cx="1888236" cy="1888236"/>
+          </a:xfrm>
+          <a:prstGeom prst="rect">
+            <a:avLst/>
+          </a:prstGeom>
+        </p:spPr>
+      </p:pic>
+      <p:pic>
+        <p:nvPicPr>
+          <p:cNvPr id="8" name="Picture 7" descr="ffk_0_c1x1.jpg"/>
+          <p:cNvPicPr>
+            <a:picLocks noChangeAspect="1"/>
+          </p:cNvPicPr>
+          <p:nvPr/>
+        </p:nvPicPr>
+        <p:blipFill>
+          <a:blip r:embed="rId5"/>
+          <a:stretch>
+            <a:fillRect/>
+          </a:stretch>
+        </p:blipFill>
+        <p:spPr>
+          <a:xfrm>
+            <a:off x="7775143" y="3762756"/>
+            <a:ext cx="1888236" cy="1888236"/>
+          </a:xfrm>
+          <a:prstGeom prst="rect">
+            <a:avLst/>
+          </a:prstGeom>
+        </p:spPr>
+      </p:pic>
+      <p:pic>
+        <p:nvPicPr>
+          <p:cNvPr id="9" name="Picture 8" descr="ffk_7_c1x1.jpg"/>
+          <p:cNvPicPr>
+            <a:picLocks noChangeAspect="1"/>
+          </p:cNvPicPr>
+          <p:nvPr/>
+        </p:nvPicPr>
+        <p:blipFill>
+          <a:blip r:embed="rId6"/>
+          <a:stretch>
+            <a:fillRect/>
+          </a:stretch>
+        </p:blipFill>
+        <p:spPr>
+          <a:xfrm>
+            <a:off x="9846259" y="3762756"/>
+            <a:ext cx="1888236" cy="1888236"/>
+          </a:xfrm>
+          <a:prstGeom prst="rect">
+            <a:avLst/>
+          </a:prstGeom>
+        </p:spPr>
+      </p:pic>
+      <p:sp>
+        <p:nvSpPr>
+          <p:cNvPr id="10" name="TextBox 9"/>
+          <p:cNvSpPr txBox="1"/>
+          <p:nvPr/>
+        </p:nvSpPr>
+        <p:spPr>
+          <a:xfrm>
+            <a:off x="457200" y="5788152"/>
+            <a:ext cx="11277295" cy="548640"/>
+          </a:xfrm>
+          <a:prstGeom prst="rect">
+            <a:avLst/>
+          </a:prstGeom>
+          <a:noFill/>
+        </p:spPr>
+        <p:txBody>
+          <a:bodyPr wrap="square" anchor="t" lIns="0" rIns="0" tIns="0" bIns="0">
+            <a:spAutoFit/>
+          </a:bodyPr>
+          <a:lstStyle/>
+          <a:p>
+            <a:pPr algn="l">
+              <a:spcAft>
+                <a:spcPts val="600"/>
+              </a:spcAft>
+            </a:pPr>
+            <a:r>
+              <a:rPr sz="1400" b="1">
+                <a:solidFill>
+                  <a:srgbClr val="0F0F0F"/>
+                </a:solidFill>
+                <a:latin typeface="Inter"/>
+              </a:rPr>
+              <a:t>Levert: </a:t>
+            </a:r>
+            <a:r>
+              <a:rPr sz="1400" b="0">
+                <a:solidFill>
+                  <a:srgbClr val="0F0F0F"/>
+                </a:solidFill>
+                <a:latin typeface="Inter"/>
+              </a:rPr>
+              <a:t>garderober, utstillingshyller, kassadisk med lampe, speil, podium og bordet «Plankehaugen». Alt skreddersydd for klubbens egen butikk: lyssatte hyller, sorte draktnisjer og stablet heltre.</a:t>
+            </a:r>
+          </a:p>
+        </p:txBody>
+      </p:sp>
+      <p:sp>
+        <p:nvSpPr>
+          <p:cNvPr id="11" name="TextBox 10"/>
+          <p:cNvSpPr txBox="1"/>
+          <p:nvPr/>
+        </p:nvSpPr>
+        <p:spPr>
+          <a:xfrm>
+            <a:off x="457200" y="6291072"/>
+            <a:ext cx="11277295" cy="411480"/>
+          </a:xfrm>
+          <a:prstGeom prst="rect">
+            <a:avLst/>
+          </a:prstGeom>
+          <a:noFill/>
+        </p:spPr>
+        <p:txBody>
+          <a:bodyPr wrap="square" anchor="b" lIns="0" rIns="0" tIns="0" bIns="0">
+            <a:spAutoFit/>
+          </a:bodyPr>
+          <a:lstStyle/>
+          <a:p>
+            <a:pPr algn="l">
+              <a:spcAft>
+                <a:spcPts val="600"/>
+              </a:spcAft>
+            </a:pPr>
+            <a:r>
+              <a:rPr sz="900" b="0">
+                <a:solidFill>
+                  <a:srgbClr val="8A8A86"/>
+                </a:solidFill>
+                <a:latin typeface="Inter"/>
+              </a:rPr>
+              <a:t>Kunde: Fredrikstad Fotballklubb (FFK). Bilder og leveranse: sodai.no/prosjekter/ffk-concept-store (hentet 24.10.2026).</a:t>
+            </a:r>
+          </a:p>
+        </p:txBody>
+      </p:sp>
+    </p:spTree>
+  </p:cSld>
+  <p:clrMapOvr>
+    <a:masterClrMapping/>
+  </p:clrMapOvr>
+</p:sld>
+</file>
+
+<file path=ppt/slides/slide17.xml><?xml version="1.0" encoding="utf-8"?>
+<p:sld xmlns:a="http://schemas.openxmlformats.org/drawingml/2006/main" xmlns:p="http://schemas.openxmlformats.org/presentationml/2006/main" xmlns:r="http://schemas.openxmlformats.org/officeDocument/2006/relationships">
+  <p:cSld>
+    <p:bg>
+      <p:bgPr>
+        <a:solidFill>
+          <a:srgbClr val="FFFFFF"/>
+        </a:solidFill>
+        <a:effectLst/>
+      </p:bgPr>
+    </p:bg>
+    <p:spTree>
+      <p:nvGrpSpPr>
+        <p:cNvPr id="1" name=""/>
+        <p:cNvGrpSpPr/>
+        <p:nvPr/>
+      </p:nvGrpSpPr>
+      <p:grpSpPr/>
+      <p:sp>
+        <p:nvSpPr>
+          <p:cNvPr id="2" name="TextBox 1"/>
+          <p:cNvSpPr txBox="1"/>
+          <p:nvPr/>
+        </p:nvSpPr>
+        <p:spPr>
+          <a:xfrm>
+            <a:off x="457200" y="347472"/>
+            <a:ext cx="5486400" cy="274320"/>
+          </a:xfrm>
+          <a:prstGeom prst="rect">
+            <a:avLst/>
+          </a:prstGeom>
+          <a:noFill/>
+        </p:spPr>
+        <p:txBody>
+          <a:bodyPr wrap="square" anchor="t" lIns="0" rIns="0" tIns="0" bIns="0">
+            <a:spAutoFit/>
+          </a:bodyPr>
+          <a:lstStyle/>
+          <a:p>
+            <a:pPr algn="l">
+              <a:spcAft>
+                <a:spcPts val="600"/>
+              </a:spcAft>
+            </a:pPr>
+            <a:r>
+              <a:rPr sz="1100" b="1">
+                <a:solidFill>
+                  <a:srgbClr val="8A8A86"/>
+                </a:solidFill>
+                <a:latin typeface="Inter"/>
+              </a:rPr>
               <a:t>NESTE STEG</a:t>
             </a:r>
           </a:p>
@@ -8266,7 +9144,7 @@
                 </a:solidFill>
                 <a:latin typeface="Inter"/>
               </a:rPr>
-              <a:t>Befaring i Akersgata 41, og avklaring med Eiendomsspar om Mack Kvartalet.</a:t>
+              <a:t>Befaring i Akersgata 41 og Sandvika Storsenter, og avklaring med Eiendomsspar om Mack Kvartalet.</a:t>
             </a:r>
           </a:p>
         </p:txBody>
@@ -8549,7 +9427,7 @@
                 </a:solidFill>
                 <a:latin typeface="Inter"/>
               </a:rPr>
-              <a:t>Houdini bør stå der Norrøna og Arc’teryx står, i Oslo og i Tromsø</a:t>
+              <a:t>Mulige beliggenheter der Norrøna og Arc’teryx allerede møter kundene, i Oslo og Tromsø</a:t>
             </a:r>
           </a:p>
         </p:txBody>
@@ -8793,7 +9671,7 @@
                 </a:solidFill>
                 <a:latin typeface="Inter"/>
               </a:rPr>
-              <a:t>Akersgata 41 ligger i konkurrentklyngen ved Egertorget, med fem ganger arealet i Hegdehaugsveien.</a:t>
+              <a:t>Akersgata 41 ligger i konkurrentklyngen ved Egertorget. Sandvika Storsenter er et alternativ med 7,9 mill. besøkende i året.</a:t>
             </a:r>
           </a:p>
         </p:txBody>
@@ -8915,7 +9793,7 @@
                 </a:solidFill>
                 <a:latin typeface="Inter"/>
               </a:rPr>
-              <a:t>Test med vinterutleie. Fast butikk i Mack Kvartalet når hotellet åpner sommeren 2027.</a:t>
+              <a:t>Mulig start med vinterutleie, og en eventuell fast butikk i Mack Kvartalet når hotellet åpner sommeren 2027.</a:t>
             </a:r>
           </a:p>
         </p:txBody>
@@ -9076,7 +9954,7 @@
                 </a:solidFill>
                 <a:latin typeface="Inter"/>
               </a:rPr>
-              <a:t>Kilder og forbehold står på hver side.</a:t>
+              <a:t>Forslagene bygger på offentlige tall og egne anslag. Houdinis egen strategi og interne tall kjenner vi ikke. Kilder og forbehold står på hver side.</a:t>
             </a:r>
           </a:p>
         </p:txBody>
@@ -10744,7 +11622,7 @@
                 </a:solidFill>
                 <a:latin typeface="Inter"/>
               </a:rPr>
-              <a:t>Houdini selger premium performance med bærekraft og urban bruk som profil.</a:t>
+              <a:t>Slik vi leser profilen: premium performance med bærekraft og urban bruk.</a:t>
             </a:r>
           </a:p>
         </p:txBody>
@@ -10848,7 +11726,7 @@
                 </a:solidFill>
                 <a:latin typeface="Inter"/>
               </a:rPr>
-              <a:t>OSLO: LÆRDOM</a:t>
+              <a:t>OSLO: TIDLIGERE BUTIKK</a:t>
             </a:r>
           </a:p>
         </p:txBody>
@@ -11375,7 +12253,7 @@
                 </a:solidFill>
                 <a:latin typeface="Inter"/>
               </a:rPr>
-              <a:t>Houdini Circle åpnet i Stockholm i 2023 som test, med mulighet for flere markeder. Oslo kan bli det neste.</a:t>
+              <a:t>Houdini Circle åpnet i Stockholm i 2023 som test, med mulighet for flere markeder. Oslo kan være aktuelt hvis det passer Houdinis planer.</a:t>
             </a:r>
           </a:p>
         </p:txBody>
@@ -14001,7 +14879,7 @@
                 </a:solidFill>
                 <a:latin typeface="Inter"/>
               </a:rPr>
-              <a:t>Anbefaling: Akersgata 41. </a:t>
+              <a:t>Til vurdering: Akersgata 41. </a:t>
             </a:r>
             <a:r>
               <a:rPr sz="1300" b="0">
@@ -14010,7 +14888,7 @@
                 </a:solidFill>
                 <a:latin typeface="Inter"/>
               </a:rPr>
-              <a:t>Samme naboer, plass til Circle-konseptet og lavere nullpunkt. Husleien avklares med Thon.</a:t>
+              <a:t>Samme naboer, plass til et Circle-konsept og lavere nullpunkt. Husleien må avklares med Thon.</a:t>
             </a:r>
           </a:p>
         </p:txBody>
@@ -14114,7 +14992,7 @@
                 </a:solidFill>
                 <a:latin typeface="Inter"/>
               </a:rPr>
-              <a:t>OSLO: KONSEPT</a:t>
+              <a:t>OSLO: ANDRE OMRÅDER</a:t>
             </a:r>
           </a:p>
         </p:txBody>
@@ -14192,45 +15070,945 @@
                 </a:solidFill>
                 <a:latin typeface="Inter"/>
               </a:rPr>
-              <a:t>Et Houdini Circle i Oslo: butikk, reparasjon og utleie i samme rom</a:t>
-            </a:r>
-          </a:p>
-        </p:txBody>
-      </p:sp>
-      <p:pic>
-        <p:nvPicPr>
-          <p:cNvPr id="5" name="Picture 4" descr="interior_b_c16x9.jpg"/>
-          <p:cNvPicPr>
-            <a:picLocks noChangeAspect="1"/>
-          </p:cNvPicPr>
-          <p:nvPr/>
-        </p:nvPicPr>
-        <p:blipFill>
-          <a:blip r:embed="rId2"/>
-          <a:stretch>
-            <a:fillRect/>
-          </a:stretch>
-        </p:blipFill>
-        <p:spPr>
-          <a:xfrm>
-            <a:off x="457200" y="1600200"/>
-            <a:ext cx="7406640" cy="4166235"/>
-          </a:xfrm>
-          <a:prstGeom prst="rect">
-            <a:avLst/>
-          </a:prstGeom>
-        </p:spPr>
-      </p:pic>
-      <p:sp>
-        <p:nvSpPr>
-          <p:cNvPr id="6" name="TextBox 5"/>
+              <a:t>Sandvika Storsenter: 7,9 mill. besøkende i året, med Norrøna og Anton Sport under samme tak</a:t>
+            </a:r>
+          </a:p>
+        </p:txBody>
+      </p:sp>
+      <p:graphicFrame>
+        <p:nvGraphicFramePr>
+          <p:cNvPr id="5" name="Table 4"/>
+          <p:cNvGraphicFramePr>
+            <a:graphicFrameLocks noGrp="1"/>
+          </p:cNvGraphicFramePr>
+          <p:nvPr/>
+        </p:nvGraphicFramePr>
+        <p:xfrm>
+          <a:off x="457200" y="1645920"/>
+          <a:ext cx="11277295" cy="3291840"/>
+        </p:xfrm>
+        <a:graphic>
+          <a:graphicData uri="http://schemas.openxmlformats.org/drawingml/2006/table">
+            <a:tbl>
+              <a:tblPr firstRow="0" bandRow="0">
+                <a:tableStyleId>{2D5ABB26-0587-4C30-8999-92F81FD0307C}</a:tableStyleId>
+              </a:tblPr>
+              <a:tblGrid>
+                <a:gridCol w="2377440"/>
+                <a:gridCol w="3108960"/>
+                <a:gridCol w="3657600"/>
+                <a:gridCol w="2133295"/>
+              </a:tblGrid>
+              <a:tr h="548640">
+                <a:tc>
+                  <a:txBody>
+                    <a:bodyPr/>
+                    <a:lstStyle/>
+                    <a:p>
+                      <a:pPr algn="l"/>
+                      <a:r>
+                        <a:rPr sz="1200" b="1">
+                          <a:solidFill>
+                            <a:srgbClr val="0F0F0F"/>
+                          </a:solidFill>
+                          <a:latin typeface="Inter"/>
+                        </a:rPr>
+                        <a:t>Område</a:t>
+                      </a:r>
+                    </a:p>
+                  </a:txBody>
+                  <a:tcPr marL="73152" marR="73152" marT="27432" marB="27432" anchor="ctr">
+                    <a:noFill/>
+                    <a:lnL w="0">
+                      <a:noFill/>
+                    </a:lnL>
+                    <a:lnR w="0">
+                      <a:noFill/>
+                    </a:lnR>
+                    <a:lnT w="0">
+                      <a:noFill/>
+                    </a:lnT>
+                    <a:lnB w="19050">
+                      <a:solidFill>
+                        <a:srgbClr val="1C1F1D"/>
+                      </a:solidFill>
+                    </a:lnB>
+                  </a:tcPr>
+                </a:tc>
+                <a:tc>
+                  <a:txBody>
+                    <a:bodyPr/>
+                    <a:lstStyle/>
+                    <a:p>
+                      <a:pPr algn="l"/>
+                      <a:r>
+                        <a:rPr sz="1200" b="1">
+                          <a:solidFill>
+                            <a:srgbClr val="0F0F0F"/>
+                          </a:solidFill>
+                          <a:latin typeface="Inter"/>
+                        </a:rPr>
+                        <a:t>Besøkende og omsetning</a:t>
+                      </a:r>
+                    </a:p>
+                  </a:txBody>
+                  <a:tcPr marL="73152" marR="73152" marT="27432" marB="27432" anchor="ctr">
+                    <a:noFill/>
+                    <a:lnL w="0">
+                      <a:noFill/>
+                    </a:lnL>
+                    <a:lnR w="0">
+                      <a:noFill/>
+                    </a:lnR>
+                    <a:lnT w="0">
+                      <a:noFill/>
+                    </a:lnT>
+                    <a:lnB w="19050">
+                      <a:solidFill>
+                        <a:srgbClr val="1C1F1D"/>
+                      </a:solidFill>
+                    </a:lnB>
+                  </a:tcPr>
+                </a:tc>
+                <a:tc>
+                  <a:txBody>
+                    <a:bodyPr/>
+                    <a:lstStyle/>
+                    <a:p>
+                      <a:pPr algn="l"/>
+                      <a:r>
+                        <a:rPr sz="1200" b="1">
+                          <a:solidFill>
+                            <a:srgbClr val="0F0F0F"/>
+                          </a:solidFill>
+                          <a:latin typeface="Inter"/>
+                        </a:rPr>
+                        <a:t>Konkurrenter i området</a:t>
+                      </a:r>
+                    </a:p>
+                  </a:txBody>
+                  <a:tcPr marL="73152" marR="73152" marT="27432" marB="27432" anchor="ctr">
+                    <a:noFill/>
+                    <a:lnL w="0">
+                      <a:noFill/>
+                    </a:lnL>
+                    <a:lnR w="0">
+                      <a:noFill/>
+                    </a:lnR>
+                    <a:lnT w="0">
+                      <a:noFill/>
+                    </a:lnT>
+                    <a:lnB w="19050">
+                      <a:solidFill>
+                        <a:srgbClr val="1C1F1D"/>
+                      </a:solidFill>
+                    </a:lnB>
+                  </a:tcPr>
+                </a:tc>
+                <a:tc>
+                  <a:txBody>
+                    <a:bodyPr/>
+                    <a:lstStyle/>
+                    <a:p>
+                      <a:pPr algn="l"/>
+                      <a:r>
+                        <a:rPr sz="1200" b="1">
+                          <a:solidFill>
+                            <a:srgbClr val="0F0F0F"/>
+                          </a:solidFill>
+                          <a:latin typeface="Inter"/>
+                        </a:rPr>
+                        <a:t>Kundegrunnlag</a:t>
+                      </a:r>
+                    </a:p>
+                  </a:txBody>
+                  <a:tcPr marL="73152" marR="73152" marT="27432" marB="27432" anchor="ctr">
+                    <a:noFill/>
+                    <a:lnL w="0">
+                      <a:noFill/>
+                    </a:lnL>
+                    <a:lnR w="0">
+                      <a:noFill/>
+                    </a:lnR>
+                    <a:lnT w="0">
+                      <a:noFill/>
+                    </a:lnT>
+                    <a:lnB w="19050">
+                      <a:solidFill>
+                        <a:srgbClr val="1C1F1D"/>
+                      </a:solidFill>
+                    </a:lnB>
+                  </a:tcPr>
+                </a:tc>
+              </a:tr>
+              <a:tr h="548640">
+                <a:tc>
+                  <a:txBody>
+                    <a:bodyPr/>
+                    <a:lstStyle/>
+                    <a:p>
+                      <a:pPr algn="l"/>
+                      <a:r>
+                        <a:rPr sz="1200" b="1">
+                          <a:solidFill>
+                            <a:srgbClr val="0F0F0F"/>
+                          </a:solidFill>
+                          <a:latin typeface="Inter"/>
+                        </a:rPr>
+                        <a:t>Sentrum: Karl Johan og Akersgata</a:t>
+                      </a:r>
+                    </a:p>
+                  </a:txBody>
+                  <a:tcPr marL="73152" marR="73152" marT="27432" marB="27432" anchor="ctr">
+                    <a:noFill/>
+                    <a:lnL w="0">
+                      <a:noFill/>
+                    </a:lnL>
+                    <a:lnR w="0">
+                      <a:noFill/>
+                    </a:lnR>
+                    <a:lnT w="0">
+                      <a:noFill/>
+                    </a:lnT>
+                    <a:lnB w="9525">
+                      <a:solidFill>
+                        <a:srgbClr val="E0E0E0"/>
+                      </a:solidFill>
+                    </a:lnB>
+                  </a:tcPr>
+                </a:tc>
+                <a:tc>
+                  <a:txBody>
+                    <a:bodyPr/>
+                    <a:lstStyle/>
+                    <a:p>
+                      <a:pPr algn="l"/>
+                      <a:r>
+                        <a:rPr sz="1200" b="0">
+                          <a:solidFill>
+                            <a:srgbClr val="0F0F0F"/>
+                          </a:solidFill>
+                          <a:latin typeface="Inter"/>
+                        </a:rPr>
+                        <a:t>ca. 4 500 forbi i timen på hverdager (Karl Johan)</a:t>
+                      </a:r>
+                    </a:p>
+                  </a:txBody>
+                  <a:tcPr marL="73152" marR="73152" marT="27432" marB="27432" anchor="ctr">
+                    <a:noFill/>
+                    <a:lnL w="0">
+                      <a:noFill/>
+                    </a:lnL>
+                    <a:lnR w="0">
+                      <a:noFill/>
+                    </a:lnR>
+                    <a:lnT w="0">
+                      <a:noFill/>
+                    </a:lnT>
+                    <a:lnB w="9525">
+                      <a:solidFill>
+                        <a:srgbClr val="E0E0E0"/>
+                      </a:solidFill>
+                    </a:lnB>
+                  </a:tcPr>
+                </a:tc>
+                <a:tc>
+                  <a:txBody>
+                    <a:bodyPr/>
+                    <a:lstStyle/>
+                    <a:p>
+                      <a:pPr algn="l"/>
+                      <a:r>
+                        <a:rPr sz="1200" b="0">
+                          <a:solidFill>
+                            <a:srgbClr val="0F0F0F"/>
+                          </a:solidFill>
+                          <a:latin typeface="Inter"/>
+                        </a:rPr>
+                        <a:t>Arc’teryx, Fjällräven, Peak Performance, Norrøna flaggskip, Klättermusen</a:t>
+                      </a:r>
+                    </a:p>
+                  </a:txBody>
+                  <a:tcPr marL="73152" marR="73152" marT="27432" marB="27432" anchor="ctr">
+                    <a:noFill/>
+                    <a:lnL w="0">
+                      <a:noFill/>
+                    </a:lnL>
+                    <a:lnR w="0">
+                      <a:noFill/>
+                    </a:lnR>
+                    <a:lnT w="0">
+                      <a:noFill/>
+                    </a:lnT>
+                    <a:lnB w="9525">
+                      <a:solidFill>
+                        <a:srgbClr val="E0E0E0"/>
+                      </a:solidFill>
+                    </a:lnB>
+                  </a:tcPr>
+                </a:tc>
+                <a:tc>
+                  <a:txBody>
+                    <a:bodyPr/>
+                    <a:lstStyle/>
+                    <a:p>
+                      <a:pPr algn="l"/>
+                      <a:r>
+                        <a:rPr sz="1200" b="0">
+                          <a:solidFill>
+                            <a:srgbClr val="0F0F0F"/>
+                          </a:solidFill>
+                          <a:latin typeface="Inter"/>
+                        </a:rPr>
+                        <a:t>Byfolk og turister</a:t>
+                      </a:r>
+                    </a:p>
+                  </a:txBody>
+                  <a:tcPr marL="73152" marR="73152" marT="27432" marB="27432" anchor="ctr">
+                    <a:noFill/>
+                    <a:lnL w="0">
+                      <a:noFill/>
+                    </a:lnL>
+                    <a:lnR w="0">
+                      <a:noFill/>
+                    </a:lnR>
+                    <a:lnT w="0">
+                      <a:noFill/>
+                    </a:lnT>
+                    <a:lnB w="9525">
+                      <a:solidFill>
+                        <a:srgbClr val="E0E0E0"/>
+                      </a:solidFill>
+                    </a:lnB>
+                  </a:tcPr>
+                </a:tc>
+              </a:tr>
+              <a:tr h="548640">
+                <a:tc>
+                  <a:txBody>
+                    <a:bodyPr/>
+                    <a:lstStyle/>
+                    <a:p>
+                      <a:pPr algn="l"/>
+                      <a:r>
+                        <a:rPr sz="1200" b="1">
+                          <a:solidFill>
+                            <a:srgbClr val="0F0F0F"/>
+                          </a:solidFill>
+                          <a:latin typeface="Inter"/>
+                        </a:rPr>
+                        <a:t>Sandvika Storsenter</a:t>
+                      </a:r>
+                    </a:p>
+                  </a:txBody>
+                  <a:tcPr marL="73152" marR="73152" marT="27432" marB="27432" anchor="ctr">
+                    <a:solidFill>
+                      <a:srgbClr val="FFEBE4"/>
+                    </a:solidFill>
+                    <a:lnL w="0">
+                      <a:noFill/>
+                    </a:lnL>
+                    <a:lnR w="0">
+                      <a:noFill/>
+                    </a:lnR>
+                    <a:lnT w="0">
+                      <a:noFill/>
+                    </a:lnT>
+                    <a:lnB w="9525">
+                      <a:solidFill>
+                        <a:srgbClr val="E0E0E0"/>
+                      </a:solidFill>
+                    </a:lnB>
+                  </a:tcPr>
+                </a:tc>
+                <a:tc>
+                  <a:txBody>
+                    <a:bodyPr/>
+                    <a:lstStyle/>
+                    <a:p>
+                      <a:pPr algn="l"/>
+                      <a:r>
+                        <a:rPr sz="1200" b="0">
+                          <a:solidFill>
+                            <a:srgbClr val="0F0F0F"/>
+                          </a:solidFill>
+                          <a:latin typeface="Inter"/>
+                        </a:rPr>
+                        <a:t>7,9 mill. besøkende, 3 759 MNOK, 196 butikker</a:t>
+                      </a:r>
+                    </a:p>
+                  </a:txBody>
+                  <a:tcPr marL="73152" marR="73152" marT="27432" marB="27432" anchor="ctr">
+                    <a:solidFill>
+                      <a:srgbClr val="FFEBE4"/>
+                    </a:solidFill>
+                    <a:lnL w="0">
+                      <a:noFill/>
+                    </a:lnL>
+                    <a:lnR w="0">
+                      <a:noFill/>
+                    </a:lnR>
+                    <a:lnT w="0">
+                      <a:noFill/>
+                    </a:lnT>
+                    <a:lnB w="9525">
+                      <a:solidFill>
+                        <a:srgbClr val="E0E0E0"/>
+                      </a:solidFill>
+                    </a:lnB>
+                  </a:tcPr>
+                </a:tc>
+                <a:tc>
+                  <a:txBody>
+                    <a:bodyPr/>
+                    <a:lstStyle/>
+                    <a:p>
+                      <a:pPr algn="l"/>
+                      <a:r>
+                        <a:rPr sz="1200" b="0">
+                          <a:solidFill>
+                            <a:srgbClr val="0F0F0F"/>
+                          </a:solidFill>
+                          <a:latin typeface="Inter"/>
+                        </a:rPr>
+                        <a:t>Norrøna konseptbutikk, Anton Sport</a:t>
+                      </a:r>
+                    </a:p>
+                  </a:txBody>
+                  <a:tcPr marL="73152" marR="73152" marT="27432" marB="27432" anchor="ctr">
+                    <a:solidFill>
+                      <a:srgbClr val="FFEBE4"/>
+                    </a:solidFill>
+                    <a:lnL w="0">
+                      <a:noFill/>
+                    </a:lnL>
+                    <a:lnR w="0">
+                      <a:noFill/>
+                    </a:lnR>
+                    <a:lnT w="0">
+                      <a:noFill/>
+                    </a:lnT>
+                    <a:lnB w="9525">
+                      <a:solidFill>
+                        <a:srgbClr val="E0E0E0"/>
+                      </a:solidFill>
+                    </a:lnB>
+                  </a:tcPr>
+                </a:tc>
+                <a:tc>
+                  <a:txBody>
+                    <a:bodyPr/>
+                    <a:lstStyle/>
+                    <a:p>
+                      <a:pPr algn="l"/>
+                      <a:r>
+                        <a:rPr sz="1200" b="0">
+                          <a:solidFill>
+                            <a:srgbClr val="0F0F0F"/>
+                          </a:solidFill>
+                          <a:latin typeface="Inter"/>
+                        </a:rPr>
+                        <a:t>Bærum og Asker</a:t>
+                      </a:r>
+                    </a:p>
+                  </a:txBody>
+                  <a:tcPr marL="73152" marR="73152" marT="27432" marB="27432" anchor="ctr">
+                    <a:solidFill>
+                      <a:srgbClr val="FFEBE4"/>
+                    </a:solidFill>
+                    <a:lnL w="0">
+                      <a:noFill/>
+                    </a:lnL>
+                    <a:lnR w="0">
+                      <a:noFill/>
+                    </a:lnR>
+                    <a:lnT w="0">
+                      <a:noFill/>
+                    </a:lnT>
+                    <a:lnB w="9525">
+                      <a:solidFill>
+                        <a:srgbClr val="E0E0E0"/>
+                      </a:solidFill>
+                    </a:lnB>
+                  </a:tcPr>
+                </a:tc>
+              </a:tr>
+              <a:tr h="548640">
+                <a:tc>
+                  <a:txBody>
+                    <a:bodyPr/>
+                    <a:lstStyle/>
+                    <a:p>
+                      <a:pPr algn="l"/>
+                      <a:r>
+                        <a:rPr sz="1200" b="1">
+                          <a:solidFill>
+                            <a:srgbClr val="0F0F0F"/>
+                          </a:solidFill>
+                          <a:latin typeface="Inter"/>
+                        </a:rPr>
+                        <a:t>CC Vest, Lilleaker</a:t>
+                      </a:r>
+                    </a:p>
+                  </a:txBody>
+                  <a:tcPr marL="73152" marR="73152" marT="27432" marB="27432" anchor="ctr">
+                    <a:noFill/>
+                    <a:lnL w="0">
+                      <a:noFill/>
+                    </a:lnL>
+                    <a:lnR w="0">
+                      <a:noFill/>
+                    </a:lnR>
+                    <a:lnT w="0">
+                      <a:noFill/>
+                    </a:lnT>
+                    <a:lnB w="9525">
+                      <a:solidFill>
+                        <a:srgbClr val="E0E0E0"/>
+                      </a:solidFill>
+                    </a:lnB>
+                  </a:tcPr>
+                </a:tc>
+                <a:tc>
+                  <a:txBody>
+                    <a:bodyPr/>
+                    <a:lstStyle/>
+                    <a:p>
+                      <a:pPr algn="l"/>
+                      <a:r>
+                        <a:rPr sz="1200" b="0">
+                          <a:solidFill>
+                            <a:srgbClr val="0F0F0F"/>
+                          </a:solidFill>
+                          <a:latin typeface="Inter"/>
+                        </a:rPr>
+                        <a:t>1 425 MNOK første halvår 2025 (+4,9 %), 78 butikker</a:t>
+                      </a:r>
+                    </a:p>
+                  </a:txBody>
+                  <a:tcPr marL="73152" marR="73152" marT="27432" marB="27432" anchor="ctr">
+                    <a:noFill/>
+                    <a:lnL w="0">
+                      <a:noFill/>
+                    </a:lnL>
+                    <a:lnR w="0">
+                      <a:noFill/>
+                    </a:lnR>
+                    <a:lnT w="0">
+                      <a:noFill/>
+                    </a:lnT>
+                    <a:lnB w="9525">
+                      <a:solidFill>
+                        <a:srgbClr val="E0E0E0"/>
+                      </a:solidFill>
+                    </a:lnB>
+                  </a:tcPr>
+                </a:tc>
+                <a:tc>
+                  <a:txBody>
+                    <a:bodyPr/>
+                    <a:lstStyle/>
+                    <a:p>
+                      <a:pPr algn="l"/>
+                      <a:r>
+                        <a:rPr sz="1200" b="0">
+                          <a:solidFill>
+                            <a:srgbClr val="0F0F0F"/>
+                          </a:solidFill>
+                          <a:latin typeface="Inter"/>
+                        </a:rPr>
+                        <a:t>Norrøna Concept Store, Anton Sport. Norrøna House på Lysaker i nærheten</a:t>
+                      </a:r>
+                    </a:p>
+                  </a:txBody>
+                  <a:tcPr marL="73152" marR="73152" marT="27432" marB="27432" anchor="ctr">
+                    <a:noFill/>
+                    <a:lnL w="0">
+                      <a:noFill/>
+                    </a:lnL>
+                    <a:lnR w="0">
+                      <a:noFill/>
+                    </a:lnR>
+                    <a:lnT w="0">
+                      <a:noFill/>
+                    </a:lnT>
+                    <a:lnB w="9525">
+                      <a:solidFill>
+                        <a:srgbClr val="E0E0E0"/>
+                      </a:solidFill>
+                    </a:lnB>
+                  </a:tcPr>
+                </a:tc>
+                <a:tc>
+                  <a:txBody>
+                    <a:bodyPr/>
+                    <a:lstStyle/>
+                    <a:p>
+                      <a:pPr algn="l"/>
+                      <a:r>
+                        <a:rPr sz="1200" b="0">
+                          <a:solidFill>
+                            <a:srgbClr val="0F0F0F"/>
+                          </a:solidFill>
+                          <a:latin typeface="Inter"/>
+                        </a:rPr>
+                        <a:t>Oslo vest og østre Bærum</a:t>
+                      </a:r>
+                    </a:p>
+                  </a:txBody>
+                  <a:tcPr marL="73152" marR="73152" marT="27432" marB="27432" anchor="ctr">
+                    <a:noFill/>
+                    <a:lnL w="0">
+                      <a:noFill/>
+                    </a:lnL>
+                    <a:lnR w="0">
+                      <a:noFill/>
+                    </a:lnR>
+                    <a:lnT w="0">
+                      <a:noFill/>
+                    </a:lnT>
+                    <a:lnB w="9525">
+                      <a:solidFill>
+                        <a:srgbClr val="E0E0E0"/>
+                      </a:solidFill>
+                    </a:lnB>
+                  </a:tcPr>
+                </a:tc>
+              </a:tr>
+              <a:tr h="548640">
+                <a:tc>
+                  <a:txBody>
+                    <a:bodyPr/>
+                    <a:lstStyle/>
+                    <a:p>
+                      <a:pPr algn="l"/>
+                      <a:r>
+                        <a:rPr sz="1200" b="1">
+                          <a:solidFill>
+                            <a:srgbClr val="0F0F0F"/>
+                          </a:solidFill>
+                          <a:latin typeface="Inter"/>
+                        </a:rPr>
+                        <a:t>Storo Storsenter</a:t>
+                      </a:r>
+                    </a:p>
+                  </a:txBody>
+                  <a:tcPr marL="73152" marR="73152" marT="27432" marB="27432" anchor="ctr">
+                    <a:noFill/>
+                    <a:lnL w="0">
+                      <a:noFill/>
+                    </a:lnL>
+                    <a:lnR w="0">
+                      <a:noFill/>
+                    </a:lnR>
+                    <a:lnT w="0">
+                      <a:noFill/>
+                    </a:lnT>
+                    <a:lnB w="9525">
+                      <a:solidFill>
+                        <a:srgbClr val="E0E0E0"/>
+                      </a:solidFill>
+                    </a:lnB>
+                  </a:tcPr>
+                </a:tc>
+                <a:tc>
+                  <a:txBody>
+                    <a:bodyPr/>
+                    <a:lstStyle/>
+                    <a:p>
+                      <a:pPr algn="l"/>
+                      <a:r>
+                        <a:rPr sz="1200" b="0">
+                          <a:solidFill>
+                            <a:srgbClr val="0F0F0F"/>
+                          </a:solidFill>
+                          <a:latin typeface="Inter"/>
+                        </a:rPr>
+                        <a:t>1 653 MNOK første halvår 2025</a:t>
+                      </a:r>
+                    </a:p>
+                  </a:txBody>
+                  <a:tcPr marL="73152" marR="73152" marT="27432" marB="27432" anchor="ctr">
+                    <a:noFill/>
+                    <a:lnL w="0">
+                      <a:noFill/>
+                    </a:lnL>
+                    <a:lnR w="0">
+                      <a:noFill/>
+                    </a:lnR>
+                    <a:lnT w="0">
+                      <a:noFill/>
+                    </a:lnT>
+                    <a:lnB w="9525">
+                      <a:solidFill>
+                        <a:srgbClr val="E0E0E0"/>
+                      </a:solidFill>
+                    </a:lnB>
+                  </a:tcPr>
+                </a:tc>
+                <a:tc>
+                  <a:txBody>
+                    <a:bodyPr/>
+                    <a:lstStyle/>
+                    <a:p>
+                      <a:pPr algn="l"/>
+                      <a:r>
+                        <a:rPr sz="1200" b="0">
+                          <a:solidFill>
+                            <a:srgbClr val="0F0F0F"/>
+                          </a:solidFill>
+                          <a:latin typeface="Inter"/>
+                        </a:rPr>
+                        <a:t>Norrøna (ikke bekreftet)</a:t>
+                      </a:r>
+                    </a:p>
+                  </a:txBody>
+                  <a:tcPr marL="73152" marR="73152" marT="27432" marB="27432" anchor="ctr">
+                    <a:noFill/>
+                    <a:lnL w="0">
+                      <a:noFill/>
+                    </a:lnL>
+                    <a:lnR w="0">
+                      <a:noFill/>
+                    </a:lnR>
+                    <a:lnT w="0">
+                      <a:noFill/>
+                    </a:lnT>
+                    <a:lnB w="9525">
+                      <a:solidFill>
+                        <a:srgbClr val="E0E0E0"/>
+                      </a:solidFill>
+                    </a:lnB>
+                  </a:tcPr>
+                </a:tc>
+                <a:tc>
+                  <a:txBody>
+                    <a:bodyPr/>
+                    <a:lstStyle/>
+                    <a:p>
+                      <a:pPr algn="l"/>
+                      <a:r>
+                        <a:rPr sz="1200" b="0">
+                          <a:solidFill>
+                            <a:srgbClr val="0F0F0F"/>
+                          </a:solidFill>
+                          <a:latin typeface="Inter"/>
+                        </a:rPr>
+                        <a:t>Oslo nord og øst</a:t>
+                      </a:r>
+                    </a:p>
+                  </a:txBody>
+                  <a:tcPr marL="73152" marR="73152" marT="27432" marB="27432" anchor="ctr">
+                    <a:noFill/>
+                    <a:lnL w="0">
+                      <a:noFill/>
+                    </a:lnL>
+                    <a:lnR w="0">
+                      <a:noFill/>
+                    </a:lnR>
+                    <a:lnT w="0">
+                      <a:noFill/>
+                    </a:lnT>
+                    <a:lnB w="9525">
+                      <a:solidFill>
+                        <a:srgbClr val="E0E0E0"/>
+                      </a:solidFill>
+                    </a:lnB>
+                  </a:tcPr>
+                </a:tc>
+              </a:tr>
+              <a:tr h="548640">
+                <a:tc>
+                  <a:txBody>
+                    <a:bodyPr/>
+                    <a:lstStyle/>
+                    <a:p>
+                      <a:pPr algn="l"/>
+                      <a:r>
+                        <a:rPr sz="1200" b="1">
+                          <a:solidFill>
+                            <a:srgbClr val="0F0F0F"/>
+                          </a:solidFill>
+                          <a:latin typeface="Inter"/>
+                        </a:rPr>
+                        <a:t>Strømmen Storsenter</a:t>
+                      </a:r>
+                    </a:p>
+                  </a:txBody>
+                  <a:tcPr marL="73152" marR="73152" marT="27432" marB="27432" anchor="ctr">
+                    <a:noFill/>
+                    <a:lnL w="0">
+                      <a:noFill/>
+                    </a:lnL>
+                    <a:lnR w="0">
+                      <a:noFill/>
+                    </a:lnR>
+                    <a:lnT w="0">
+                      <a:noFill/>
+                    </a:lnT>
+                    <a:lnB w="9525">
+                      <a:noFill/>
+                    </a:lnB>
+                  </a:tcPr>
+                </a:tc>
+                <a:tc>
+                  <a:txBody>
+                    <a:bodyPr/>
+                    <a:lstStyle/>
+                    <a:p>
+                      <a:pPr algn="l"/>
+                      <a:r>
+                        <a:rPr sz="1200" b="0">
+                          <a:solidFill>
+                            <a:srgbClr val="0F0F0F"/>
+                          </a:solidFill>
+                          <a:latin typeface="Inter"/>
+                        </a:rPr>
+                        <a:t>Over 4 000 MNOK i 2025, flest i Thon-porteføljen</a:t>
+                      </a:r>
+                    </a:p>
+                  </a:txBody>
+                  <a:tcPr marL="73152" marR="73152" marT="27432" marB="27432" anchor="ctr">
+                    <a:noFill/>
+                    <a:lnL w="0">
+                      <a:noFill/>
+                    </a:lnL>
+                    <a:lnR w="0">
+                      <a:noFill/>
+                    </a:lnR>
+                    <a:lnT w="0">
+                      <a:noFill/>
+                    </a:lnT>
+                    <a:lnB w="9525">
+                      <a:noFill/>
+                    </a:lnB>
+                  </a:tcPr>
+                </a:tc>
+                <a:tc>
+                  <a:txBody>
+                    <a:bodyPr/>
+                    <a:lstStyle/>
+                    <a:p>
+                      <a:pPr algn="l"/>
+                      <a:r>
+                        <a:rPr sz="1200" b="0">
+                          <a:solidFill>
+                            <a:srgbClr val="0F0F0F"/>
+                          </a:solidFill>
+                          <a:latin typeface="Inter"/>
+                        </a:rPr>
+                        <a:t>Ingen premium outdoor bekreftet</a:t>
+                      </a:r>
+                    </a:p>
+                  </a:txBody>
+                  <a:tcPr marL="73152" marR="73152" marT="27432" marB="27432" anchor="ctr">
+                    <a:noFill/>
+                    <a:lnL w="0">
+                      <a:noFill/>
+                    </a:lnL>
+                    <a:lnR w="0">
+                      <a:noFill/>
+                    </a:lnR>
+                    <a:lnT w="0">
+                      <a:noFill/>
+                    </a:lnT>
+                    <a:lnB w="9525">
+                      <a:noFill/>
+                    </a:lnB>
+                  </a:tcPr>
+                </a:tc>
+                <a:tc>
+                  <a:txBody>
+                    <a:bodyPr/>
+                    <a:lstStyle/>
+                    <a:p>
+                      <a:pPr algn="l"/>
+                      <a:r>
+                        <a:rPr sz="1200" b="0">
+                          <a:solidFill>
+                            <a:srgbClr val="0F0F0F"/>
+                          </a:solidFill>
+                          <a:latin typeface="Inter"/>
+                        </a:rPr>
+                        <a:t>Romerike</a:t>
+                      </a:r>
+                    </a:p>
+                  </a:txBody>
+                  <a:tcPr marL="73152" marR="73152" marT="27432" marB="27432" anchor="ctr">
+                    <a:noFill/>
+                    <a:lnL w="0">
+                      <a:noFill/>
+                    </a:lnL>
+                    <a:lnR w="0">
+                      <a:noFill/>
+                    </a:lnR>
+                    <a:lnT w="0">
+                      <a:noFill/>
+                    </a:lnT>
+                    <a:lnB w="9525">
+                      <a:noFill/>
+                    </a:lnB>
+                  </a:tcPr>
+                </a:tc>
+              </a:tr>
+            </a:tbl>
+          </a:graphicData>
+        </a:graphic>
+      </p:graphicFrame>
+      <p:sp>
+        <p:nvSpPr>
+          <p:cNvPr id="6" name="Rectangle 5"/>
+          <p:cNvSpPr/>
+          <p:nvPr/>
+        </p:nvSpPr>
+        <p:spPr>
+          <a:xfrm>
+            <a:off x="457200" y="5166360"/>
+            <a:ext cx="11277295" cy="685800"/>
+          </a:xfrm>
+          <a:prstGeom prst="rect">
+            <a:avLst/>
+          </a:prstGeom>
+          <a:solidFill>
+            <a:srgbClr val="F4F4F2"/>
+          </a:solidFill>
+          <a:ln>
+            <a:noFill/>
+          </a:ln>
+          <a:effectLst/>
+        </p:spPr>
+        <p:style>
+          <a:lnRef idx="1">
+            <a:schemeClr val="accent1"/>
+          </a:lnRef>
+          <a:fillRef idx="3">
+            <a:schemeClr val="accent1"/>
+          </a:fillRef>
+          <a:effectRef idx="2">
+            <a:schemeClr val="accent1"/>
+          </a:effectRef>
+          <a:fontRef idx="minor">
+            <a:schemeClr val="lt1"/>
+          </a:fontRef>
+        </p:style>
+        <p:txBody>
+          <a:bodyPr rtlCol="0" anchor="ctr"/>
+          <a:lstStyle/>
+          <a:p>
+            <a:pPr algn="ctr"/>
+          </a:p>
+        </p:txBody>
+      </p:sp>
+      <p:sp>
+        <p:nvSpPr>
+          <p:cNvPr id="7" name="TextBox 6"/>
           <p:cNvSpPr txBox="1"/>
           <p:nvPr/>
         </p:nvSpPr>
         <p:spPr>
           <a:xfrm>
-            <a:off x="8229600" y="1691640"/>
-            <a:ext cx="3504895" cy="4023360"/>
+            <a:off x="640080" y="5166360"/>
+            <a:ext cx="10911535" cy="685800"/>
           </a:xfrm>
           <a:prstGeom prst="rect">
             <a:avLst/>
@@ -14238,66 +16016,40 @@
           <a:noFill/>
         </p:spPr>
         <p:txBody>
-          <a:bodyPr wrap="square" anchor="t" lIns="0" rIns="0" tIns="0" bIns="0">
+          <a:bodyPr wrap="square" anchor="ctr" lIns="0" rIns="0" tIns="0" bIns="0">
             <a:spAutoFit/>
           </a:bodyPr>
           <a:lstStyle/>
           <a:p>
-            <a:pPr algn="l" marL="228600" indent="-201168">
-              <a:spcAft>
-                <a:spcPts val="1600"/>
-              </a:spcAft>
-              <a:buChar char="•"/>
-            </a:pPr>
-            <a:r>
-              <a:rPr sz="1600" b="0">
+            <a:pPr algn="l">
+              <a:spcAft>
+                <a:spcPts val="600"/>
+              </a:spcAft>
+            </a:pPr>
+            <a:r>
+              <a:rPr sz="1300" b="1">
                 <a:solidFill>
                   <a:srgbClr val="0F0F0F"/>
                 </a:solidFill>
                 <a:latin typeface="Inter"/>
               </a:rPr>
-              <a:t>Houdini Circle i Stockholm samler kjøp, leie, reparasjon og brukt. Konseptet ble åpnet som test i 2023.</a:t>
-            </a:r>
-          </a:p>
-          <a:p>
-            <a:pPr algn="l" marL="228600" indent="-201168">
-              <a:spcAft>
-                <a:spcPts val="1600"/>
-              </a:spcAft>
-              <a:buChar char="•"/>
-            </a:pPr>
-            <a:r>
-              <a:rPr sz="1600" b="0">
+              <a:t>Thon Eiendom står bak Akersgata 41, Sandvika, Storo og Strømmen. </a:t>
+            </a:r>
+            <a:r>
+              <a:rPr sz="1300" b="0">
                 <a:solidFill>
                   <a:srgbClr val="0F0F0F"/>
                 </a:solidFill>
                 <a:latin typeface="Inter"/>
               </a:rPr>
-              <a:t>Arc’teryx åpnet reparasjon og vask i Karl Johans gate 21 i juni 2026. Houdini må svare med noe tydeligere.</a:t>
-            </a:r>
-          </a:p>
-          <a:p>
-            <a:pPr algn="l" marL="228600" indent="-201168">
-              <a:spcAft>
-                <a:spcPts val="1600"/>
-              </a:spcAft>
-              <a:buChar char="•"/>
-            </a:pPr>
-            <a:r>
-              <a:rPr sz="1600" b="0">
-                <a:solidFill>
-                  <a:srgbClr val="0F0F0F"/>
-                </a:solidFill>
-                <a:latin typeface="Inter"/>
-              </a:rPr>
-              <a:t>Underetasjen i Akersgata 41 gir plass til verksted og utleielager.</a:t>
-            </a:r>
-          </a:p>
-        </p:txBody>
-      </p:sp>
-      <p:sp>
-        <p:nvSpPr>
-          <p:cNvPr id="7" name="TextBox 6"/>
+              <a:t>Én samtale med gårdeier kan dekke flere alternativer. Husleie og ledige lokaler i sentrene er ikke undersøkt.</a:t>
+            </a:r>
+          </a:p>
+        </p:txBody>
+      </p:sp>
+      <p:sp>
+        <p:nvSpPr>
+          <p:cNvPr id="8" name="TextBox 7"/>
           <p:cNvSpPr txBox="1"/>
           <p:nvPr/>
         </p:nvSpPr>
@@ -14329,7 +16081,7 @@
                 </a:solidFill>
                 <a:latin typeface="Inter"/>
               </a:rPr>
-              <a:t>Illustrasjon av konsept. Kilder: houdinisportswear.com og Suston Magazine 02.10.2023 (Houdini Circle), FashionUnited 23.06.2026 (Arc’teryx ReBIRD).</a:t>
+              <a:t>Butikker ifølge sentrenes egne sider, Brønnøysundregistrene og stillingsannonser, ikke kontrollert på stedet. Kilder: Thon Eiendom (Sandvika, udatert), Norsk Retail Hub via Finansavisen 16.07.2025 (første halvår 2025), Thon pressemelding 2026 (Strømmen), Thon Eiendom (Karl Johan, antatt).</a:t>
             </a:r>
           </a:p>
         </p:txBody>
@@ -14394,7 +16146,7 @@
                 </a:solidFill>
                 <a:latin typeface="Inter"/>
               </a:rPr>
-              <a:t>TROMSØ: MARKED</a:t>
+              <a:t>OSLO: KONSEPT</a:t>
             </a:r>
           </a:p>
         </p:txBody>
@@ -14472,14 +16224,14 @@
                 </a:solidFill>
                 <a:latin typeface="Inter"/>
               </a:rPr>
-              <a:t>Norrøna og Bergans har egne butikker i Tromsø. Vi fant ingen som fører Houdini i Nord-Norge</a:t>
+              <a:t>Idé: butikk, reparasjon og utleie i samme rom, etter modell av Houdini Circle</a:t>
             </a:r>
           </a:p>
         </p:txBody>
       </p:sp>
       <p:pic>
         <p:nvPicPr>
-          <p:cNvPr id="5" name="Picture 4" descr="tromso_map_final.jpg"/>
+          <p:cNvPr id="5" name="Picture 4" descr="interior_b_c16x9.jpg"/>
           <p:cNvPicPr>
             <a:picLocks noChangeAspect="1"/>
           </p:cNvPicPr>
@@ -14493,8 +16245,8 @@
         </p:blipFill>
         <p:spPr>
           <a:xfrm>
-            <a:off x="457200" y="1645920"/>
-            <a:ext cx="4410221" cy="4526280"/>
+            <a:off x="457200" y="1600200"/>
+            <a:ext cx="7406640" cy="4166235"/>
           </a:xfrm>
           <a:prstGeom prst="rect">
             <a:avLst/>
@@ -14509,8 +16261,8 @@
         </p:nvSpPr>
         <p:spPr>
           <a:xfrm>
-            <a:off x="5233181" y="1645920"/>
-            <a:ext cx="2286000" cy="548640"/>
+            <a:off x="8229600" y="1691640"/>
+            <a:ext cx="3504895" cy="4023360"/>
           </a:xfrm>
           <a:prstGeom prst="rect">
             <a:avLst/>
@@ -14523,19 +16275,54 @@
           </a:bodyPr>
           <a:lstStyle/>
           <a:p>
-            <a:pPr algn="l">
-              <a:spcAft>
-                <a:spcPts val="600"/>
-              </a:spcAft>
-            </a:pPr>
-            <a:r>
-              <a:rPr sz="3000" b="1">
-                <a:solidFill>
-                  <a:srgbClr val="FE6F45"/>
-                </a:solidFill>
-                <a:latin typeface="Inter"/>
-              </a:rPr>
-              <a:t>1,31 mill.</a:t>
+            <a:pPr algn="l" marL="228600" indent="-201168">
+              <a:spcAft>
+                <a:spcPts val="1600"/>
+              </a:spcAft>
+              <a:buChar char="•"/>
+            </a:pPr>
+            <a:r>
+              <a:rPr sz="1600" b="0">
+                <a:solidFill>
+                  <a:srgbClr val="0F0F0F"/>
+                </a:solidFill>
+                <a:latin typeface="Inter"/>
+              </a:rPr>
+              <a:t>Houdini Circle i Stockholm samler kjøp, leie, reparasjon og brukt. Konseptet ble åpnet som test i 2023.</a:t>
+            </a:r>
+          </a:p>
+          <a:p>
+            <a:pPr algn="l" marL="228600" indent="-201168">
+              <a:spcAft>
+                <a:spcPts val="1600"/>
+              </a:spcAft>
+              <a:buChar char="•"/>
+            </a:pPr>
+            <a:r>
+              <a:rPr sz="1600" b="0">
+                <a:solidFill>
+                  <a:srgbClr val="0F0F0F"/>
+                </a:solidFill>
+                <a:latin typeface="Inter"/>
+              </a:rPr>
+              <a:t>Arc’teryx åpnet reparasjon og vask i Karl Johans gate 21 i juni 2026. Et Circle-konsept kan skille Houdini tydelig fra dette.</a:t>
+            </a:r>
+          </a:p>
+          <a:p>
+            <a:pPr algn="l" marL="228600" indent="-201168">
+              <a:spcAft>
+                <a:spcPts val="1600"/>
+              </a:spcAft>
+              <a:buChar char="•"/>
+            </a:pPr>
+            <a:r>
+              <a:rPr sz="1600" b="0">
+                <a:solidFill>
+                  <a:srgbClr val="0F0F0F"/>
+                </a:solidFill>
+                <a:latin typeface="Inter"/>
+              </a:rPr>
+              <a:t>Underetasjen i Akersgata 41 har plass til verksted og utleielager.</a:t>
             </a:r>
           </a:p>
         </p:txBody>
@@ -14543,638 +16330,6 @@
       <p:sp>
         <p:nvSpPr>
           <p:cNvPr id="7" name="TextBox 6"/>
-          <p:cNvSpPr txBox="1"/>
-          <p:nvPr/>
-        </p:nvSpPr>
-        <p:spPr>
-          <a:xfrm>
-            <a:off x="5233181" y="2194560"/>
-            <a:ext cx="2286000" cy="365760"/>
-          </a:xfrm>
-          <a:prstGeom prst="rect">
-            <a:avLst/>
-          </a:prstGeom>
-          <a:noFill/>
-        </p:spPr>
-        <p:txBody>
-          <a:bodyPr wrap="square" anchor="t" lIns="0" rIns="0" tIns="0" bIns="0">
-            <a:spAutoFit/>
-          </a:bodyPr>
-          <a:lstStyle/>
-          <a:p>
-            <a:pPr algn="l">
-              <a:spcAft>
-                <a:spcPts val="600"/>
-              </a:spcAft>
-            </a:pPr>
-            <a:r>
-              <a:rPr sz="1200" b="0">
-                <a:solidFill>
-                  <a:srgbClr val="8A8A86"/>
-                </a:solidFill>
-                <a:latin typeface="Inter"/>
-              </a:rPr>
-              <a:t>gjestedøgn i 2025, +10,3 %</a:t>
-            </a:r>
-          </a:p>
-        </p:txBody>
-      </p:sp>
-      <p:sp>
-        <p:nvSpPr>
-          <p:cNvPr id="8" name="TextBox 7"/>
-          <p:cNvSpPr txBox="1"/>
-          <p:nvPr/>
-        </p:nvSpPr>
-        <p:spPr>
-          <a:xfrm>
-            <a:off x="7610621" y="1645920"/>
-            <a:ext cx="2286000" cy="548640"/>
-          </a:xfrm>
-          <a:prstGeom prst="rect">
-            <a:avLst/>
-          </a:prstGeom>
-          <a:noFill/>
-        </p:spPr>
-        <p:txBody>
-          <a:bodyPr wrap="square" anchor="t" lIns="0" rIns="0" tIns="0" bIns="0">
-            <a:spAutoFit/>
-          </a:bodyPr>
-          <a:lstStyle/>
-          <a:p>
-            <a:pPr algn="l">
-              <a:spcAft>
-                <a:spcPts val="600"/>
-              </a:spcAft>
-            </a:pPr>
-            <a:r>
-              <a:rPr sz="3000" b="1">
-                <a:solidFill>
-                  <a:srgbClr val="FE6F45"/>
-                </a:solidFill>
-                <a:latin typeface="Inter"/>
-              </a:rPr>
-              <a:t>59 %</a:t>
-            </a:r>
-          </a:p>
-        </p:txBody>
-      </p:sp>
-      <p:sp>
-        <p:nvSpPr>
-          <p:cNvPr id="9" name="TextBox 8"/>
-          <p:cNvSpPr txBox="1"/>
-          <p:nvPr/>
-        </p:nvSpPr>
-        <p:spPr>
-          <a:xfrm>
-            <a:off x="7610621" y="2194560"/>
-            <a:ext cx="2286000" cy="365760"/>
-          </a:xfrm>
-          <a:prstGeom prst="rect">
-            <a:avLst/>
-          </a:prstGeom>
-          <a:noFill/>
-        </p:spPr>
-        <p:txBody>
-          <a:bodyPr wrap="square" anchor="t" lIns="0" rIns="0" tIns="0" bIns="0">
-            <a:spAutoFit/>
-          </a:bodyPr>
-          <a:lstStyle/>
-          <a:p>
-            <a:pPr algn="l">
-              <a:spcAft>
-                <a:spcPts val="600"/>
-              </a:spcAft>
-            </a:pPr>
-            <a:r>
-              <a:rPr sz="1200" b="0">
-                <a:solidFill>
-                  <a:srgbClr val="8A8A86"/>
-                </a:solidFill>
-                <a:latin typeface="Inter"/>
-              </a:rPr>
-              <a:t>utenlandske, +20,7 %</a:t>
-            </a:r>
-          </a:p>
-        </p:txBody>
-      </p:sp>
-      <p:sp>
-        <p:nvSpPr>
-          <p:cNvPr id="10" name="Oval 9"/>
-          <p:cNvSpPr/>
-          <p:nvPr/>
-        </p:nvSpPr>
-        <p:spPr>
-          <a:xfrm>
-            <a:off x="5233181" y="2788920"/>
-            <a:ext cx="310896" cy="310896"/>
-          </a:xfrm>
-          <a:prstGeom prst="ellipse">
-            <a:avLst/>
-          </a:prstGeom>
-          <a:solidFill>
-            <a:srgbClr val="FE6F45"/>
-          </a:solidFill>
-          <a:ln>
-            <a:noFill/>
-          </a:ln>
-          <a:effectLst/>
-        </p:spPr>
-        <p:style>
-          <a:lnRef idx="1">
-            <a:schemeClr val="accent1"/>
-          </a:lnRef>
-          <a:fillRef idx="3">
-            <a:schemeClr val="accent1"/>
-          </a:fillRef>
-          <a:effectRef idx="2">
-            <a:schemeClr val="accent1"/>
-          </a:effectRef>
-          <a:fontRef idx="minor">
-            <a:schemeClr val="lt1"/>
-          </a:fontRef>
-        </p:style>
-        <p:txBody>
-          <a:bodyPr rtlCol="0" anchor="ctr" lIns="0" rIns="0" tIns="0" bIns="0"/>
-          <a:lstStyle/>
-          <a:p>
-            <a:pPr algn="ctr"/>
-            <a:r>
-              <a:rPr sz="1200" b="1">
-                <a:solidFill>
-                  <a:srgbClr val="FFFFFF"/>
-                </a:solidFill>
-                <a:latin typeface="Inter"/>
-              </a:rPr>
-              <a:t>H</a:t>
-            </a:r>
-          </a:p>
-        </p:txBody>
-      </p:sp>
-      <p:sp>
-        <p:nvSpPr>
-          <p:cNvPr id="11" name="TextBox 10"/>
-          <p:cNvSpPr txBox="1"/>
-          <p:nvPr/>
-        </p:nvSpPr>
-        <p:spPr>
-          <a:xfrm>
-            <a:off x="5672093" y="2752344"/>
-            <a:ext cx="6062402" cy="411480"/>
-          </a:xfrm>
-          <a:prstGeom prst="rect">
-            <a:avLst/>
-          </a:prstGeom>
-          <a:noFill/>
-        </p:spPr>
-        <p:txBody>
-          <a:bodyPr wrap="square" anchor="t" lIns="0" rIns="0" tIns="0" bIns="0">
-            <a:spAutoFit/>
-          </a:bodyPr>
-          <a:lstStyle/>
-          <a:p>
-            <a:pPr algn="l">
-              <a:spcAft>
-                <a:spcPts val="600"/>
-              </a:spcAft>
-            </a:pPr>
-            <a:r>
-              <a:rPr sz="1200" b="0">
-                <a:solidFill>
-                  <a:srgbClr val="0F0F0F"/>
-                </a:solidFill>
-                <a:latin typeface="Inter"/>
-              </a:rPr>
-              <a:t>Mack Kvartalet, Storgata 5. Houdini, forslag</a:t>
-            </a:r>
-          </a:p>
-        </p:txBody>
-      </p:sp>
-      <p:sp>
-        <p:nvSpPr>
-          <p:cNvPr id="12" name="Oval 11"/>
-          <p:cNvSpPr/>
-          <p:nvPr/>
-        </p:nvSpPr>
-        <p:spPr>
-          <a:xfrm>
-            <a:off x="5233181" y="3172968"/>
-            <a:ext cx="310896" cy="310896"/>
-          </a:xfrm>
-          <a:prstGeom prst="ellipse">
-            <a:avLst/>
-          </a:prstGeom>
-          <a:solidFill>
-            <a:srgbClr val="2D2D2B"/>
-          </a:solidFill>
-          <a:ln>
-            <a:noFill/>
-          </a:ln>
-          <a:effectLst/>
-        </p:spPr>
-        <p:style>
-          <a:lnRef idx="1">
-            <a:schemeClr val="accent1"/>
-          </a:lnRef>
-          <a:fillRef idx="3">
-            <a:schemeClr val="accent1"/>
-          </a:fillRef>
-          <a:effectRef idx="2">
-            <a:schemeClr val="accent1"/>
-          </a:effectRef>
-          <a:fontRef idx="minor">
-            <a:schemeClr val="lt1"/>
-          </a:fontRef>
-        </p:style>
-        <p:txBody>
-          <a:bodyPr rtlCol="0" anchor="ctr" lIns="0" rIns="0" tIns="0" bIns="0"/>
-          <a:lstStyle/>
-          <a:p>
-            <a:pPr algn="ctr"/>
-            <a:r>
-              <a:rPr sz="1200" b="1">
-                <a:solidFill>
-                  <a:srgbClr val="FFFFFF"/>
-                </a:solidFill>
-                <a:latin typeface="Inter"/>
-              </a:rPr>
-              <a:t>1</a:t>
-            </a:r>
-          </a:p>
-        </p:txBody>
-      </p:sp>
-      <p:sp>
-        <p:nvSpPr>
-          <p:cNvPr id="13" name="TextBox 12"/>
-          <p:cNvSpPr txBox="1"/>
-          <p:nvPr/>
-        </p:nvSpPr>
-        <p:spPr>
-          <a:xfrm>
-            <a:off x="5672093" y="3136392"/>
-            <a:ext cx="6062402" cy="411480"/>
-          </a:xfrm>
-          <a:prstGeom prst="rect">
-            <a:avLst/>
-          </a:prstGeom>
-          <a:noFill/>
-        </p:spPr>
-        <p:txBody>
-          <a:bodyPr wrap="square" anchor="t" lIns="0" rIns="0" tIns="0" bIns="0">
-            <a:spAutoFit/>
-          </a:bodyPr>
-          <a:lstStyle/>
-          <a:p>
-            <a:pPr algn="l">
-              <a:spcAft>
-                <a:spcPts val="600"/>
-              </a:spcAft>
-            </a:pPr>
-            <a:r>
-              <a:rPr sz="1200" b="0">
-                <a:solidFill>
-                  <a:srgbClr val="0F0F0F"/>
-                </a:solidFill>
-                <a:latin typeface="Inter"/>
-              </a:rPr>
-              <a:t>Norrøna, Alti Nerstranda. Egen butikkdrift</a:t>
-            </a:r>
-          </a:p>
-        </p:txBody>
-      </p:sp>
-      <p:sp>
-        <p:nvSpPr>
-          <p:cNvPr id="14" name="Oval 13"/>
-          <p:cNvSpPr/>
-          <p:nvPr/>
-        </p:nvSpPr>
-        <p:spPr>
-          <a:xfrm>
-            <a:off x="5233181" y="3557016"/>
-            <a:ext cx="310896" cy="310896"/>
-          </a:xfrm>
-          <a:prstGeom prst="ellipse">
-            <a:avLst/>
-          </a:prstGeom>
-          <a:solidFill>
-            <a:srgbClr val="2D2D2B"/>
-          </a:solidFill>
-          <a:ln>
-            <a:noFill/>
-          </a:ln>
-          <a:effectLst/>
-        </p:spPr>
-        <p:style>
-          <a:lnRef idx="1">
-            <a:schemeClr val="accent1"/>
-          </a:lnRef>
-          <a:fillRef idx="3">
-            <a:schemeClr val="accent1"/>
-          </a:fillRef>
-          <a:effectRef idx="2">
-            <a:schemeClr val="accent1"/>
-          </a:effectRef>
-          <a:fontRef idx="minor">
-            <a:schemeClr val="lt1"/>
-          </a:fontRef>
-        </p:style>
-        <p:txBody>
-          <a:bodyPr rtlCol="0" anchor="ctr" lIns="0" rIns="0" tIns="0" bIns="0"/>
-          <a:lstStyle/>
-          <a:p>
-            <a:pPr algn="ctr"/>
-            <a:r>
-              <a:rPr sz="1200" b="1">
-                <a:solidFill>
-                  <a:srgbClr val="FFFFFF"/>
-                </a:solidFill>
-                <a:latin typeface="Inter"/>
-              </a:rPr>
-              <a:t>2</a:t>
-            </a:r>
-          </a:p>
-        </p:txBody>
-      </p:sp>
-      <p:sp>
-        <p:nvSpPr>
-          <p:cNvPr id="15" name="TextBox 14"/>
-          <p:cNvSpPr txBox="1"/>
-          <p:nvPr/>
-        </p:nvSpPr>
-        <p:spPr>
-          <a:xfrm>
-            <a:off x="5672093" y="3520440"/>
-            <a:ext cx="6062402" cy="411480"/>
-          </a:xfrm>
-          <a:prstGeom prst="rect">
-            <a:avLst/>
-          </a:prstGeom>
-          <a:noFill/>
-        </p:spPr>
-        <p:txBody>
-          <a:bodyPr wrap="square" anchor="t" lIns="0" rIns="0" tIns="0" bIns="0">
-            <a:spAutoFit/>
-          </a:bodyPr>
-          <a:lstStyle/>
-          <a:p>
-            <a:pPr algn="l">
-              <a:spcAft>
-                <a:spcPts val="600"/>
-              </a:spcAft>
-            </a:pPr>
-            <a:r>
-              <a:rPr sz="1200" b="0">
-                <a:solidFill>
-                  <a:srgbClr val="0F0F0F"/>
-                </a:solidFill>
-                <a:latin typeface="Inter"/>
-              </a:rPr>
-              <a:t>Bergans, Prostneset havneterminal</a:t>
-            </a:r>
-          </a:p>
-        </p:txBody>
-      </p:sp>
-      <p:sp>
-        <p:nvSpPr>
-          <p:cNvPr id="16" name="Oval 15"/>
-          <p:cNvSpPr/>
-          <p:nvPr/>
-        </p:nvSpPr>
-        <p:spPr>
-          <a:xfrm>
-            <a:off x="5233181" y="3941064"/>
-            <a:ext cx="310896" cy="310896"/>
-          </a:xfrm>
-          <a:prstGeom prst="ellipse">
-            <a:avLst/>
-          </a:prstGeom>
-          <a:solidFill>
-            <a:srgbClr val="2D2D2B"/>
-          </a:solidFill>
-          <a:ln>
-            <a:noFill/>
-          </a:ln>
-          <a:effectLst/>
-        </p:spPr>
-        <p:style>
-          <a:lnRef idx="1">
-            <a:schemeClr val="accent1"/>
-          </a:lnRef>
-          <a:fillRef idx="3">
-            <a:schemeClr val="accent1"/>
-          </a:fillRef>
-          <a:effectRef idx="2">
-            <a:schemeClr val="accent1"/>
-          </a:effectRef>
-          <a:fontRef idx="minor">
-            <a:schemeClr val="lt1"/>
-          </a:fontRef>
-        </p:style>
-        <p:txBody>
-          <a:bodyPr rtlCol="0" anchor="ctr" lIns="0" rIns="0" tIns="0" bIns="0"/>
-          <a:lstStyle/>
-          <a:p>
-            <a:pPr algn="ctr"/>
-            <a:r>
-              <a:rPr sz="1200" b="1">
-                <a:solidFill>
-                  <a:srgbClr val="FFFFFF"/>
-                </a:solidFill>
-                <a:latin typeface="Inter"/>
-              </a:rPr>
-              <a:t>3</a:t>
-            </a:r>
-          </a:p>
-        </p:txBody>
-      </p:sp>
-      <p:sp>
-        <p:nvSpPr>
-          <p:cNvPr id="17" name="TextBox 16"/>
-          <p:cNvSpPr txBox="1"/>
-          <p:nvPr/>
-        </p:nvSpPr>
-        <p:spPr>
-          <a:xfrm>
-            <a:off x="5672093" y="3904488"/>
-            <a:ext cx="6062402" cy="411480"/>
-          </a:xfrm>
-          <a:prstGeom prst="rect">
-            <a:avLst/>
-          </a:prstGeom>
-          <a:noFill/>
-        </p:spPr>
-        <p:txBody>
-          <a:bodyPr wrap="square" anchor="t" lIns="0" rIns="0" tIns="0" bIns="0">
-            <a:spAutoFit/>
-          </a:bodyPr>
-          <a:lstStyle/>
-          <a:p>
-            <a:pPr algn="l">
-              <a:spcAft>
-                <a:spcPts val="600"/>
-              </a:spcAft>
-            </a:pPr>
-            <a:r>
-              <a:rPr sz="1200" b="0">
-                <a:solidFill>
-                  <a:srgbClr val="0F0F0F"/>
-                </a:solidFill>
-                <a:latin typeface="Inter"/>
-              </a:rPr>
-              <a:t>Naturkompaniet, Storgata 52. Fenix Outdoor</a:t>
-            </a:r>
-          </a:p>
-        </p:txBody>
-      </p:sp>
-      <p:sp>
-        <p:nvSpPr>
-          <p:cNvPr id="18" name="Oval 17"/>
-          <p:cNvSpPr/>
-          <p:nvPr/>
-        </p:nvSpPr>
-        <p:spPr>
-          <a:xfrm>
-            <a:off x="5233181" y="4325112"/>
-            <a:ext cx="310896" cy="310896"/>
-          </a:xfrm>
-          <a:prstGeom prst="ellipse">
-            <a:avLst/>
-          </a:prstGeom>
-          <a:solidFill>
-            <a:srgbClr val="2D2D2B"/>
-          </a:solidFill>
-          <a:ln>
-            <a:noFill/>
-          </a:ln>
-          <a:effectLst/>
-        </p:spPr>
-        <p:style>
-          <a:lnRef idx="1">
-            <a:schemeClr val="accent1"/>
-          </a:lnRef>
-          <a:fillRef idx="3">
-            <a:schemeClr val="accent1"/>
-          </a:fillRef>
-          <a:effectRef idx="2">
-            <a:schemeClr val="accent1"/>
-          </a:effectRef>
-          <a:fontRef idx="minor">
-            <a:schemeClr val="lt1"/>
-          </a:fontRef>
-        </p:style>
-        <p:txBody>
-          <a:bodyPr rtlCol="0" anchor="ctr" lIns="0" rIns="0" tIns="0" bIns="0"/>
-          <a:lstStyle/>
-          <a:p>
-            <a:pPr algn="ctr"/>
-            <a:r>
-              <a:rPr sz="1200" b="1">
-                <a:solidFill>
-                  <a:srgbClr val="FFFFFF"/>
-                </a:solidFill>
-                <a:latin typeface="Inter"/>
-              </a:rPr>
-              <a:t>4</a:t>
-            </a:r>
-          </a:p>
-        </p:txBody>
-      </p:sp>
-      <p:sp>
-        <p:nvSpPr>
-          <p:cNvPr id="19" name="TextBox 18"/>
-          <p:cNvSpPr txBox="1"/>
-          <p:nvPr/>
-        </p:nvSpPr>
-        <p:spPr>
-          <a:xfrm>
-            <a:off x="5672093" y="4288536"/>
-            <a:ext cx="6062402" cy="411480"/>
-          </a:xfrm>
-          <a:prstGeom prst="rect">
-            <a:avLst/>
-          </a:prstGeom>
-          <a:noFill/>
-        </p:spPr>
-        <p:txBody>
-          <a:bodyPr wrap="square" anchor="t" lIns="0" rIns="0" tIns="0" bIns="0">
-            <a:spAutoFit/>
-          </a:bodyPr>
-          <a:lstStyle/>
-          <a:p>
-            <a:pPr algn="l">
-              <a:spcAft>
-                <a:spcPts val="600"/>
-              </a:spcAft>
-            </a:pPr>
-            <a:r>
-              <a:rPr sz="1200" b="0">
-                <a:solidFill>
-                  <a:srgbClr val="0F0F0F"/>
-                </a:solidFill>
-                <a:latin typeface="Inter"/>
-              </a:rPr>
-              <a:t>Nansen Outdoor, Storgata 61. Helly Hansen</a:t>
-            </a:r>
-          </a:p>
-        </p:txBody>
-      </p:sp>
-      <p:sp>
-        <p:nvSpPr>
-          <p:cNvPr id="20" name="TextBox 19"/>
-          <p:cNvSpPr txBox="1"/>
-          <p:nvPr/>
-        </p:nvSpPr>
-        <p:spPr>
-          <a:xfrm>
-            <a:off x="5233181" y="4800600"/>
-            <a:ext cx="6501314" cy="1188720"/>
-          </a:xfrm>
-          <a:prstGeom prst="rect">
-            <a:avLst/>
-          </a:prstGeom>
-          <a:noFill/>
-        </p:spPr>
-        <p:txBody>
-          <a:bodyPr wrap="square" anchor="t" lIns="0" rIns="0" tIns="0" bIns="0">
-            <a:spAutoFit/>
-          </a:bodyPr>
-          <a:lstStyle/>
-          <a:p>
-            <a:pPr algn="l">
-              <a:spcAft>
-                <a:spcPts val="600"/>
-              </a:spcAft>
-            </a:pPr>
-            <a:r>
-              <a:rPr sz="1200" b="0">
-                <a:solidFill>
-                  <a:srgbClr val="0F0F0F"/>
-                </a:solidFill>
-                <a:latin typeface="Inter"/>
-              </a:rPr>
-              <a:t>Utenfor kartet: Tromsø Ski &amp; Sykkel 48 MNOK, Pyramiden Sport 42 MNOK og Sport 1 Jekta 38 MNOK (2025). De fører blant annet Arc’teryx og Norrøna.</a:t>
-            </a:r>
-          </a:p>
-          <a:p>
-            <a:pPr algn="l">
-              <a:spcAft>
-                <a:spcPts val="600"/>
-              </a:spcAft>
-            </a:pPr>
-            <a:r>
-              <a:rPr sz="1200" b="0">
-                <a:solidFill>
-                  <a:srgbClr val="0F0F0F"/>
-                </a:solidFill>
-                <a:latin typeface="Inter"/>
-              </a:rPr>
-              <a:t>Oransje strek: kaiene mellom Mack og Strandtorget, eid av Tromsø Havn.</a:t>
-            </a:r>
-          </a:p>
-        </p:txBody>
-      </p:sp>
-      <p:sp>
-        <p:nvSpPr>
-          <p:cNvPr id="21" name="TextBox 20"/>
           <p:cNvSpPr txBox="1"/>
           <p:nvPr/>
         </p:nvSpPr>
@@ -15206,7 +16361,7 @@
                 </a:solidFill>
                 <a:latin typeface="Inter"/>
               </a:rPr>
-              <a:t>Plassering ca. Kilder: Visit Tromsø 2025 (Airbnb ikke med), Proff via søk 24.10.2026, Alti Nerstranda, Bergans, OI Compass 2023, Visit Norway, Tromsø Havn. Kart: © OpenStreetMap-bidragsytere.</a:t>
+              <a:t>Illustrasjon av konsept. Kilder: houdinisportswear.com og Suston Magazine 02.10.2023 (Houdini Circle), FashionUnited 23.06.2026 (Arc’teryx ReBIRD).</a:t>
             </a:r>
           </a:p>
         </p:txBody>
